--- a/deck/Working.pptx
+++ b/deck/Working.pptx
@@ -4,22 +4,22 @@
   <p:sldMasterIdLst>
     <p:sldMasterId id="2147483648" r:id="rId1"/>
   </p:sldMasterIdLst>
+  <p:notesMasterIdLst>
+    <p:notesMasterId r:id="rId11"/>
+  </p:notesMasterIdLst>
   <p:sldIdLst>
     <p:sldId id="256" r:id="rId2"/>
     <p:sldId id="257" r:id="rId3"/>
-    <p:sldId id="258" r:id="rId4"/>
+    <p:sldId id="262" r:id="rId4"/>
     <p:sldId id="259" r:id="rId5"/>
     <p:sldId id="260" r:id="rId6"/>
     <p:sldId id="261" r:id="rId7"/>
-    <p:sldId id="262" r:id="rId8"/>
-    <p:sldId id="263" r:id="rId9"/>
+    <p:sldId id="263" r:id="rId8"/>
+    <p:sldId id="258" r:id="rId9"/>
     <p:sldId id="264" r:id="rId10"/>
   </p:sldIdLst>
-  <p:notesMasterIdLst>
-    <p:notesMasterId r:id="rId11"/>
-  </p:notesMasterIdLst>
-  <p:sldSz cx="12191695" cy="6858000"/>
-  <p:notesSz cx="6858000" cy="12191695"/>
+  <p:sldSz cx="12192000" cy="6858000"/>
+  <p:notesSz cx="6858000" cy="12192000"/>
   <p:defaultTextStyle>
     <a:lvl1pPr marL="0" algn="l" defTabSz="914400" rtl="0" eaLnBrk="1" latinLnBrk="0" hangingPunct="1">
       <a:defRPr sz="1800" kern="1200">
@@ -112,6 +112,11 @@
       </a:defRPr>
     </a:lvl9pPr>
   </p:defaultTextStyle>
+  <p:extLst>
+    <p:ext uri="{EFAFB233-063F-42B5-8137-9DF3F51BA10A}">
+      <p15:sldGuideLst xmlns:p15="http://schemas.microsoft.com/office/powerpoint/2012/main"/>
+    </p:ext>
+  </p:extLst>
 </p:presentation>
 </file>
 
@@ -137,234 +142,10 @@
           <a:chExt cx="0" cy="0"/>
         </a:xfrm>
       </p:grpSpPr>
-      <p:sp>
-        <p:nvSpPr>
-          <p:cNvPr id="2" name="Header Placeholder 1"/>
-          <p:cNvSpPr>
-            <a:spLocks noGrp="1"/>
-          </p:cNvSpPr>
-          <p:nvPr>
-            <p:ph type="hdr" sz="quarter"/>
-          </p:nvPr>
-        </p:nvSpPr>
-        <p:spPr>
-          <a:xfrm>
-            <a:off x="0" y="0"/>
-            <a:ext cx="2971800" cy="458788"/>
-          </a:xfrm>
-          <a:prstGeom prst="rect">
-            <a:avLst/>
-          </a:prstGeom>
-        </p:spPr>
-        <p:txBody>
-          <a:bodyPr vert="horz" lIns="91440" tIns="45720" rIns="91440" bIns="45720" rtlCol="0"/>
-          <a:lstStyle>
-            <a:lvl1pPr algn="l">
-              <a:defRPr sz="1200"/>
-            </a:lvl1pPr>
-          </a:lstStyle>
-          <a:p>
-            <a:endParaRPr lang="en-US"/>
-          </a:p>
-        </p:txBody>
-      </p:sp>
-      <p:sp>
-        <p:nvSpPr>
-          <p:cNvPr id="3" name="Date Placeholder 2"/>
-          <p:cNvSpPr>
-            <a:spLocks noGrp="1"/>
-          </p:cNvSpPr>
-          <p:nvPr>
-            <p:ph type="dt" idx="1"/>
-          </p:nvPr>
-        </p:nvSpPr>
-        <p:spPr>
-          <a:xfrm>
-            <a:off x="3884613" y="0"/>
-            <a:ext cx="2971800" cy="458788"/>
-          </a:xfrm>
-          <a:prstGeom prst="rect">
-            <a:avLst/>
-          </a:prstGeom>
-        </p:spPr>
-        <p:txBody>
-          <a:bodyPr vert="horz" lIns="91440" tIns="45720" rIns="91440" bIns="45720" rtlCol="0"/>
-          <a:lstStyle>
-            <a:lvl1pPr algn="r">
-              <a:defRPr sz="1200"/>
-            </a:lvl1pPr>
-          </a:lstStyle>
-          <a:p>
-            <a:fld id="{5282F153-3F37-0F45-9E97-73ACFA13230C}" type="datetimeFigureOut">
-              <a:rPr lang="en-US"/>
-              <a:t>7/23/19</a:t>
-            </a:fld>
-            <a:endParaRPr lang="en-US"/>
-          </a:p>
-        </p:txBody>
-      </p:sp>
-      <p:sp>
-        <p:nvSpPr>
-          <p:cNvPr id="4" name="Slide Image Placeholder 3"/>
-          <p:cNvSpPr>
-            <a:spLocks noGrp="1" noRot="1" noChangeAspect="1"/>
-          </p:cNvSpPr>
-          <p:nvPr>
-            <p:ph type="sldImg" idx="2"/>
-          </p:nvPr>
-        </p:nvSpPr>
-        <p:spPr>
-          <a:xfrm>
-            <a:off x="685800" y="1143000"/>
-            <a:ext cx="5486400" cy="3086100"/>
-          </a:xfrm>
-          <a:prstGeom prst="rect">
-            <a:avLst/>
-          </a:prstGeom>
-          <a:noFill/>
-          <a:ln w="12700">
-            <a:solidFill>
-              <a:prstClr val="black"/>
-            </a:solidFill>
-          </a:ln>
-        </p:spPr>
-        <p:txBody>
-          <a:bodyPr vert="horz" lIns="91440" tIns="45720" rIns="91440" bIns="45720" rtlCol="0" anchor="ctr"/>
-          <a:lstStyle/>
-          <a:p>
-            <a:endParaRPr lang="en-US"/>
-          </a:p>
-        </p:txBody>
-      </p:sp>
-      <p:sp>
-        <p:nvSpPr>
-          <p:cNvPr id="5" name="Notes Placeholder 4"/>
-          <p:cNvSpPr>
-            <a:spLocks noGrp="1"/>
-          </p:cNvSpPr>
-          <p:nvPr>
-            <p:ph type="body" sz="quarter" idx="3"/>
-          </p:nvPr>
-        </p:nvSpPr>
-        <p:spPr>
-          <a:xfrm>
-            <a:off x="685800" y="4400550"/>
-            <a:ext cx="5486400" cy="3600450"/>
-          </a:xfrm>
-          <a:prstGeom prst="rect">
-            <a:avLst/>
-          </a:prstGeom>
-        </p:spPr>
-        <p:txBody>
-          <a:bodyPr vert="horz" lIns="91440" tIns="45720" rIns="91440" bIns="45720" rtlCol="0"/>
-          <a:lstStyle/>
-          <a:p>
-            <a:pPr lvl="0"/>
-            <a:r>
-              <a:rPr lang="en-US"/>
-              <a:t>Click to edit Master text styles</a:t>
-            </a:r>
-          </a:p>
-          <a:p>
-            <a:pPr lvl="1"/>
-            <a:r>
-              <a:rPr lang="en-US"/>
-              <a:t>Second level</a:t>
-            </a:r>
-          </a:p>
-          <a:p>
-            <a:pPr lvl="2"/>
-            <a:r>
-              <a:rPr lang="en-US"/>
-              <a:t>Third level</a:t>
-            </a:r>
-          </a:p>
-          <a:p>
-            <a:pPr lvl="3"/>
-            <a:r>
-              <a:rPr lang="en-US"/>
-              <a:t>Fourth level</a:t>
-            </a:r>
-          </a:p>
-          <a:p>
-            <a:pPr lvl="4"/>
-            <a:r>
-              <a:rPr lang="en-US"/>
-              <a:t>Fifth level</a:t>
-            </a:r>
-          </a:p>
-        </p:txBody>
-      </p:sp>
-      <p:sp>
-        <p:nvSpPr>
-          <p:cNvPr id="6" name="Footer Placeholder 5"/>
-          <p:cNvSpPr>
-            <a:spLocks noGrp="1"/>
-          </p:cNvSpPr>
-          <p:nvPr>
-            <p:ph type="ftr" sz="quarter" idx="4"/>
-          </p:nvPr>
-        </p:nvSpPr>
-        <p:spPr>
-          <a:xfrm>
-            <a:off x="0" y="8685213"/>
-            <a:ext cx="2971800" cy="458787"/>
-          </a:xfrm>
-          <a:prstGeom prst="rect">
-            <a:avLst/>
-          </a:prstGeom>
-        </p:spPr>
-        <p:txBody>
-          <a:bodyPr vert="horz" lIns="91440" tIns="45720" rIns="91440" bIns="45720" rtlCol="0" anchor="b"/>
-          <a:lstStyle>
-            <a:lvl1pPr algn="l">
-              <a:defRPr sz="1200"/>
-            </a:lvl1pPr>
-          </a:lstStyle>
-          <a:p>
-            <a:endParaRPr lang="en-US"/>
-          </a:p>
-        </p:txBody>
-      </p:sp>
-      <p:sp>
-        <p:nvSpPr>
-          <p:cNvPr id="7" name="Slide Number Placeholder 6"/>
-          <p:cNvSpPr>
-            <a:spLocks noGrp="1"/>
-          </p:cNvSpPr>
-          <p:nvPr>
-            <p:ph type="sldNum" sz="quarter" idx="5"/>
-          </p:nvPr>
-        </p:nvSpPr>
-        <p:spPr>
-          <a:xfrm>
-            <a:off x="3884613" y="8685213"/>
-            <a:ext cx="2971800" cy="458787"/>
-          </a:xfrm>
-          <a:prstGeom prst="rect">
-            <a:avLst/>
-          </a:prstGeom>
-        </p:spPr>
-        <p:txBody>
-          <a:bodyPr vert="horz" lIns="91440" tIns="45720" rIns="91440" bIns="45720" rtlCol="0" anchor="b"/>
-          <a:lstStyle>
-            <a:lvl1pPr algn="r">
-              <a:defRPr sz="1200"/>
-            </a:lvl1pPr>
-          </a:lstStyle>
-          <a:p>
-            <a:fld id="{CE5E9CC1-C706-0F49-92D6-E571CC5EEA8F}" type="slidenum">
-              <a:rPr lang="en-US"/>
-              <a:t>‹#›</a:t>
-            </a:fld>
-            <a:endParaRPr lang="en-US"/>
-          </a:p>
-        </p:txBody>
-      </p:sp>
     </p:spTree>
     <p:extLst>
       <p:ext uri="{BB962C8B-B14F-4D97-AF65-F5344CB8AC3E}">
-        <p14:creationId xmlns:p14="http://schemas.microsoft.com/office/powerpoint/2010/main" val="1024086991"/>
+        <p14:creationId xmlns:p14="http://schemas.microsoft.com/office/powerpoint/2010/main" val="4131564298"/>
       </p:ext>
     </p:extLst>
   </p:cSld>
@@ -508,10 +289,6 @@
           <a:bodyPr/>
           <a:lstStyle/>
           <a:p>
-            <a:r>
-              <a:rPr lang="en-US" dirty="0"/>
-              <a:t/>
-            </a:r>
             <a:endParaRPr lang="en-US" dirty="0"/>
           </a:p>
         </p:txBody>
@@ -596,10 +373,6 @@
           <a:bodyPr/>
           <a:lstStyle/>
           <a:p>
-            <a:r>
-              <a:rPr lang="en-US" dirty="0"/>
-              <a:t/>
-            </a:r>
             <a:endParaRPr lang="en-US" dirty="0"/>
           </a:p>
         </p:txBody>
@@ -684,10 +457,6 @@
           <a:bodyPr/>
           <a:lstStyle/>
           <a:p>
-            <a:r>
-              <a:rPr lang="en-US" dirty="0"/>
-              <a:t/>
-            </a:r>
             <a:endParaRPr lang="en-US" dirty="0"/>
           </a:p>
         </p:txBody>
@@ -772,10 +541,6 @@
           <a:bodyPr/>
           <a:lstStyle/>
           <a:p>
-            <a:r>
-              <a:rPr lang="en-US" dirty="0"/>
-              <a:t/>
-            </a:r>
             <a:endParaRPr lang="en-US" dirty="0"/>
           </a:p>
         </p:txBody>
@@ -860,10 +625,6 @@
           <a:bodyPr/>
           <a:lstStyle/>
           <a:p>
-            <a:r>
-              <a:rPr lang="en-US" dirty="0"/>
-              <a:t/>
-            </a:r>
             <a:endParaRPr lang="en-US" dirty="0"/>
           </a:p>
         </p:txBody>
@@ -948,10 +709,6 @@
           <a:bodyPr/>
           <a:lstStyle/>
           <a:p>
-            <a:r>
-              <a:rPr lang="en-US" dirty="0"/>
-              <a:t/>
-            </a:r>
             <a:endParaRPr lang="en-US" dirty="0"/>
           </a:p>
         </p:txBody>
@@ -1036,10 +793,6 @@
           <a:bodyPr/>
           <a:lstStyle/>
           <a:p>
-            <a:r>
-              <a:rPr lang="en-US" dirty="0"/>
-              <a:t/>
-            </a:r>
             <a:endParaRPr lang="en-US" dirty="0"/>
           </a:p>
         </p:txBody>
@@ -1124,10 +877,6 @@
           <a:bodyPr/>
           <a:lstStyle/>
           <a:p>
-            <a:r>
-              <a:rPr lang="en-US" dirty="0"/>
-              <a:t/>
-            </a:r>
             <a:endParaRPr lang="en-US" dirty="0"/>
           </a:p>
         </p:txBody>
@@ -1212,10 +961,6 @@
           <a:bodyPr/>
           <a:lstStyle/>
           <a:p>
-            <a:r>
-              <a:rPr lang="en-US" dirty="0"/>
-              <a:t/>
-            </a:r>
             <a:endParaRPr lang="en-US" dirty="0"/>
           </a:p>
         </p:txBody>
@@ -1289,6 +1034,11 @@
 <file path=ppt/slideMasters/slideMaster1.xml><?xml version="1.0" encoding="utf-8"?>
 <p:sldMaster xmlns:a="http://schemas.openxmlformats.org/drawingml/2006/main" xmlns:r="http://schemas.openxmlformats.org/officeDocument/2006/relationships" xmlns:p="http://schemas.openxmlformats.org/presentationml/2006/main">
   <p:cSld>
+    <p:bg>
+      <p:bgRef idx="1001">
+        <a:schemeClr val="bg1"/>
+      </p:bgRef>
+    </p:bg>
     <p:spTree>
       <p:nvGrpSpPr>
         <p:cNvPr id="1" name=""/>
@@ -1571,6 +1321,7 @@
         <a:solidFill>
           <a:srgbClr val="F7F4EC"/>
         </a:solidFill>
+        <a:effectLst/>
       </p:bgPr>
     </p:bg>
     <p:spTree>
@@ -1633,7 +1384,7 @@
           <a:bodyPr wrap="square" lIns="0" tIns="0" rIns="0" bIns="0" rtlCol="0" anchor="ctr"/>
           <a:lstStyle/>
           <a:p>
-            <a:pPr algn="ctr" indent="0" marL="0">
+            <a:pPr marL="0" indent="0" algn="ctr">
               <a:buNone/>
             </a:pPr>
             <a:r>
@@ -1672,11 +1423,11 @@
           <a:bodyPr wrap="square" lIns="0" tIns="0" rIns="0" bIns="0" rtlCol="0" anchor="ctr"/>
           <a:lstStyle/>
           <a:p>
-            <a:pPr indent="0" marL="0">
+            <a:pPr marL="0" indent="0">
               <a:buNone/>
             </a:pPr>
             <a:r>
-              <a:rPr lang="en-US" sz="1100" b="1" spc="100" kern="0" dirty="0">
+              <a:rPr lang="en-US" sz="1100" b="1" kern="0" spc="100" dirty="0">
                 <a:solidFill>
                   <a:srgbClr val="6B6B6B"/>
                 </a:solidFill>
@@ -1711,7 +1462,7 @@
           <a:bodyPr wrap="square" lIns="0" tIns="0" rIns="0" bIns="0" rtlCol="0" anchor="ctr"/>
           <a:lstStyle/>
           <a:p>
-            <a:pPr indent="0" marL="0">
+            <a:pPr marL="0" indent="0">
               <a:buNone/>
             </a:pPr>
             <a:r>
@@ -1725,9 +1476,6 @@
               </a:rPr>
               <a:t>WORKING</a:t>
             </a:r>
-            <a:pPr indent="0" marL="0">
-              <a:buNone/>
-            </a:pPr>
             <a:r>
               <a:rPr lang="en-US" sz="11500" dirty="0">
                 <a:solidFill>
@@ -1764,7 +1512,7 @@
           <a:bodyPr wrap="square" lIns="0" tIns="0" rIns="0" bIns="0" rtlCol="0" anchor="ctr"/>
           <a:lstStyle/>
           <a:p>
-            <a:pPr indent="0" marL="0">
+            <a:pPr marL="0" indent="0">
               <a:buNone/>
             </a:pPr>
             <a:r>
@@ -1803,7 +1551,7 @@
           <a:bodyPr wrap="square" lIns="0" tIns="0" rIns="0" bIns="0" rtlCol="0" anchor="ctr"/>
           <a:lstStyle/>
           <a:p>
-            <a:pPr indent="0" marL="0">
+            <a:pPr marL="0" indent="0">
               <a:buNone/>
             </a:pPr>
             <a:r>
@@ -1817,9 +1565,6 @@
               </a:rPr>
               <a:t>Preguntamos </a:t>
             </a:r>
-            <a:pPr indent="0" marL="0">
-              <a:buNone/>
-            </a:pPr>
             <a:r>
               <a:rPr lang="en-US" sz="2600" dirty="0">
                 <a:solidFill>
@@ -1831,9 +1576,6 @@
               </a:rPr>
               <a:t>qué sabes hacer</a:t>
             </a:r>
-            <a:pPr indent="0" marL="0">
-              <a:buNone/>
-            </a:pPr>
             <a:r>
               <a:rPr lang="en-US" sz="2600" dirty="0">
                 <a:solidFill>
@@ -1870,7 +1612,7 @@
           <a:bodyPr wrap="square" lIns="0" tIns="0" rIns="0" bIns="0" rtlCol="0" anchor="ctr"/>
           <a:lstStyle/>
           <a:p>
-            <a:pPr indent="0" marL="0">
+            <a:pPr marL="0" indent="0">
               <a:lnSpc>
                 <a:spcPct val="125000"/>
               </a:lnSpc>
@@ -1881,16 +1623,18 @@
                 <a:solidFill>
                   <a:srgbClr val="333333"/>
                 </a:solidFill>
-                <a:latin typeface="Arial" pitchFamily="34" charset="0"/>
+                <a:latin typeface="Bahnschrift SemiLight" panose="020B0502040204020203" pitchFamily="34" charset="0"/>
                 <a:ea typeface="Arial" pitchFamily="34" charset="-122"/>
                 <a:cs typeface="Arial" pitchFamily="34" charset="-120"/>
               </a:rPr>
               <a:t>Plataforma de freelancing para estudiantes y recién egresados en Bolivia.</a:t>
             </a:r>
-            <a:endParaRPr lang="en-US" sz="1500" dirty="0"/>
-          </a:p>
-          <a:p>
-            <a:pPr indent="0" marL="0">
+            <a:endParaRPr lang="en-US" sz="1500" dirty="0">
+              <a:latin typeface="Bahnschrift SemiLight" panose="020B0502040204020203" pitchFamily="34" charset="0"/>
+            </a:endParaRPr>
+          </a:p>
+          <a:p>
+            <a:pPr marL="0" indent="0">
               <a:lnSpc>
                 <a:spcPct val="125000"/>
               </a:lnSpc>
@@ -1901,49 +1645,51 @@
                 <a:solidFill>
                   <a:srgbClr val="333333"/>
                 </a:solidFill>
+                <a:latin typeface="Bahnschrift SemiLight" panose="020B0502040204020203" pitchFamily="34" charset="0"/>
+                <a:ea typeface="Arial" pitchFamily="34" charset="-122"/>
+                <a:cs typeface="Arial" pitchFamily="34" charset="-120"/>
+              </a:rPr>
+              <a:t>Pagos protegidos por contrato inteligente en Stellar.</a:t>
+            </a:r>
+            <a:endParaRPr lang="en-US" sz="1500" dirty="0">
+              <a:latin typeface="Bahnschrift SemiLight" panose="020B0502040204020203" pitchFamily="34" charset="0"/>
+            </a:endParaRPr>
+          </a:p>
+        </p:txBody>
+      </p:sp>
+      <p:sp>
+        <p:nvSpPr>
+          <p:cNvPr id="9" name="Text 7"/>
+          <p:cNvSpPr txBox="1"/>
+          <p:nvPr/>
+        </p:nvSpPr>
+        <p:spPr>
+          <a:xfrm>
+            <a:off x="594360" y="6419088"/>
+            <a:ext cx="8229600" cy="301752"/>
+          </a:xfrm>
+          <a:prstGeom prst="rect">
+            <a:avLst/>
+          </a:prstGeom>
+          <a:noFill/>
+          <a:ln/>
+        </p:spPr>
+        <p:txBody>
+          <a:bodyPr wrap="square" lIns="0" tIns="0" rIns="0" bIns="0" rtlCol="0" anchor="ctr"/>
+          <a:lstStyle/>
+          <a:p>
+            <a:pPr marL="0" indent="0">
+              <a:buNone/>
+            </a:pPr>
+            <a:r>
+              <a:rPr lang="en-US" sz="1000" b="1" kern="0" spc="100" dirty="0">
+                <a:solidFill>
+                  <a:srgbClr val="6B6B6B"/>
+                </a:solidFill>
                 <a:latin typeface="Arial" pitchFamily="34" charset="0"/>
                 <a:ea typeface="Arial" pitchFamily="34" charset="-122"/>
                 <a:cs typeface="Arial" pitchFamily="34" charset="-120"/>
               </a:rPr>
-              <a:t>Pagos protegidos por contrato inteligente en Stellar.</a:t>
-            </a:r>
-            <a:endParaRPr lang="en-US" sz="1500" dirty="0"/>
-          </a:p>
-        </p:txBody>
-      </p:sp>
-      <p:sp>
-        <p:nvSpPr>
-          <p:cNvPr id="9" name="Text 7"/>
-          <p:cNvSpPr txBox="1"/>
-          <p:nvPr/>
-        </p:nvSpPr>
-        <p:spPr>
-          <a:xfrm>
-            <a:off x="594360" y="6419088"/>
-            <a:ext cx="8229600" cy="301752"/>
-          </a:xfrm>
-          <a:prstGeom prst="rect">
-            <a:avLst/>
-          </a:prstGeom>
-          <a:noFill/>
-          <a:ln/>
-        </p:spPr>
-        <p:txBody>
-          <a:bodyPr wrap="square" lIns="0" tIns="0" rIns="0" bIns="0" rtlCol="0" anchor="ctr"/>
-          <a:lstStyle/>
-          <a:p>
-            <a:pPr indent="0" marL="0">
-              <a:buNone/>
-            </a:pPr>
-            <a:r>
-              <a:rPr lang="en-US" sz="1000" b="1" spc="100" kern="0" dirty="0">
-                <a:solidFill>
-                  <a:srgbClr val="6B6B6B"/>
-                </a:solidFill>
-                <a:latin typeface="Arial" pitchFamily="34" charset="0"/>
-                <a:ea typeface="Arial" pitchFamily="34" charset="-122"/>
-                <a:cs typeface="Arial" pitchFamily="34" charset="-120"/>
-              </a:rPr>
               <a:t>IDEATÓN STELLAR BOLIVIA 2026  ·  WORKING</a:t>
             </a:r>
             <a:endParaRPr lang="en-US" sz="1000" dirty="0"/>
@@ -1971,7 +1717,7 @@
           <a:bodyPr wrap="square" lIns="0" tIns="0" rIns="0" bIns="0" rtlCol="0" anchor="ctr"/>
           <a:lstStyle/>
           <a:p>
-            <a:pPr algn="r" indent="0" marL="0">
+            <a:pPr marL="0" indent="0" algn="r">
               <a:buNone/>
             </a:pPr>
             <a:r>
@@ -2005,6 +1751,7 @@
         <a:solidFill>
           <a:srgbClr val="F7F4EC"/>
         </a:solidFill>
+        <a:effectLst/>
       </p:bgPr>
     </p:bg>
     <p:spTree>
@@ -2042,11 +1789,11 @@
           <a:bodyPr wrap="square" lIns="0" tIns="0" rIns="0" bIns="0" rtlCol="0" anchor="ctr"/>
           <a:lstStyle/>
           <a:p>
-            <a:pPr indent="0" marL="0">
+            <a:pPr marL="0" indent="0">
               <a:buNone/>
             </a:pPr>
             <a:r>
-              <a:rPr lang="en-US" sz="1200" spc="200" kern="0" dirty="0">
+              <a:rPr lang="en-US" sz="1200" kern="0" spc="200" dirty="0">
                 <a:solidFill>
                   <a:srgbClr val="E4572E"/>
                 </a:solidFill>
@@ -2081,7 +1828,7 @@
           <a:bodyPr wrap="square" lIns="0" tIns="0" rIns="0" bIns="0" rtlCol="0" anchor="ctr"/>
           <a:lstStyle/>
           <a:p>
-            <a:pPr indent="0" marL="0">
+            <a:pPr marL="0" indent="0">
               <a:buNone/>
             </a:pPr>
             <a:r>
@@ -2095,9 +1842,6 @@
               </a:rPr>
               <a:t>NADIE CONFÍA, </a:t>
             </a:r>
-            <a:pPr indent="0" marL="0">
-              <a:buNone/>
-            </a:pPr>
             <a:r>
               <a:rPr lang="en-US" sz="3400" dirty="0">
                 <a:solidFill>
@@ -2134,7 +1878,7 @@
           <a:bodyPr wrap="square" lIns="0" tIns="0" rIns="0" bIns="0" rtlCol="0" anchor="ctr"/>
           <a:lstStyle/>
           <a:p>
-            <a:pPr indent="0" marL="0">
+            <a:pPr marL="0" indent="0">
               <a:buNone/>
             </a:pPr>
             <a:r>
@@ -2218,7 +1962,7 @@
           <a:bodyPr wrap="square" lIns="0" tIns="0" rIns="0" bIns="0" rtlCol="0" anchor="ctr"/>
           <a:lstStyle/>
           <a:p>
-            <a:pPr indent="0" marL="0">
+            <a:pPr marL="0" indent="0">
               <a:buNone/>
             </a:pPr>
             <a:r>
@@ -2273,7 +2017,73 @@
                 <a:ea typeface="Arial" pitchFamily="34" charset="-122"/>
                 <a:cs typeface="Arial" pitchFamily="34" charset="-120"/>
               </a:rPr>
-              <a:t>Sale sin experiencia demostrable y no consigue su primer cliente.</a:t>
+              <a:t>Sale sin experiencia demostrable y no consigue su primer </a:t>
+            </a:r>
+            <a:r>
+              <a:rPr lang="en-US" sz="1450" dirty="0" err="1">
+                <a:solidFill>
+                  <a:srgbClr val="222222"/>
+                </a:solidFill>
+                <a:latin typeface="Arial" pitchFamily="34" charset="0"/>
+                <a:ea typeface="Arial" pitchFamily="34" charset="-122"/>
+                <a:cs typeface="Arial" pitchFamily="34" charset="-120"/>
+              </a:rPr>
+              <a:t>cliente</a:t>
+            </a:r>
+            <a:r>
+              <a:rPr lang="en-US" sz="1450" dirty="0">
+                <a:solidFill>
+                  <a:srgbClr val="222222"/>
+                </a:solidFill>
+                <a:latin typeface="Arial" pitchFamily="34" charset="0"/>
+                <a:ea typeface="Arial" pitchFamily="34" charset="-122"/>
+                <a:cs typeface="Arial" pitchFamily="34" charset="-120"/>
+              </a:rPr>
+              <a:t> o </a:t>
+            </a:r>
+            <a:r>
+              <a:rPr lang="en-US" sz="1450" dirty="0" err="1">
+                <a:solidFill>
+                  <a:srgbClr val="222222"/>
+                </a:solidFill>
+                <a:latin typeface="Arial" pitchFamily="34" charset="0"/>
+                <a:ea typeface="Arial" pitchFamily="34" charset="-122"/>
+                <a:cs typeface="Arial" pitchFamily="34" charset="-120"/>
+              </a:rPr>
+              <a:t>trabajo</a:t>
+            </a:r>
+            <a:r>
+              <a:rPr lang="en-US" sz="1450" dirty="0">
+                <a:solidFill>
+                  <a:srgbClr val="222222"/>
+                </a:solidFill>
+                <a:latin typeface="Arial" pitchFamily="34" charset="0"/>
+                <a:ea typeface="Arial" pitchFamily="34" charset="-122"/>
+                <a:cs typeface="Arial" pitchFamily="34" charset="-120"/>
+              </a:rPr>
+              <a:t> con </a:t>
+            </a:r>
+            <a:r>
+              <a:rPr lang="en-US" sz="1450" dirty="0" err="1">
+                <a:solidFill>
+                  <a:srgbClr val="222222"/>
+                </a:solidFill>
+                <a:latin typeface="Arial" pitchFamily="34" charset="0"/>
+                <a:ea typeface="Arial" pitchFamily="34" charset="-122"/>
+                <a:cs typeface="Arial" pitchFamily="34" charset="-120"/>
+              </a:rPr>
+              <a:t>facilidad</a:t>
+            </a:r>
+            <a:r>
+              <a:rPr lang="en-US" sz="1450" dirty="0">
+                <a:solidFill>
+                  <a:srgbClr val="222222"/>
+                </a:solidFill>
+                <a:latin typeface="Arial" pitchFamily="34" charset="0"/>
+                <a:ea typeface="Arial" pitchFamily="34" charset="-122"/>
+                <a:cs typeface="Arial" pitchFamily="34" charset="-120"/>
+              </a:rPr>
+              <a:t> .</a:t>
             </a:r>
             <a:endParaRPr lang="en-US" sz="1450" dirty="0"/>
           </a:p>
@@ -2315,7 +2125,117 @@
                 <a:ea typeface="Arial" pitchFamily="34" charset="-122"/>
                 <a:cs typeface="Arial" pitchFamily="34" charset="-120"/>
               </a:rPr>
-              <a:t>Cobrar en dólares desde Bolivia es caro y complicado.</a:t>
+              <a:t>Cobrar en dólares desde Bolivia es caro y </a:t>
+            </a:r>
+            <a:r>
+              <a:rPr lang="en-US" sz="1450" dirty="0" err="1">
+                <a:solidFill>
+                  <a:srgbClr val="222222"/>
+                </a:solidFill>
+                <a:latin typeface="Arial" pitchFamily="34" charset="0"/>
+                <a:ea typeface="Arial" pitchFamily="34" charset="-122"/>
+                <a:cs typeface="Arial" pitchFamily="34" charset="-120"/>
+              </a:rPr>
+              <a:t>complicado</a:t>
+            </a:r>
+            <a:r>
+              <a:rPr lang="en-US" sz="1450" dirty="0">
+                <a:solidFill>
+                  <a:srgbClr val="222222"/>
+                </a:solidFill>
+                <a:latin typeface="Arial" pitchFamily="34" charset="0"/>
+                <a:ea typeface="Arial" pitchFamily="34" charset="-122"/>
+                <a:cs typeface="Arial" pitchFamily="34" charset="-120"/>
+              </a:rPr>
+              <a:t>(Se </a:t>
+            </a:r>
+            <a:r>
+              <a:rPr lang="en-US" sz="1450" dirty="0" err="1">
+                <a:solidFill>
+                  <a:srgbClr val="222222"/>
+                </a:solidFill>
+                <a:latin typeface="Arial" pitchFamily="34" charset="0"/>
+                <a:ea typeface="Arial" pitchFamily="34" charset="-122"/>
+                <a:cs typeface="Arial" pitchFamily="34" charset="-120"/>
+              </a:rPr>
+              <a:t>pierde</a:t>
+            </a:r>
+            <a:r>
+              <a:rPr lang="en-US" sz="1450" dirty="0">
+                <a:solidFill>
+                  <a:srgbClr val="222222"/>
+                </a:solidFill>
+                <a:latin typeface="Arial" pitchFamily="34" charset="0"/>
+                <a:ea typeface="Arial" pitchFamily="34" charset="-122"/>
+                <a:cs typeface="Arial" pitchFamily="34" charset="-120"/>
+              </a:rPr>
+              <a:t> </a:t>
+            </a:r>
+            <a:r>
+              <a:rPr lang="en-US" sz="1450" dirty="0" err="1">
+                <a:solidFill>
+                  <a:srgbClr val="222222"/>
+                </a:solidFill>
+                <a:latin typeface="Arial" pitchFamily="34" charset="0"/>
+                <a:ea typeface="Arial" pitchFamily="34" charset="-122"/>
+                <a:cs typeface="Arial" pitchFamily="34" charset="-120"/>
+              </a:rPr>
+              <a:t>en</a:t>
+            </a:r>
+            <a:r>
+              <a:rPr lang="en-US" sz="1450" dirty="0">
+                <a:solidFill>
+                  <a:srgbClr val="222222"/>
+                </a:solidFill>
+                <a:latin typeface="Arial" pitchFamily="34" charset="0"/>
+                <a:ea typeface="Arial" pitchFamily="34" charset="-122"/>
+                <a:cs typeface="Arial" pitchFamily="34" charset="-120"/>
+              </a:rPr>
+              <a:t> </a:t>
+            </a:r>
+            <a:r>
+              <a:rPr lang="en-US" sz="1450" dirty="0" err="1">
+                <a:solidFill>
+                  <a:srgbClr val="222222"/>
+                </a:solidFill>
+                <a:latin typeface="Arial" pitchFamily="34" charset="0"/>
+                <a:ea typeface="Arial" pitchFamily="34" charset="-122"/>
+                <a:cs typeface="Arial" pitchFamily="34" charset="-120"/>
+              </a:rPr>
+              <a:t>el</a:t>
+            </a:r>
+            <a:r>
+              <a:rPr lang="en-US" sz="1450" dirty="0">
+                <a:solidFill>
+                  <a:srgbClr val="222222"/>
+                </a:solidFill>
+                <a:latin typeface="Arial" pitchFamily="34" charset="0"/>
+                <a:ea typeface="Arial" pitchFamily="34" charset="-122"/>
+                <a:cs typeface="Arial" pitchFamily="34" charset="-120"/>
+              </a:rPr>
+              <a:t> </a:t>
+            </a:r>
+            <a:r>
+              <a:rPr lang="en-US" sz="1450" dirty="0" err="1">
+                <a:solidFill>
+                  <a:srgbClr val="222222"/>
+                </a:solidFill>
+                <a:latin typeface="Arial" pitchFamily="34" charset="0"/>
+                <a:ea typeface="Arial" pitchFamily="34" charset="-122"/>
+                <a:cs typeface="Arial" pitchFamily="34" charset="-120"/>
+              </a:rPr>
+              <a:t>intercambio</a:t>
+            </a:r>
+            <a:r>
+              <a:rPr lang="en-US" sz="1450" dirty="0">
+                <a:solidFill>
+                  <a:srgbClr val="222222"/>
+                </a:solidFill>
+                <a:latin typeface="Arial" pitchFamily="34" charset="0"/>
+                <a:ea typeface="Arial" pitchFamily="34" charset="-122"/>
+                <a:cs typeface="Arial" pitchFamily="34" charset="-120"/>
+              </a:rPr>
+              <a:t>).</a:t>
             </a:r>
             <a:endParaRPr lang="en-US" sz="1450" dirty="0"/>
           </a:p>
@@ -2387,7 +2307,7 @@
           <a:bodyPr wrap="square" lIns="0" tIns="0" rIns="0" bIns="0" rtlCol="0" anchor="ctr"/>
           <a:lstStyle/>
           <a:p>
-            <a:pPr indent="0" marL="0">
+            <a:pPr marL="0" indent="0">
               <a:buNone/>
             </a:pPr>
             <a:r>
@@ -2531,7 +2451,7 @@
           <a:bodyPr wrap="square" lIns="0" tIns="0" rIns="0" bIns="0" rtlCol="0" anchor="ctr"/>
           <a:lstStyle/>
           <a:p>
-            <a:pPr indent="0" marL="0">
+            <a:pPr marL="0" indent="0">
               <a:buNone/>
             </a:pPr>
             <a:r>
@@ -2545,9 +2465,6 @@
               </a:rPr>
               <a:t>El problema no es la falta de talento. Es la falta de </a:t>
             </a:r>
-            <a:pPr indent="0" marL="0">
-              <a:buNone/>
-            </a:pPr>
             <a:r>
               <a:rPr lang="en-US" sz="2100" b="1" i="1" dirty="0">
                 <a:solidFill>
@@ -2559,9 +2476,6 @@
               </a:rPr>
               <a:t>CONFIANZA</a:t>
             </a:r>
-            <a:pPr indent="0" marL="0">
-              <a:buNone/>
-            </a:pPr>
             <a:r>
               <a:rPr lang="en-US" sz="2100" b="1" i="1" dirty="0">
                 <a:solidFill>
@@ -2598,11 +2512,11 @@
           <a:bodyPr wrap="square" lIns="0" tIns="0" rIns="0" bIns="0" rtlCol="0" anchor="ctr"/>
           <a:lstStyle/>
           <a:p>
-            <a:pPr indent="0" marL="0">
+            <a:pPr marL="0" indent="0">
               <a:buNone/>
             </a:pPr>
             <a:r>
-              <a:rPr lang="en-US" sz="1000" b="1" spc="100" kern="0" dirty="0">
+              <a:rPr lang="en-US" sz="1000" b="1" kern="0" spc="100" dirty="0">
                 <a:solidFill>
                   <a:srgbClr val="6B6B6B"/>
                 </a:solidFill>
@@ -2637,7 +2551,7 @@
           <a:bodyPr wrap="square" lIns="0" tIns="0" rIns="0" bIns="0" rtlCol="0" anchor="ctr"/>
           <a:lstStyle/>
           <a:p>
-            <a:pPr algn="r" indent="0" marL="0">
+            <a:pPr marL="0" indent="0" algn="r">
               <a:buNone/>
             </a:pPr>
             <a:r>
@@ -2665,12 +2579,13 @@
 
 <file path=ppt/slides/slide3.xml><?xml version="1.0" encoding="utf-8"?>
 <p:sld xmlns:a="http://schemas.openxmlformats.org/drawingml/2006/main" xmlns:r="http://schemas.openxmlformats.org/officeDocument/2006/relationships" xmlns:p="http://schemas.openxmlformats.org/presentationml/2006/main">
-  <p:cSld name="Slide 3">
+  <p:cSld name="Slide 7">
     <p:bg>
       <p:bgPr>
         <a:solidFill>
           <a:srgbClr val="F7F4EC"/>
         </a:solidFill>
+        <a:effectLst/>
       </p:bgPr>
     </p:bg>
     <p:spTree>
@@ -2708,19 +2623,19 @@
           <a:bodyPr wrap="square" lIns="0" tIns="0" rIns="0" bIns="0" rtlCol="0" anchor="ctr"/>
           <a:lstStyle/>
           <a:p>
-            <a:pPr indent="0" marL="0">
+            <a:pPr marL="0" indent="0">
               <a:buNone/>
             </a:pPr>
             <a:r>
-              <a:rPr lang="en-US" sz="1200" spc="200" kern="0" dirty="0">
-                <a:solidFill>
-                  <a:srgbClr val="00A676"/>
+              <a:rPr lang="en-US" sz="1200" kern="0" spc="200" dirty="0">
+                <a:solidFill>
+                  <a:srgbClr val="E4572E"/>
                 </a:solidFill>
                 <a:latin typeface="Arial Black" pitchFamily="34" charset="0"/>
                 <a:ea typeface="Arial Black" pitchFamily="34" charset="-122"/>
                 <a:cs typeface="Arial Black" pitchFamily="34" charset="-120"/>
               </a:rPr>
-              <a:t>LO VALIDAMOS CON USUARIOS REALES</a:t>
+              <a:t>RETENCIÓN</a:t>
             </a:r>
             <a:endParaRPr lang="en-US" sz="1200" dirty="0"/>
           </a:p>
@@ -2747,7 +2662,7 @@
           <a:bodyPr wrap="square" lIns="0" tIns="0" rIns="0" bIns="0" rtlCol="0" anchor="ctr"/>
           <a:lstStyle/>
           <a:p>
-            <a:pPr indent="0" marL="0">
+            <a:pPr marL="0" indent="0">
               <a:buNone/>
             </a:pPr>
             <a:r>
@@ -2759,11 +2674,8 @@
                 <a:ea typeface="Arial Black" pitchFamily="34" charset="-122"/>
                 <a:cs typeface="Arial Black" pitchFamily="34" charset="-120"/>
               </a:rPr>
-              <a:t>HABLAMOS CON </a:t>
-            </a:r>
-            <a:pPr indent="0" marL="0">
-              <a:buNone/>
-            </a:pPr>
+              <a:t>POR QUÉ </a:t>
+            </a:r>
             <a:r>
               <a:rPr lang="en-US" sz="3400" dirty="0">
                 <a:solidFill>
@@ -2773,21 +2685,7 @@
                 <a:ea typeface="Arial Black" pitchFamily="34" charset="-122"/>
                 <a:cs typeface="Arial Black" pitchFamily="34" charset="-120"/>
               </a:rPr>
-              <a:t>[N]</a:t>
-            </a:r>
-            <a:pPr indent="0" marL="0">
-              <a:buNone/>
-            </a:pPr>
-            <a:r>
-              <a:rPr lang="en-US" sz="3400" dirty="0">
-                <a:solidFill>
-                  <a:srgbClr val="111111"/>
-                </a:solidFill>
-                <a:latin typeface="Arial Black" pitchFamily="34" charset="0"/>
-                <a:ea typeface="Arial Black" pitchFamily="34" charset="-122"/>
-                <a:cs typeface="Arial Black" pitchFamily="34" charset="-120"/>
-              </a:rPr>
-              <a:t> PERSONAS</a:t>
+              <a:t>NO SE VAN</a:t>
             </a:r>
             <a:endParaRPr lang="en-US" sz="3400" dirty="0"/>
           </a:p>
@@ -2814,7 +2712,7 @@
           <a:bodyPr wrap="square" lIns="0" tIns="0" rIns="0" bIns="0" rtlCol="0" anchor="ctr"/>
           <a:lstStyle/>
           <a:p>
-            <a:pPr indent="0" marL="0">
+            <a:pPr marL="0" indent="0">
               <a:buNone/>
             </a:pPr>
             <a:r>
@@ -2826,7 +2724,7 @@
                 <a:ea typeface="Arial" pitchFamily="34" charset="-122"/>
                 <a:cs typeface="Arial" pitchFamily="34" charset="-120"/>
               </a:rPr>
-              <a:t>Formulario de 7 preguntas  +  5 entrevistas a profundidad.</a:t>
+              <a:t>Quedarse vale más que ahorrarse la comisión.</a:t>
             </a:r>
             <a:endParaRPr lang="en-US" sz="1600" dirty="0"/>
           </a:p>
@@ -2841,7 +2739,7 @@
         <p:spPr>
           <a:xfrm>
             <a:off x="685800" y="2331720"/>
-            <a:ext cx="3456432" cy="1600200"/>
+            <a:ext cx="2615184" cy="2011680"/>
           </a:xfrm>
           <a:prstGeom prst="rect">
             <a:avLst/>
@@ -2861,7 +2759,7 @@
         <p:spPr>
           <a:xfrm>
             <a:off x="594360" y="2240280"/>
-            <a:ext cx="3456432" cy="1600200"/>
+            <a:ext cx="2615184" cy="2011680"/>
           </a:xfrm>
           <a:prstGeom prst="rect">
             <a:avLst/>
@@ -2879,14 +2777,34 @@
       </p:sp>
       <p:sp>
         <p:nvSpPr>
-          <p:cNvPr id="7" name="Text 5"/>
+          <p:cNvPr id="7" name="Shape 5"/>
+          <p:cNvSpPr/>
+          <p:nvPr/>
+        </p:nvSpPr>
+        <p:spPr>
+          <a:xfrm>
+            <a:off x="868680" y="2532888"/>
+            <a:ext cx="365760" cy="109728"/>
+          </a:xfrm>
+          <a:prstGeom prst="rect">
+            <a:avLst/>
+          </a:prstGeom>
+          <a:solidFill>
+            <a:srgbClr val="3D5AFE"/>
+          </a:solidFill>
+          <a:ln/>
+        </p:spPr>
+      </p:sp>
+      <p:sp>
+        <p:nvSpPr>
+          <p:cNvPr id="8" name="Text 6"/>
           <p:cNvSpPr txBox="1"/>
           <p:nvPr/>
         </p:nvSpPr>
         <p:spPr>
           <a:xfrm>
-            <a:off x="777240" y="2423160"/>
-            <a:ext cx="3090672" cy="777240"/>
+            <a:off x="868680" y="2788920"/>
+            <a:ext cx="2066544" cy="640080"/>
           </a:xfrm>
           <a:prstGeom prst="rect">
             <a:avLst/>
@@ -2898,34 +2816,34 @@
           <a:bodyPr wrap="square" lIns="0" tIns="0" rIns="0" bIns="0" rtlCol="0" anchor="ctr"/>
           <a:lstStyle/>
           <a:p>
-            <a:pPr algn="ctr" indent="0" marL="0">
+            <a:pPr marL="0" indent="0">
               <a:buNone/>
             </a:pPr>
             <a:r>
-              <a:rPr lang="en-US" sz="4400" dirty="0">
-                <a:solidFill>
-                  <a:srgbClr val="3D5AFE"/>
+              <a:rPr lang="en-US" sz="1300" dirty="0">
+                <a:solidFill>
+                  <a:srgbClr val="111111"/>
                 </a:solidFill>
                 <a:latin typeface="Arial Black" pitchFamily="34" charset="0"/>
                 <a:ea typeface="Arial Black" pitchFamily="34" charset="-122"/>
                 <a:cs typeface="Arial Black" pitchFamily="34" charset="-120"/>
               </a:rPr>
-              <a:t>[X]%</a:t>
-            </a:r>
-            <a:endParaRPr lang="en-US" sz="4400" dirty="0"/>
-          </a:p>
-        </p:txBody>
-      </p:sp>
-      <p:sp>
-        <p:nvSpPr>
-          <p:cNvPr id="8" name="Text 6"/>
+              <a:t>SE VENDE LA PROTECCIÓN</a:t>
+            </a:r>
+            <a:endParaRPr lang="en-US" sz="1300" dirty="0"/>
+          </a:p>
+        </p:txBody>
+      </p:sp>
+      <p:sp>
+        <p:nvSpPr>
+          <p:cNvPr id="9" name="Text 7"/>
           <p:cNvSpPr txBox="1"/>
           <p:nvPr/>
         </p:nvSpPr>
         <p:spPr>
           <a:xfrm>
-            <a:off x="868680" y="3200400"/>
-            <a:ext cx="2907792" cy="548640"/>
+            <a:off x="868680" y="3447288"/>
+            <a:ext cx="2066544" cy="731520"/>
           </a:xfrm>
           <a:prstGeom prst="rect">
             <a:avLst/>
@@ -2937,11 +2855,11 @@
           <a:bodyPr wrap="square" lIns="0" tIns="0" rIns="0" bIns="0" rtlCol="0" anchor="ctr"/>
           <a:lstStyle/>
           <a:p>
-            <a:pPr algn="ctr" indent="0" marL="0">
+            <a:pPr marL="0" indent="0">
               <a:buNone/>
             </a:pPr>
             <a:r>
-              <a:rPr lang="en-US" sz="1300" dirty="0">
+              <a:rPr lang="en-US" sz="1150" dirty="0">
                 <a:solidFill>
                   <a:srgbClr val="222222"/>
                 </a:solidFill>
@@ -2949,22 +2867,22 @@
                 <a:ea typeface="Arial" pitchFamily="34" charset="-122"/>
                 <a:cs typeface="Arial" pitchFamily="34" charset="-120"/>
               </a:rPr>
-              <a:t>tuvo un pago atrasado o nunca le pagaron</a:t>
-            </a:r>
-            <a:endParaRPr lang="en-US" sz="1300" dirty="0"/>
-          </a:p>
-        </p:txBody>
-      </p:sp>
-      <p:sp>
-        <p:nvSpPr>
-          <p:cNvPr id="9" name="Shape 7"/>
+              <a:t>El escrow se necesita en cada proyecto, no solo en el primer match.</a:t>
+            </a:r>
+            <a:endParaRPr lang="en-US" sz="1150" dirty="0"/>
+          </a:p>
+        </p:txBody>
+      </p:sp>
+      <p:sp>
+        <p:nvSpPr>
+          <p:cNvPr id="10" name="Shape 8"/>
           <p:cNvSpPr/>
           <p:nvPr/>
         </p:nvSpPr>
         <p:spPr>
           <a:xfrm>
-            <a:off x="4526280" y="2331720"/>
-            <a:ext cx="3456432" cy="1600200"/>
+            <a:off x="3575304" y="2331720"/>
+            <a:ext cx="2615184" cy="2011680"/>
           </a:xfrm>
           <a:prstGeom prst="rect">
             <a:avLst/>
@@ -2977,14 +2895,14 @@
       </p:sp>
       <p:sp>
         <p:nvSpPr>
-          <p:cNvPr id="10" name="Shape 8"/>
+          <p:cNvPr id="11" name="Shape 9"/>
           <p:cNvSpPr/>
           <p:nvPr/>
         </p:nvSpPr>
         <p:spPr>
           <a:xfrm>
-            <a:off x="4434840" y="2240280"/>
-            <a:ext cx="3456432" cy="1600200"/>
+            <a:off x="3483864" y="2240280"/>
+            <a:ext cx="2615184" cy="2011680"/>
           </a:xfrm>
           <a:prstGeom prst="rect">
             <a:avLst/>
@@ -3002,14 +2920,34 @@
       </p:sp>
       <p:sp>
         <p:nvSpPr>
-          <p:cNvPr id="11" name="Text 9"/>
+          <p:cNvPr id="12" name="Shape 10"/>
+          <p:cNvSpPr/>
+          <p:nvPr/>
+        </p:nvSpPr>
+        <p:spPr>
+          <a:xfrm>
+            <a:off x="3758184" y="2532888"/>
+            <a:ext cx="365760" cy="109728"/>
+          </a:xfrm>
+          <a:prstGeom prst="rect">
+            <a:avLst/>
+          </a:prstGeom>
+          <a:solidFill>
+            <a:srgbClr val="FDDA24"/>
+          </a:solidFill>
+          <a:ln/>
+        </p:spPr>
+      </p:sp>
+      <p:sp>
+        <p:nvSpPr>
+          <p:cNvPr id="13" name="Text 11"/>
           <p:cNvSpPr txBox="1"/>
           <p:nvPr/>
         </p:nvSpPr>
         <p:spPr>
           <a:xfrm>
-            <a:off x="4617720" y="2423160"/>
-            <a:ext cx="3090672" cy="777240"/>
+            <a:off x="3758184" y="2788920"/>
+            <a:ext cx="2066544" cy="640080"/>
           </a:xfrm>
           <a:prstGeom prst="rect">
             <a:avLst/>
@@ -3021,34 +2959,34 @@
           <a:bodyPr wrap="square" lIns="0" tIns="0" rIns="0" bIns="0" rtlCol="0" anchor="ctr"/>
           <a:lstStyle/>
           <a:p>
-            <a:pPr algn="ctr" indent="0" marL="0">
+            <a:pPr marL="0" indent="0">
               <a:buNone/>
             </a:pPr>
             <a:r>
-              <a:rPr lang="en-US" sz="4400" dirty="0">
-                <a:solidFill>
-                  <a:srgbClr val="3D5AFE"/>
+              <a:rPr lang="en-US" sz="1300" dirty="0">
+                <a:solidFill>
+                  <a:srgbClr val="111111"/>
                 </a:solidFill>
                 <a:latin typeface="Arial Black" pitchFamily="34" charset="0"/>
                 <a:ea typeface="Arial Black" pitchFamily="34" charset="-122"/>
                 <a:cs typeface="Arial Black" pitchFamily="34" charset="-120"/>
               </a:rPr>
-              <a:t>[X]%</a:t>
-            </a:r>
-            <a:endParaRPr lang="en-US" sz="4400" dirty="0"/>
-          </a:p>
-        </p:txBody>
-      </p:sp>
-      <p:sp>
-        <p:nvSpPr>
-          <p:cNvPr id="12" name="Text 10"/>
+              <a:t>EL FREELANCER COBRA 100%</a:t>
+            </a:r>
+            <a:endParaRPr lang="en-US" sz="1300" dirty="0"/>
+          </a:p>
+        </p:txBody>
+      </p:sp>
+      <p:sp>
+        <p:nvSpPr>
+          <p:cNvPr id="14" name="Text 12"/>
           <p:cNvSpPr txBox="1"/>
           <p:nvPr/>
         </p:nvSpPr>
         <p:spPr>
           <a:xfrm>
-            <a:off x="4709160" y="3200400"/>
-            <a:ext cx="2907792" cy="548640"/>
+            <a:off x="3758184" y="3447288"/>
+            <a:ext cx="2066544" cy="731520"/>
           </a:xfrm>
           <a:prstGeom prst="rect">
             <a:avLst/>
@@ -3060,11 +2998,11 @@
           <a:bodyPr wrap="square" lIns="0" tIns="0" rIns="0" bIns="0" rtlCol="0" anchor="ctr"/>
           <a:lstStyle/>
           <a:p>
-            <a:pPr algn="ctr" indent="0" marL="0">
+            <a:pPr marL="0" indent="0">
               <a:buNone/>
             </a:pPr>
             <a:r>
-              <a:rPr lang="en-US" sz="1300" dirty="0">
+              <a:rPr lang="en-US" sz="1150" dirty="0">
                 <a:solidFill>
                   <a:srgbClr val="222222"/>
                 </a:solidFill>
@@ -3072,22 +3010,22 @@
                 <a:ea typeface="Arial" pitchFamily="34" charset="-122"/>
                 <a:cs typeface="Arial" pitchFamily="34" charset="-120"/>
               </a:rPr>
-              <a:t>no paga por adelantado sin referencias</a:t>
-            </a:r>
-            <a:endParaRPr lang="en-US" sz="1300" dirty="0"/>
-          </a:p>
-        </p:txBody>
-      </p:sp>
-      <p:sp>
-        <p:nvSpPr>
-          <p:cNvPr id="13" name="Shape 11"/>
+              <a:t>Sin comisión y con reputación que solo crece dentro de Working.</a:t>
+            </a:r>
+            <a:endParaRPr lang="en-US" sz="1150" dirty="0"/>
+          </a:p>
+        </p:txBody>
+      </p:sp>
+      <p:sp>
+        <p:nvSpPr>
+          <p:cNvPr id="15" name="Shape 13"/>
           <p:cNvSpPr/>
           <p:nvPr/>
         </p:nvSpPr>
         <p:spPr>
           <a:xfrm>
-            <a:off x="8366760" y="2331720"/>
-            <a:ext cx="3456432" cy="1600200"/>
+            <a:off x="6464808" y="2331720"/>
+            <a:ext cx="2615184" cy="2011680"/>
           </a:xfrm>
           <a:prstGeom prst="rect">
             <a:avLst/>
@@ -3100,14 +3038,14 @@
       </p:sp>
       <p:sp>
         <p:nvSpPr>
-          <p:cNvPr id="14" name="Shape 12"/>
+          <p:cNvPr id="16" name="Shape 14"/>
           <p:cNvSpPr/>
           <p:nvPr/>
         </p:nvSpPr>
         <p:spPr>
           <a:xfrm>
-            <a:off x="8275320" y="2240280"/>
-            <a:ext cx="3456432" cy="1600200"/>
+            <a:off x="6373368" y="2240280"/>
+            <a:ext cx="2615184" cy="2011680"/>
           </a:xfrm>
           <a:prstGeom prst="rect">
             <a:avLst/>
@@ -3125,14 +3063,34 @@
       </p:sp>
       <p:sp>
         <p:nvSpPr>
-          <p:cNvPr id="15" name="Text 13"/>
+          <p:cNvPr id="17" name="Shape 15"/>
+          <p:cNvSpPr/>
+          <p:nvPr/>
+        </p:nvSpPr>
+        <p:spPr>
+          <a:xfrm>
+            <a:off x="6647688" y="2532888"/>
+            <a:ext cx="365760" cy="109728"/>
+          </a:xfrm>
+          <a:prstGeom prst="rect">
+            <a:avLst/>
+          </a:prstGeom>
+          <a:solidFill>
+            <a:srgbClr val="00A676"/>
+          </a:solidFill>
+          <a:ln/>
+        </p:spPr>
+      </p:sp>
+      <p:sp>
+        <p:nvSpPr>
+          <p:cNvPr id="18" name="Text 16"/>
           <p:cNvSpPr txBox="1"/>
           <p:nvPr/>
         </p:nvSpPr>
         <p:spPr>
           <a:xfrm>
-            <a:off x="8458200" y="2423160"/>
-            <a:ext cx="3090672" cy="777240"/>
+            <a:off x="6647688" y="2788920"/>
+            <a:ext cx="2066544" cy="640080"/>
           </a:xfrm>
           <a:prstGeom prst="rect">
             <a:avLst/>
@@ -3144,34 +3102,34 @@
           <a:bodyPr wrap="square" lIns="0" tIns="0" rIns="0" bIns="0" rtlCol="0" anchor="ctr"/>
           <a:lstStyle/>
           <a:p>
-            <a:pPr algn="ctr" indent="0" marL="0">
+            <a:pPr marL="0" indent="0">
               <a:buNone/>
             </a:pPr>
             <a:r>
-              <a:rPr lang="en-US" sz="4400" dirty="0">
-                <a:solidFill>
-                  <a:srgbClr val="3D5AFE"/>
+              <a:rPr lang="en-US" sz="1300" dirty="0">
+                <a:solidFill>
+                  <a:srgbClr val="111111"/>
                 </a:solidFill>
                 <a:latin typeface="Arial Black" pitchFamily="34" charset="0"/>
                 <a:ea typeface="Arial Black" pitchFamily="34" charset="-122"/>
                 <a:cs typeface="Arial Black" pitchFamily="34" charset="-120"/>
               </a:rPr>
-              <a:t>[X]%</a:t>
-            </a:r>
-            <a:endParaRPr lang="en-US" sz="4400" dirty="0"/>
-          </a:p>
-        </p:txBody>
-      </p:sp>
-      <p:sp>
-        <p:nvSpPr>
-          <p:cNvPr id="16" name="Text 14"/>
+              <a:t>TODO VIVE ADENTRO</a:t>
+            </a:r>
+            <a:endParaRPr lang="en-US" sz="1300" dirty="0"/>
+          </a:p>
+        </p:txBody>
+      </p:sp>
+      <p:sp>
+        <p:nvSpPr>
+          <p:cNvPr id="19" name="Text 17"/>
           <p:cNvSpPr txBox="1"/>
           <p:nvPr/>
         </p:nvSpPr>
         <p:spPr>
           <a:xfrm>
-            <a:off x="8549640" y="3200400"/>
-            <a:ext cx="2907792" cy="548640"/>
+            <a:off x="6647688" y="3447288"/>
+            <a:ext cx="2066544" cy="731520"/>
           </a:xfrm>
           <a:prstGeom prst="rect">
             <a:avLst/>
@@ -3183,11 +3141,11 @@
           <a:bodyPr wrap="square" lIns="0" tIns="0" rIns="0" bIns="0" rtlCol="0" anchor="ctr"/>
           <a:lstStyle/>
           <a:p>
-            <a:pPr algn="ctr" indent="0" marL="0">
+            <a:pPr marL="0" indent="0">
               <a:buNone/>
             </a:pPr>
             <a:r>
-              <a:rPr lang="en-US" sz="1300" dirty="0">
+              <a:rPr lang="en-US" sz="1150" dirty="0">
                 <a:solidFill>
                   <a:srgbClr val="222222"/>
                 </a:solidFill>
@@ -3195,22 +3153,22 @@
                 <a:ea typeface="Arial" pitchFamily="34" charset="-122"/>
                 <a:cs typeface="Arial" pitchFamily="34" charset="-120"/>
               </a:rPr>
-              <a:t>usaría pagos protegidos por entregas</a:t>
-            </a:r>
-            <a:endParaRPr lang="en-US" sz="1300" dirty="0"/>
-          </a:p>
-        </p:txBody>
-      </p:sp>
-      <p:sp>
-        <p:nvSpPr>
-          <p:cNvPr id="17" name="Shape 15"/>
+              <a:t>Chat, hitos, entregables y ganancias en un lugar. Salir da más trabajo.</a:t>
+            </a:r>
+            <a:endParaRPr lang="en-US" sz="1150" dirty="0"/>
+          </a:p>
+        </p:txBody>
+      </p:sp>
+      <p:sp>
+        <p:nvSpPr>
+          <p:cNvPr id="20" name="Shape 18"/>
           <p:cNvSpPr/>
           <p:nvPr/>
         </p:nvSpPr>
         <p:spPr>
           <a:xfrm>
-            <a:off x="685800" y="4251960"/>
-            <a:ext cx="5349240" cy="1325880"/>
+            <a:off x="9354312" y="2331720"/>
+            <a:ext cx="2615184" cy="2011680"/>
           </a:xfrm>
           <a:prstGeom prst="rect">
             <a:avLst/>
@@ -3223,14 +3181,14 @@
       </p:sp>
       <p:sp>
         <p:nvSpPr>
-          <p:cNvPr id="18" name="Shape 16"/>
+          <p:cNvPr id="21" name="Shape 19"/>
           <p:cNvSpPr/>
           <p:nvPr/>
         </p:nvSpPr>
         <p:spPr>
           <a:xfrm>
-            <a:off x="594360" y="4160520"/>
-            <a:ext cx="5349240" cy="1325880"/>
+            <a:off x="9262872" y="2240280"/>
+            <a:ext cx="2615184" cy="2011680"/>
           </a:xfrm>
           <a:prstGeom prst="rect">
             <a:avLst/>
@@ -3248,14 +3206,34 @@
       </p:sp>
       <p:sp>
         <p:nvSpPr>
-          <p:cNvPr id="19" name="Text 17"/>
+          <p:cNvPr id="22" name="Shape 20"/>
+          <p:cNvSpPr/>
+          <p:nvPr/>
+        </p:nvSpPr>
+        <p:spPr>
+          <a:xfrm>
+            <a:off x="9537192" y="2532888"/>
+            <a:ext cx="365760" cy="109728"/>
+          </a:xfrm>
+          <a:prstGeom prst="rect">
+            <a:avLst/>
+          </a:prstGeom>
+          <a:solidFill>
+            <a:srgbClr val="E4572E"/>
+          </a:solidFill>
+          <a:ln/>
+        </p:spPr>
+      </p:sp>
+      <p:sp>
+        <p:nvSpPr>
+          <p:cNvPr id="23" name="Text 21"/>
           <p:cNvSpPr txBox="1"/>
           <p:nvPr/>
         </p:nvSpPr>
         <p:spPr>
           <a:xfrm>
-            <a:off x="777240" y="4069080"/>
-            <a:ext cx="640080" cy="640080"/>
+            <a:off x="9537192" y="2788920"/>
+            <a:ext cx="2066544" cy="640080"/>
           </a:xfrm>
           <a:prstGeom prst="rect">
             <a:avLst/>
@@ -3267,34 +3245,34 @@
           <a:bodyPr wrap="square" lIns="0" tIns="0" rIns="0" bIns="0" rtlCol="0" anchor="ctr"/>
           <a:lstStyle/>
           <a:p>
-            <a:pPr indent="0" marL="0">
+            <a:pPr marL="0" indent="0">
               <a:buNone/>
             </a:pPr>
             <a:r>
-              <a:rPr lang="en-US" sz="4400" dirty="0">
-                <a:solidFill>
-                  <a:srgbClr val="FDDA24"/>
+              <a:rPr lang="en-US" sz="1300" dirty="0">
+                <a:solidFill>
+                  <a:srgbClr val="111111"/>
                 </a:solidFill>
                 <a:latin typeface="Arial Black" pitchFamily="34" charset="0"/>
                 <a:ea typeface="Arial Black" pitchFamily="34" charset="-122"/>
                 <a:cs typeface="Arial Black" pitchFamily="34" charset="-120"/>
               </a:rPr>
-              <a:t>“</a:t>
-            </a:r>
-            <a:endParaRPr lang="en-US" sz="4400" dirty="0"/>
-          </a:p>
-        </p:txBody>
-      </p:sp>
-      <p:sp>
-        <p:nvSpPr>
-          <p:cNvPr id="20" name="Text 18"/>
+              <a:t>COMISIÓN DECRECIENTE</a:t>
+            </a:r>
+            <a:endParaRPr lang="en-US" sz="1300" dirty="0"/>
+          </a:p>
+        </p:txBody>
+      </p:sp>
+      <p:sp>
+        <p:nvSpPr>
+          <p:cNvPr id="24" name="Text 22"/>
           <p:cNvSpPr txBox="1"/>
           <p:nvPr/>
         </p:nvSpPr>
         <p:spPr>
           <a:xfrm>
-            <a:off x="1280160" y="4361688"/>
-            <a:ext cx="4434840" cy="658368"/>
+            <a:off x="9537192" y="3447288"/>
+            <a:ext cx="2066544" cy="731520"/>
           </a:xfrm>
           <a:prstGeom prst="rect">
             <a:avLst/>
@@ -3306,11 +3284,11 @@
           <a:bodyPr wrap="square" lIns="0" tIns="0" rIns="0" bIns="0" rtlCol="0" anchor="ctr"/>
           <a:lstStyle/>
           <a:p>
-            <a:pPr indent="0" marL="0">
+            <a:pPr marL="0" indent="0">
               <a:buNone/>
             </a:pPr>
             <a:r>
-              <a:rPr lang="en-US" sz="1350" i="1" dirty="0">
+              <a:rPr lang="en-US" sz="1150" dirty="0">
                 <a:solidFill>
                   <a:srgbClr val="222222"/>
                 </a:solidFill>
@@ -3318,46 +3296,7 @@
                 <a:ea typeface="Arial" pitchFamily="34" charset="-122"/>
                 <a:cs typeface="Arial" pitchFamily="34" charset="-120"/>
               </a:rPr>
-              <a:t>[cita real de un freelancer sobre un pago que no llegó]</a:t>
-            </a:r>
-            <a:endParaRPr lang="en-US" sz="1350" dirty="0"/>
-          </a:p>
-        </p:txBody>
-      </p:sp>
-      <p:sp>
-        <p:nvSpPr>
-          <p:cNvPr id="21" name="Text 19"/>
-          <p:cNvSpPr txBox="1"/>
-          <p:nvPr/>
-        </p:nvSpPr>
-        <p:spPr>
-          <a:xfrm>
-            <a:off x="1280160" y="5074920"/>
-            <a:ext cx="4434840" cy="292608"/>
-          </a:xfrm>
-          <a:prstGeom prst="rect">
-            <a:avLst/>
-          </a:prstGeom>
-          <a:noFill/>
-          <a:ln/>
-        </p:spPr>
-        <p:txBody>
-          <a:bodyPr wrap="square" lIns="0" tIns="0" rIns="0" bIns="0" rtlCol="0" anchor="ctr"/>
-          <a:lstStyle/>
-          <a:p>
-            <a:pPr indent="0" marL="0">
-              <a:buNone/>
-            </a:pPr>
-            <a:r>
-              <a:rPr lang="en-US" sz="1150" b="1" dirty="0">
-                <a:solidFill>
-                  <a:srgbClr val="6B6B6B"/>
-                </a:solidFill>
-                <a:latin typeface="Arial" pitchFamily="34" charset="0"/>
-                <a:ea typeface="Arial" pitchFamily="34" charset="-122"/>
-                <a:cs typeface="Arial" pitchFamily="34" charset="-120"/>
-              </a:rPr>
-              <a:t>— Diseñadora, 23 años, La Paz</a:t>
+              <a:t>Solo a la empresa y baja con la lealtad: irse casi no ahorra.</a:t>
             </a:r>
             <a:endParaRPr lang="en-US" sz="1150" dirty="0"/>
           </a:p>
@@ -3365,14 +3304,14 @@
       </p:sp>
       <p:sp>
         <p:nvSpPr>
-          <p:cNvPr id="22" name="Shape 20"/>
+          <p:cNvPr id="25" name="Shape 23"/>
           <p:cNvSpPr/>
           <p:nvPr/>
         </p:nvSpPr>
         <p:spPr>
           <a:xfrm>
-            <a:off x="6428232" y="4251960"/>
-            <a:ext cx="5349240" cy="1325880"/>
+            <a:off x="685800" y="4754880"/>
+            <a:ext cx="11002975" cy="1691640"/>
           </a:xfrm>
           <a:prstGeom prst="rect">
             <a:avLst/>
@@ -3385,20 +3324,20 @@
       </p:sp>
       <p:sp>
         <p:nvSpPr>
-          <p:cNvPr id="23" name="Shape 21"/>
+          <p:cNvPr id="26" name="Shape 24"/>
           <p:cNvSpPr/>
           <p:nvPr/>
         </p:nvSpPr>
         <p:spPr>
           <a:xfrm>
-            <a:off x="6336792" y="4160520"/>
-            <a:ext cx="5349240" cy="1325880"/>
+            <a:off x="594360" y="4663440"/>
+            <a:ext cx="11002975" cy="1691640"/>
           </a:xfrm>
           <a:prstGeom prst="rect">
             <a:avLst/>
           </a:prstGeom>
           <a:solidFill>
-            <a:srgbClr val="FFFFFF"/>
+            <a:srgbClr val="111111"/>
           </a:solidFill>
           <a:ln w="25400">
             <a:solidFill>
@@ -3410,14 +3349,14 @@
       </p:sp>
       <p:sp>
         <p:nvSpPr>
-          <p:cNvPr id="24" name="Text 22"/>
+          <p:cNvPr id="27" name="Text 25"/>
           <p:cNvSpPr txBox="1"/>
           <p:nvPr/>
         </p:nvSpPr>
         <p:spPr>
           <a:xfrm>
-            <a:off x="6519672" y="4069080"/>
-            <a:ext cx="640080" cy="640080"/>
+            <a:off x="960120" y="4892040"/>
+            <a:ext cx="5120640" cy="320040"/>
           </a:xfrm>
           <a:prstGeom prst="rect">
             <a:avLst/>
@@ -3429,11 +3368,11 @@
           <a:bodyPr wrap="square" lIns="0" tIns="0" rIns="0" bIns="0" rtlCol="0" anchor="ctr"/>
           <a:lstStyle/>
           <a:p>
-            <a:pPr indent="0" marL="0">
+            <a:pPr marL="0" indent="0">
               <a:buNone/>
             </a:pPr>
             <a:r>
-              <a:rPr lang="en-US" sz="4400" dirty="0">
+              <a:rPr lang="en-US" sz="1300" dirty="0">
                 <a:solidFill>
                   <a:srgbClr val="FDDA24"/>
                 </a:solidFill>
@@ -3441,22 +3380,22 @@
                 <a:ea typeface="Arial Black" pitchFamily="34" charset="-122"/>
                 <a:cs typeface="Arial Black" pitchFamily="34" charset="-120"/>
               </a:rPr>
-              <a:t>“</a:t>
-            </a:r>
-            <a:endParaRPr lang="en-US" sz="4400" dirty="0"/>
-          </a:p>
-        </p:txBody>
-      </p:sp>
-      <p:sp>
-        <p:nvSpPr>
-          <p:cNvPr id="25" name="Text 23"/>
+              <a:t>TRANSPARENTE, SIN SORPRESAS</a:t>
+            </a:r>
+            <a:endParaRPr lang="en-US" sz="1300" dirty="0"/>
+          </a:p>
+        </p:txBody>
+      </p:sp>
+      <p:sp>
+        <p:nvSpPr>
+          <p:cNvPr id="28" name="Text 26"/>
           <p:cNvSpPr txBox="1"/>
           <p:nvPr/>
         </p:nvSpPr>
         <p:spPr>
           <a:xfrm>
-            <a:off x="7022592" y="4361688"/>
-            <a:ext cx="4434840" cy="658368"/>
+            <a:off x="960120" y="5285232"/>
+            <a:ext cx="5486400" cy="914400"/>
           </a:xfrm>
           <a:prstGeom prst="rect">
             <a:avLst/>
@@ -3465,76 +3404,107 @@
           <a:ln/>
         </p:spPr>
         <p:txBody>
-          <a:bodyPr wrap="square" lIns="0" tIns="0" rIns="0" bIns="0" rtlCol="0" anchor="ctr"/>
-          <a:lstStyle/>
-          <a:p>
-            <a:pPr indent="0" marL="0">
+          <a:bodyPr wrap="square" lIns="0" tIns="0" rIns="0" bIns="0" rtlCol="0" anchor="t"/>
+          <a:lstStyle/>
+          <a:p>
+            <a:pPr marL="0" indent="0">
+              <a:lnSpc>
+                <a:spcPct val="115000"/>
+              </a:lnSpc>
               <a:buNone/>
             </a:pPr>
             <a:r>
-              <a:rPr lang="en-US" sz="1350" i="1" dirty="0">
-                <a:solidFill>
-                  <a:srgbClr val="222222"/>
+              <a:rPr lang="en-US" sz="1350" dirty="0">
+                <a:solidFill>
+                  <a:srgbClr val="DDDDDD"/>
                 </a:solidFill>
                 <a:latin typeface="Arial" pitchFamily="34" charset="0"/>
                 <a:ea typeface="Arial" pitchFamily="34" charset="-122"/>
                 <a:cs typeface="Arial" pitchFamily="34" charset="-120"/>
               </a:rPr>
-              <a:t>[cita real de una empresa sobre contratar sin confianza]</a:t>
-            </a:r>
-            <a:endParaRPr lang="en-US" sz="1350" dirty="0"/>
-          </a:p>
-        </p:txBody>
-      </p:sp>
-      <p:sp>
-        <p:nvSpPr>
-          <p:cNvPr id="26" name="Text 24"/>
-          <p:cNvSpPr txBox="1"/>
-          <p:nvPr/>
-        </p:nvSpPr>
-        <p:spPr>
-          <a:xfrm>
-            <a:off x="7022592" y="5074920"/>
-            <a:ext cx="4434840" cy="292608"/>
-          </a:xfrm>
-          <a:prstGeom prst="rect">
-            <a:avLst/>
-          </a:prstGeom>
-          <a:noFill/>
-          <a:ln/>
-        </p:spPr>
-        <p:txBody>
-          <a:bodyPr wrap="square" lIns="0" tIns="0" rIns="0" bIns="0" rtlCol="0" anchor="ctr"/>
-          <a:lstStyle/>
-          <a:p>
-            <a:pPr indent="0" marL="0">
-              <a:buNone/>
-            </a:pPr>
-            <a:r>
-              <a:rPr lang="en-US" sz="1150" b="1" dirty="0">
-                <a:solidFill>
-                  <a:srgbClr val="6B6B6B"/>
+              <a:t>La empresa paga </a:t>
+            </a:r>
+            <a:r>
+              <a:rPr lang="en-US" sz="1350" b="1" dirty="0">
+                <a:solidFill>
+                  <a:srgbClr val="FFFFFF"/>
                 </a:solidFill>
                 <a:latin typeface="Arial" pitchFamily="34" charset="0"/>
                 <a:ea typeface="Arial" pitchFamily="34" charset="-122"/>
                 <a:cs typeface="Arial" pitchFamily="34" charset="-120"/>
               </a:rPr>
-              <a:t>— Dueño de [rubro], Santa Cruz</a:t>
-            </a:r>
-            <a:endParaRPr lang="en-US" sz="1150" dirty="0"/>
-          </a:p>
-        </p:txBody>
-      </p:sp>
-      <p:sp>
-        <p:nvSpPr>
-          <p:cNvPr id="27" name="Text 25"/>
+              <a:t>$105</a:t>
+            </a:r>
+            <a:r>
+              <a:rPr lang="en-US" sz="1350" dirty="0">
+                <a:solidFill>
+                  <a:srgbClr val="DDDDDD"/>
+                </a:solidFill>
+                <a:latin typeface="Arial" pitchFamily="34" charset="0"/>
+                <a:ea typeface="Arial" pitchFamily="34" charset="-122"/>
+                <a:cs typeface="Arial" pitchFamily="34" charset="-120"/>
+              </a:rPr>
+              <a:t>  =  $100 al freelancer + $5 Working (5%).El freelancer recibe sus </a:t>
+            </a:r>
+            <a:r>
+              <a:rPr lang="en-US" sz="1350" b="1" dirty="0">
+                <a:solidFill>
+                  <a:srgbClr val="FDDA24"/>
+                </a:solidFill>
+                <a:latin typeface="Arial" pitchFamily="34" charset="0"/>
+                <a:ea typeface="Arial" pitchFamily="34" charset="-122"/>
+                <a:cs typeface="Arial" pitchFamily="34" charset="-120"/>
+              </a:rPr>
+              <a:t>$100 completos</a:t>
+            </a:r>
+            <a:r>
+              <a:rPr lang="en-US" sz="1350" dirty="0">
+                <a:solidFill>
+                  <a:srgbClr val="DDDDDD"/>
+                </a:solidFill>
+                <a:latin typeface="Arial" pitchFamily="34" charset="0"/>
+                <a:ea typeface="Arial" pitchFamily="34" charset="-122"/>
+                <a:cs typeface="Arial" pitchFamily="34" charset="-120"/>
+              </a:rPr>
+              <a:t>.</a:t>
+            </a:r>
+            <a:endParaRPr lang="en-US" sz="1350" dirty="0"/>
+          </a:p>
+        </p:txBody>
+      </p:sp>
+      <p:sp>
+        <p:nvSpPr>
+          <p:cNvPr id="29" name="Shape 27"/>
+          <p:cNvSpPr/>
+          <p:nvPr/>
+        </p:nvSpPr>
+        <p:spPr>
+          <a:xfrm>
+            <a:off x="7086600" y="4937760"/>
+            <a:ext cx="0" cy="1143000"/>
+          </a:xfrm>
+          <a:prstGeom prst="line">
+            <a:avLst/>
+          </a:prstGeom>
+          <a:noFill/>
+          <a:ln w="12700">
+            <a:solidFill>
+              <a:srgbClr val="3A3A3A"/>
+            </a:solidFill>
+            <a:prstDash val="solid"/>
+          </a:ln>
+        </p:spPr>
+      </p:sp>
+      <p:sp>
+        <p:nvSpPr>
+          <p:cNvPr id="30" name="Text 28"/>
           <p:cNvSpPr txBox="1"/>
           <p:nvPr/>
         </p:nvSpPr>
         <p:spPr>
           <a:xfrm>
-            <a:off x="594360" y="5715000"/>
-            <a:ext cx="11002975" cy="457200"/>
+            <a:off x="7360920" y="4892040"/>
+            <a:ext cx="4114800" cy="320040"/>
           </a:xfrm>
           <a:prstGeom prst="rect">
             <a:avLst/>
@@ -3546,71 +3516,121 @@
           <a:bodyPr wrap="square" lIns="0" tIns="0" rIns="0" bIns="0" rtlCol="0" anchor="ctr"/>
           <a:lstStyle/>
           <a:p>
-            <a:pPr indent="0" marL="0">
+            <a:pPr marL="0" indent="0">
               <a:buNone/>
             </a:pPr>
             <a:r>
-              <a:rPr lang="en-US" sz="1200" dirty="0">
-                <a:solidFill>
-                  <a:srgbClr val="111111"/>
+              <a:rPr lang="en-US" sz="1300" dirty="0">
+                <a:solidFill>
+                  <a:srgbClr val="FDDA24"/>
                 </a:solidFill>
                 <a:latin typeface="Arial Black" pitchFamily="34" charset="0"/>
                 <a:ea typeface="Arial Black" pitchFamily="34" charset="-122"/>
                 <a:cs typeface="Arial Black" pitchFamily="34" charset="-120"/>
               </a:rPr>
-              <a:t>QUÉ APRENDIMOS:  </a:t>
-            </a:r>
-            <a:pPr indent="0" marL="0">
+              <a:t>LIBERACIÓN INMEDIATA</a:t>
+            </a:r>
+            <a:endParaRPr lang="en-US" sz="1300" dirty="0"/>
+          </a:p>
+        </p:txBody>
+      </p:sp>
+      <p:sp>
+        <p:nvSpPr>
+          <p:cNvPr id="31" name="Text 29"/>
+          <p:cNvSpPr txBox="1"/>
+          <p:nvPr/>
+        </p:nvSpPr>
+        <p:spPr>
+          <a:xfrm>
+            <a:off x="7360920" y="5285232"/>
+            <a:ext cx="4114800" cy="914400"/>
+          </a:xfrm>
+          <a:prstGeom prst="rect">
+            <a:avLst/>
+          </a:prstGeom>
+          <a:noFill/>
+          <a:ln/>
+        </p:spPr>
+        <p:txBody>
+          <a:bodyPr wrap="square" lIns="0" tIns="0" rIns="0" bIns="0" rtlCol="0" anchor="t"/>
+          <a:lstStyle/>
+          <a:p>
+            <a:pPr marL="0" indent="0">
+              <a:lnSpc>
+                <a:spcPct val="115000"/>
+              </a:lnSpc>
               <a:buNone/>
             </a:pPr>
             <a:r>
-              <a:rPr lang="en-US" sz="1400" b="1" dirty="0">
-                <a:solidFill>
-                  <a:srgbClr val="3D5AFE"/>
+              <a:rPr lang="en-US" sz="1350" dirty="0">
+                <a:solidFill>
+                  <a:srgbClr val="DDDDDD"/>
                 </a:solidFill>
                 <a:latin typeface="Arial" pitchFamily="34" charset="0"/>
                 <a:ea typeface="Arial" pitchFamily="34" charset="-122"/>
                 <a:cs typeface="Arial" pitchFamily="34" charset="-120"/>
               </a:rPr>
-              <a:t>[1–2 hallazgos que cambiaron tu idea]</a:t>
-            </a:r>
-            <a:endParaRPr lang="en-US" sz="1400" dirty="0"/>
-          </a:p>
-        </p:txBody>
-      </p:sp>
-      <p:sp>
-        <p:nvSpPr>
-          <p:cNvPr id="28" name="Text 26"/>
-          <p:cNvSpPr txBox="1"/>
-          <p:nvPr/>
-        </p:nvSpPr>
-        <p:spPr>
-          <a:xfrm>
-            <a:off x="594360" y="6419088"/>
-            <a:ext cx="8229600" cy="301752"/>
-          </a:xfrm>
-          <a:prstGeom prst="rect">
-            <a:avLst/>
-          </a:prstGeom>
-          <a:noFill/>
-          <a:ln/>
-        </p:spPr>
-        <p:txBody>
-          <a:bodyPr wrap="square" lIns="0" tIns="0" rIns="0" bIns="0" rtlCol="0" anchor="ctr"/>
-          <a:lstStyle/>
-          <a:p>
-            <a:pPr indent="0" marL="0">
-              <a:buNone/>
-            </a:pPr>
-            <a:r>
-              <a:rPr lang="en-US" sz="1000" b="1" spc="100" kern="0" dirty="0">
-                <a:solidFill>
-                  <a:srgbClr val="6B6B6B"/>
+              <a:t>El dinero ya está depositado y retenido. Al aprobar el hito, el freelancer cobra en </a:t>
+            </a:r>
+            <a:r>
+              <a:rPr lang="en-US" sz="1350" b="1" dirty="0">
+                <a:solidFill>
+                  <a:srgbClr val="FFFFFF"/>
                 </a:solidFill>
                 <a:latin typeface="Arial" pitchFamily="34" charset="0"/>
                 <a:ea typeface="Arial" pitchFamily="34" charset="-122"/>
                 <a:cs typeface="Arial" pitchFamily="34" charset="-120"/>
               </a:rPr>
+              <a:t>segundos</a:t>
+            </a:r>
+            <a:r>
+              <a:rPr lang="en-US" sz="1350" dirty="0">
+                <a:solidFill>
+                  <a:srgbClr val="DDDDDD"/>
+                </a:solidFill>
+                <a:latin typeface="Arial" pitchFamily="34" charset="0"/>
+                <a:ea typeface="Arial" pitchFamily="34" charset="-122"/>
+                <a:cs typeface="Arial" pitchFamily="34" charset="-120"/>
+              </a:rPr>
+              <a:t> gracias a Stellar.</a:t>
+            </a:r>
+            <a:endParaRPr lang="en-US" sz="1350" dirty="0"/>
+          </a:p>
+        </p:txBody>
+      </p:sp>
+      <p:sp>
+        <p:nvSpPr>
+          <p:cNvPr id="32" name="Text 30"/>
+          <p:cNvSpPr txBox="1"/>
+          <p:nvPr/>
+        </p:nvSpPr>
+        <p:spPr>
+          <a:xfrm>
+            <a:off x="594360" y="6419088"/>
+            <a:ext cx="8229600" cy="301752"/>
+          </a:xfrm>
+          <a:prstGeom prst="rect">
+            <a:avLst/>
+          </a:prstGeom>
+          <a:noFill/>
+          <a:ln/>
+        </p:spPr>
+        <p:txBody>
+          <a:bodyPr wrap="square" lIns="0" tIns="0" rIns="0" bIns="0" rtlCol="0" anchor="ctr"/>
+          <a:lstStyle/>
+          <a:p>
+            <a:pPr marL="0" indent="0">
+              <a:buNone/>
+            </a:pPr>
+            <a:r>
+              <a:rPr lang="en-US" sz="1000" b="1" kern="0" spc="100" dirty="0">
+                <a:solidFill>
+                  <a:srgbClr val="6B6B6B"/>
+                </a:solidFill>
+                <a:latin typeface="Arial" pitchFamily="34" charset="0"/>
+                <a:ea typeface="Arial" pitchFamily="34" charset="-122"/>
+                <a:cs typeface="Arial" pitchFamily="34" charset="-120"/>
+              </a:rPr>
               <a:t>IDEATÓN STELLAR BOLIVIA 2026  ·  WORKING</a:t>
             </a:r>
             <a:endParaRPr lang="en-US" sz="1000" dirty="0"/>
@@ -3619,7 +3639,7 @@
       </p:sp>
       <p:sp>
         <p:nvSpPr>
-          <p:cNvPr id="29" name="Text 27"/>
+          <p:cNvPr id="33" name="Text 31"/>
           <p:cNvSpPr txBox="1"/>
           <p:nvPr/>
         </p:nvSpPr>
@@ -3638,7 +3658,7 @@
           <a:bodyPr wrap="square" lIns="0" tIns="0" rIns="0" bIns="0" rtlCol="0" anchor="ctr"/>
           <a:lstStyle/>
           <a:p>
-            <a:pPr algn="r" indent="0" marL="0">
+            <a:pPr marL="0" indent="0" algn="r">
               <a:buNone/>
             </a:pPr>
             <a:r>
@@ -3672,6 +3692,7 @@
         <a:solidFill>
           <a:srgbClr val="F7F4EC"/>
         </a:solidFill>
+        <a:effectLst/>
       </p:bgPr>
     </p:bg>
     <p:spTree>
@@ -3709,11 +3730,11 @@
           <a:bodyPr wrap="square" lIns="0" tIns="0" rIns="0" bIns="0" rtlCol="0" anchor="ctr"/>
           <a:lstStyle/>
           <a:p>
-            <a:pPr indent="0" marL="0">
+            <a:pPr marL="0" indent="0">
               <a:buNone/>
             </a:pPr>
             <a:r>
-              <a:rPr lang="en-US" sz="1200" spc="200" kern="0" dirty="0">
+              <a:rPr lang="en-US" sz="1200" kern="0" spc="200" dirty="0">
                 <a:solidFill>
                   <a:srgbClr val="3D5AFE"/>
                 </a:solidFill>
@@ -3748,7 +3769,7 @@
           <a:bodyPr wrap="square" lIns="0" tIns="0" rIns="0" bIns="0" rtlCol="0" anchor="ctr"/>
           <a:lstStyle/>
           <a:p>
-            <a:pPr indent="0" marL="0">
+            <a:pPr marL="0" indent="0">
               <a:buNone/>
             </a:pPr>
             <a:r>
@@ -3762,9 +3783,6 @@
               </a:rPr>
               <a:t>CÓMO FUNCIONA </a:t>
             </a:r>
-            <a:pPr indent="0" marL="0">
-              <a:buNone/>
-            </a:pPr>
             <a:r>
               <a:rPr lang="en-US" sz="3400" dirty="0">
                 <a:solidFill>
@@ -3801,7 +3819,7 @@
           <a:bodyPr wrap="square" lIns="0" tIns="0" rIns="0" bIns="0" rtlCol="0" anchor="ctr"/>
           <a:lstStyle/>
           <a:p>
-            <a:pPr indent="0" marL="0">
+            <a:pPr marL="0" indent="0">
               <a:buNone/>
             </a:pPr>
             <a:r>
@@ -3905,7 +3923,7 @@
           <a:bodyPr wrap="square" lIns="0" tIns="0" rIns="0" bIns="0" rtlCol="0" anchor="ctr"/>
           <a:lstStyle/>
           <a:p>
-            <a:pPr algn="ctr" indent="0" marL="0">
+            <a:pPr marL="0" indent="0" algn="ctr">
               <a:buNone/>
             </a:pPr>
             <a:r>
@@ -3944,7 +3962,7 @@
           <a:bodyPr wrap="square" lIns="0" tIns="0" rIns="0" bIns="0" rtlCol="0" anchor="ctr"/>
           <a:lstStyle/>
           <a:p>
-            <a:pPr indent="0" marL="0">
+            <a:pPr marL="0" indent="0">
               <a:buNone/>
             </a:pPr>
             <a:r>
@@ -3983,7 +4001,7 @@
           <a:bodyPr wrap="square" lIns="0" tIns="0" rIns="0" bIns="0" rtlCol="0" anchor="ctr"/>
           <a:lstStyle/>
           <a:p>
-            <a:pPr indent="0" marL="0">
+            <a:pPr marL="0" indent="0">
               <a:buNone/>
             </a:pPr>
             <a:r>
@@ -4087,7 +4105,7 @@
           <a:bodyPr wrap="square" lIns="0" tIns="0" rIns="0" bIns="0" rtlCol="0" anchor="ctr"/>
           <a:lstStyle/>
           <a:p>
-            <a:pPr algn="ctr" indent="0" marL="0">
+            <a:pPr marL="0" indent="0" algn="ctr">
               <a:buNone/>
             </a:pPr>
             <a:r>
@@ -4126,7 +4144,7 @@
           <a:bodyPr wrap="square" lIns="0" tIns="0" rIns="0" bIns="0" rtlCol="0" anchor="ctr"/>
           <a:lstStyle/>
           <a:p>
-            <a:pPr indent="0" marL="0">
+            <a:pPr marL="0" indent="0">
               <a:buNone/>
             </a:pPr>
             <a:r>
@@ -4165,7 +4183,7 @@
           <a:bodyPr wrap="square" lIns="0" tIns="0" rIns="0" bIns="0" rtlCol="0" anchor="ctr"/>
           <a:lstStyle/>
           <a:p>
-            <a:pPr indent="0" marL="0">
+            <a:pPr marL="0" indent="0">
               <a:buNone/>
             </a:pPr>
             <a:r>
@@ -4269,7 +4287,7 @@
           <a:bodyPr wrap="square" lIns="0" tIns="0" rIns="0" bIns="0" rtlCol="0" anchor="ctr"/>
           <a:lstStyle/>
           <a:p>
-            <a:pPr algn="ctr" indent="0" marL="0">
+            <a:pPr marL="0" indent="0" algn="ctr">
               <a:buNone/>
             </a:pPr>
             <a:r>
@@ -4308,7 +4326,7 @@
           <a:bodyPr wrap="square" lIns="0" tIns="0" rIns="0" bIns="0" rtlCol="0" anchor="ctr"/>
           <a:lstStyle/>
           <a:p>
-            <a:pPr indent="0" marL="0">
+            <a:pPr marL="0" indent="0">
               <a:buNone/>
             </a:pPr>
             <a:r>
@@ -4347,7 +4365,7 @@
           <a:bodyPr wrap="square" lIns="0" tIns="0" rIns="0" bIns="0" rtlCol="0" anchor="ctr"/>
           <a:lstStyle/>
           <a:p>
-            <a:pPr indent="0" marL="0">
+            <a:pPr marL="0" indent="0">
               <a:buNone/>
             </a:pPr>
             <a:r>
@@ -4451,7 +4469,7 @@
           <a:bodyPr wrap="square" lIns="0" tIns="0" rIns="0" bIns="0" rtlCol="0" anchor="ctr"/>
           <a:lstStyle/>
           <a:p>
-            <a:pPr algn="ctr" indent="0" marL="0">
+            <a:pPr marL="0" indent="0" algn="ctr">
               <a:buNone/>
             </a:pPr>
             <a:r>
@@ -4490,7 +4508,7 @@
           <a:bodyPr wrap="square" lIns="0" tIns="0" rIns="0" bIns="0" rtlCol="0" anchor="ctr"/>
           <a:lstStyle/>
           <a:p>
-            <a:pPr indent="0" marL="0">
+            <a:pPr marL="0" indent="0">
               <a:buNone/>
             </a:pPr>
             <a:r>
@@ -4529,7 +4547,7 @@
           <a:bodyPr wrap="square" lIns="0" tIns="0" rIns="0" bIns="0" rtlCol="0" anchor="ctr"/>
           <a:lstStyle/>
           <a:p>
-            <a:pPr indent="0" marL="0">
+            <a:pPr marL="0" indent="0">
               <a:buNone/>
             </a:pPr>
             <a:r>
@@ -4593,7 +4611,7 @@
           <a:bodyPr wrap="square" lIns="0" tIns="0" rIns="0" bIns="0" rtlCol="0" anchor="ctr"/>
           <a:lstStyle/>
           <a:p>
-            <a:pPr indent="0" marL="0">
+            <a:pPr marL="0" indent="0">
               <a:buNone/>
             </a:pPr>
             <a:r>
@@ -4632,7 +4650,7 @@
           <a:bodyPr wrap="square" lIns="0" tIns="0" rIns="0" bIns="0" rtlCol="0" anchor="ctr"/>
           <a:lstStyle/>
           <a:p>
-            <a:pPr indent="0" marL="0">
+            <a:pPr marL="0" indent="0">
               <a:buNone/>
             </a:pPr>
             <a:r>
@@ -4646,9 +4664,6 @@
               </a:rPr>
               <a:t>Si el cliente no responde en </a:t>
             </a:r>
-            <a:pPr indent="0" marL="0">
-              <a:buNone/>
-            </a:pPr>
             <a:r>
               <a:rPr lang="en-US" sz="1200" b="1" dirty="0">
                 <a:solidFill>
@@ -4660,9 +4675,6 @@
               </a:rPr>
               <a:t>[7]</a:t>
             </a:r>
-            <a:pPr indent="0" marL="0">
-              <a:buNone/>
-            </a:pPr>
             <a:r>
               <a:rPr lang="en-US" sz="1200" dirty="0">
                 <a:solidFill>
@@ -4724,7 +4736,7 @@
           <a:bodyPr wrap="square" lIns="0" tIns="0" rIns="0" bIns="0" rtlCol="0" anchor="ctr"/>
           <a:lstStyle/>
           <a:p>
-            <a:pPr indent="0" marL="0">
+            <a:pPr marL="0" indent="0">
               <a:buNone/>
             </a:pPr>
             <a:r>
@@ -4763,7 +4775,7 @@
           <a:bodyPr wrap="square" lIns="0" tIns="0" rIns="0" bIns="0" rtlCol="0" anchor="ctr"/>
           <a:lstStyle/>
           <a:p>
-            <a:pPr indent="0" marL="0">
+            <a:pPr marL="0" indent="0">
               <a:buNone/>
             </a:pPr>
             <a:r>
@@ -4827,7 +4839,7 @@
           <a:bodyPr wrap="square" lIns="0" tIns="0" rIns="0" bIns="0" rtlCol="0" anchor="ctr"/>
           <a:lstStyle/>
           <a:p>
-            <a:pPr indent="0" marL="0">
+            <a:pPr marL="0" indent="0">
               <a:buNone/>
             </a:pPr>
             <a:r>
@@ -4866,7 +4878,7 @@
           <a:bodyPr wrap="square" lIns="0" tIns="0" rIns="0" bIns="0" rtlCol="0" anchor="ctr"/>
           <a:lstStyle/>
           <a:p>
-            <a:pPr indent="0" marL="0">
+            <a:pPr marL="0" indent="0">
               <a:buNone/>
             </a:pPr>
             <a:r>
@@ -4905,11 +4917,11 @@
           <a:bodyPr wrap="square" lIns="0" tIns="0" rIns="0" bIns="0" rtlCol="0" anchor="ctr"/>
           <a:lstStyle/>
           <a:p>
-            <a:pPr indent="0" marL="0">
+            <a:pPr marL="0" indent="0">
               <a:buNone/>
             </a:pPr>
             <a:r>
-              <a:rPr lang="en-US" sz="1000" b="1" spc="100" kern="0" dirty="0">
+              <a:rPr lang="en-US" sz="1000" b="1" kern="0" spc="100" dirty="0">
                 <a:solidFill>
                   <a:srgbClr val="6B6B6B"/>
                 </a:solidFill>
@@ -4944,7 +4956,7 @@
           <a:bodyPr wrap="square" lIns="0" tIns="0" rIns="0" bIns="0" rtlCol="0" anchor="ctr"/>
           <a:lstStyle/>
           <a:p>
-            <a:pPr algn="r" indent="0" marL="0">
+            <a:pPr marL="0" indent="0" algn="r">
               <a:buNone/>
             </a:pPr>
             <a:r>
@@ -4978,6 +4990,7 @@
         <a:solidFill>
           <a:srgbClr val="F7F4EC"/>
         </a:solidFill>
+        <a:effectLst/>
       </p:bgPr>
     </p:bg>
     <p:spTree>
@@ -5015,11 +5028,11 @@
           <a:bodyPr wrap="square" lIns="0" tIns="0" rIns="0" bIns="0" rtlCol="0" anchor="ctr"/>
           <a:lstStyle/>
           <a:p>
-            <a:pPr indent="0" marL="0">
+            <a:pPr marL="0" indent="0">
               <a:buNone/>
             </a:pPr>
             <a:r>
-              <a:rPr lang="en-US" sz="1200" spc="200" kern="0" dirty="0">
+              <a:rPr lang="en-US" sz="1200" kern="0" spc="200" dirty="0">
                 <a:solidFill>
                   <a:srgbClr val="00A676"/>
                 </a:solidFill>
@@ -5054,7 +5067,7 @@
           <a:bodyPr wrap="square" lIns="0" tIns="0" rIns="0" bIns="0" rtlCol="0" anchor="ctr"/>
           <a:lstStyle/>
           <a:p>
-            <a:pPr indent="0" marL="0">
+            <a:pPr marL="0" indent="0">
               <a:buNone/>
             </a:pPr>
             <a:r>
@@ -5068,9 +5081,6 @@
               </a:rPr>
               <a:t>POR QUÉ </a:t>
             </a:r>
-            <a:pPr indent="0" marL="0">
-              <a:buNone/>
-            </a:pPr>
             <a:r>
               <a:rPr lang="en-US" sz="3400" dirty="0">
                 <a:solidFill>
@@ -5107,7 +5117,7 @@
           <a:bodyPr wrap="square" lIns="0" tIns="0" rIns="0" bIns="0" rtlCol="0" anchor="ctr"/>
           <a:lstStyle/>
           <a:p>
-            <a:pPr indent="0" marL="0">
+            <a:pPr marL="0" indent="0">
               <a:buNone/>
             </a:pPr>
             <a:r>
@@ -5161,15 +5171,27 @@
         </p:nvGraphicFramePr>
         <p:xfrm>
           <a:off x="594360" y="2286000"/>
-          <a:ext cx="6812280" cy="914400"/>
+          <a:ext cx="6812280" cy="3134360"/>
         </p:xfrm>
         <a:graphic>
           <a:graphicData uri="http://schemas.openxmlformats.org/drawingml/2006/table">
             <a:tbl>
               <a:tblPr/>
               <a:tblGrid>
-                <a:gridCol w="3063240"/>
-                <a:gridCol w="3749040"/>
+                <a:gridCol w="3063240">
+                  <a:extLst>
+                    <a:ext uri="{9D8B030D-6E8A-4147-A177-3AD203B41FA5}">
+                      <a16:colId xmlns:a16="http://schemas.microsoft.com/office/drawing/2014/main" val="20000"/>
+                    </a:ext>
+                  </a:extLst>
+                </a:gridCol>
+                <a:gridCol w="3749040">
+                  <a:extLst>
+                    <a:ext uri="{9D8B030D-6E8A-4147-A177-3AD203B41FA5}">
+                      <a16:colId xmlns:a16="http://schemas.microsoft.com/office/drawing/2014/main" val="20001"/>
+                    </a:ext>
+                  </a:extLst>
+                </a:gridCol>
               </a:tblGrid>
               <a:tr h="512064">
                 <a:tc>
@@ -5177,7 +5199,7 @@
                     <a:bodyPr/>
                     <a:lstStyle/>
                     <a:p>
-                      <a:pPr algn="l" indent="0" marL="0">
+                      <a:pPr marL="0" indent="0" algn="l">
                         <a:buNone/>
                       </a:pPr>
                       <a:r>
@@ -5245,7 +5267,7 @@
                     <a:bodyPr/>
                     <a:lstStyle/>
                     <a:p>
-                      <a:pPr algn="l" indent="0" marL="0">
+                      <a:pPr marL="0" indent="0" algn="l">
                         <a:buNone/>
                       </a:pPr>
                       <a:r>
@@ -5308,6 +5330,11 @@
                     </a:solidFill>
                   </a:tcPr>
                 </a:tc>
+                <a:extLst>
+                  <a:ext uri="{0D108BD9-81ED-4DB2-BD59-A6C34878D82A}">
+                    <a16:rowId xmlns:a16="http://schemas.microsoft.com/office/drawing/2014/main" val="10000"/>
+                  </a:ext>
+                </a:extLst>
               </a:tr>
               <a:tr h="512064">
                 <a:tc>
@@ -5315,7 +5342,7 @@
                     <a:bodyPr/>
                     <a:lstStyle/>
                     <a:p>
-                      <a:pPr indent="0" marL="0">
+                      <a:pPr marL="0" indent="0">
                         <a:buNone/>
                       </a:pPr>
                       <a:r>
@@ -5383,7 +5410,7 @@
                     <a:bodyPr/>
                     <a:lstStyle/>
                     <a:p>
-                      <a:pPr indent="0" marL="0">
+                      <a:pPr marL="0" indent="0">
                         <a:buNone/>
                       </a:pPr>
                       <a:r>
@@ -5446,6 +5473,11 @@
                     </a:solidFill>
                   </a:tcPr>
                 </a:tc>
+                <a:extLst>
+                  <a:ext uri="{0D108BD9-81ED-4DB2-BD59-A6C34878D82A}">
+                    <a16:rowId xmlns:a16="http://schemas.microsoft.com/office/drawing/2014/main" val="10001"/>
+                  </a:ext>
+                </a:extLst>
               </a:tr>
               <a:tr h="512064">
                 <a:tc>
@@ -5453,7 +5485,7 @@
                     <a:bodyPr/>
                     <a:lstStyle/>
                     <a:p>
-                      <a:pPr indent="0" marL="0">
+                      <a:pPr marL="0" indent="0">
                         <a:buNone/>
                       </a:pPr>
                       <a:r>
@@ -5521,7 +5553,7 @@
                     <a:bodyPr/>
                     <a:lstStyle/>
                     <a:p>
-                      <a:pPr indent="0" marL="0">
+                      <a:pPr marL="0" indent="0">
                         <a:buNone/>
                       </a:pPr>
                       <a:r>
@@ -5584,6 +5616,11 @@
                     </a:solidFill>
                   </a:tcPr>
                 </a:tc>
+                <a:extLst>
+                  <a:ext uri="{0D108BD9-81ED-4DB2-BD59-A6C34878D82A}">
+                    <a16:rowId xmlns:a16="http://schemas.microsoft.com/office/drawing/2014/main" val="10002"/>
+                  </a:ext>
+                </a:extLst>
               </a:tr>
               <a:tr h="512064">
                 <a:tc>
@@ -5591,7 +5628,7 @@
                     <a:bodyPr/>
                     <a:lstStyle/>
                     <a:p>
-                      <a:pPr indent="0" marL="0">
+                      <a:pPr marL="0" indent="0">
                         <a:buNone/>
                       </a:pPr>
                       <a:r>
@@ -5659,7 +5696,7 @@
                     <a:bodyPr/>
                     <a:lstStyle/>
                     <a:p>
-                      <a:pPr indent="0" marL="0">
+                      <a:pPr marL="0" indent="0">
                         <a:buNone/>
                       </a:pPr>
                       <a:r>
@@ -5722,6 +5759,11 @@
                     </a:solidFill>
                   </a:tcPr>
                 </a:tc>
+                <a:extLst>
+                  <a:ext uri="{0D108BD9-81ED-4DB2-BD59-A6C34878D82A}">
+                    <a16:rowId xmlns:a16="http://schemas.microsoft.com/office/drawing/2014/main" val="10003"/>
+                  </a:ext>
+                </a:extLst>
               </a:tr>
               <a:tr h="512064">
                 <a:tc>
@@ -5729,7 +5771,7 @@
                     <a:bodyPr/>
                     <a:lstStyle/>
                     <a:p>
-                      <a:pPr indent="0" marL="0">
+                      <a:pPr marL="0" indent="0">
                         <a:buNone/>
                       </a:pPr>
                       <a:r>
@@ -5797,7 +5839,7 @@
                     <a:bodyPr/>
                     <a:lstStyle/>
                     <a:p>
-                      <a:pPr indent="0" marL="0">
+                      <a:pPr marL="0" indent="0">
                         <a:buNone/>
                       </a:pPr>
                       <a:r>
@@ -5860,6 +5902,11 @@
                     </a:solidFill>
                   </a:tcPr>
                 </a:tc>
+                <a:extLst>
+                  <a:ext uri="{0D108BD9-81ED-4DB2-BD59-A6C34878D82A}">
+                    <a16:rowId xmlns:a16="http://schemas.microsoft.com/office/drawing/2014/main" val="10004"/>
+                  </a:ext>
+                </a:extLst>
               </a:tr>
               <a:tr h="512064">
                 <a:tc>
@@ -5867,7 +5914,7 @@
                     <a:bodyPr/>
                     <a:lstStyle/>
                     <a:p>
-                      <a:pPr indent="0" marL="0">
+                      <a:pPr marL="0" indent="0">
                         <a:buNone/>
                       </a:pPr>
                       <a:r>
@@ -5935,7 +5982,7 @@
                     <a:bodyPr/>
                     <a:lstStyle/>
                     <a:p>
-                      <a:pPr indent="0" marL="0">
+                      <a:pPr marL="0" indent="0">
                         <a:buNone/>
                       </a:pPr>
                       <a:r>
@@ -5998,6 +6045,11 @@
                     </a:solidFill>
                   </a:tcPr>
                 </a:tc>
+                <a:extLst>
+                  <a:ext uri="{0D108BD9-81ED-4DB2-BD59-A6C34878D82A}">
+                    <a16:rowId xmlns:a16="http://schemas.microsoft.com/office/drawing/2014/main" val="10005"/>
+                  </a:ext>
+                </a:extLst>
               </a:tr>
             </a:tbl>
           </a:graphicData>
@@ -6089,7 +6141,7 @@
           <a:bodyPr wrap="square" lIns="0" tIns="0" rIns="0" bIns="0" rtlCol="0" anchor="ctr"/>
           <a:lstStyle/>
           <a:p>
-            <a:pPr algn="ctr" indent="0" marL="0">
+            <a:pPr marL="0" indent="0" algn="ctr">
               <a:buNone/>
             </a:pPr>
             <a:r>
@@ -6128,7 +6180,7 @@
           <a:bodyPr wrap="square" lIns="0" tIns="0" rIns="0" bIns="0" rtlCol="0" anchor="ctr"/>
           <a:lstStyle/>
           <a:p>
-            <a:pPr indent="0" marL="0">
+            <a:pPr marL="0" indent="0">
               <a:buNone/>
             </a:pPr>
             <a:r>
@@ -6167,7 +6219,7 @@
           <a:bodyPr wrap="square" lIns="0" tIns="0" rIns="0" bIns="0" rtlCol="0" anchor="ctr"/>
           <a:lstStyle/>
           <a:p>
-            <a:pPr indent="0" marL="0">
+            <a:pPr marL="0" indent="0">
               <a:buNone/>
             </a:pPr>
             <a:r>
@@ -6251,7 +6303,7 @@
           <a:bodyPr wrap="square" lIns="0" tIns="0" rIns="0" bIns="0" rtlCol="0" anchor="ctr"/>
           <a:lstStyle/>
           <a:p>
-            <a:pPr indent="0" marL="0">
+            <a:pPr marL="0" indent="0">
               <a:buNone/>
             </a:pPr>
             <a:r>
@@ -6290,7 +6342,7 @@
           <a:bodyPr wrap="square" lIns="0" tIns="0" rIns="0" bIns="0" rtlCol="0" anchor="ctr"/>
           <a:lstStyle/>
           <a:p>
-            <a:pPr indent="0" marL="0">
+            <a:pPr marL="0" indent="0">
               <a:buNone/>
             </a:pPr>
             <a:r>
@@ -6329,11 +6381,11 @@
           <a:bodyPr wrap="square" lIns="0" tIns="0" rIns="0" bIns="0" rtlCol="0" anchor="ctr"/>
           <a:lstStyle/>
           <a:p>
-            <a:pPr indent="0" marL="0">
+            <a:pPr marL="0" indent="0">
               <a:buNone/>
             </a:pPr>
             <a:r>
-              <a:rPr lang="en-US" sz="1000" b="1" spc="100" kern="0" dirty="0">
+              <a:rPr lang="en-US" sz="1000" b="1" kern="0" spc="100" dirty="0">
                 <a:solidFill>
                   <a:srgbClr val="6B6B6B"/>
                 </a:solidFill>
@@ -6368,7 +6420,7 @@
           <a:bodyPr wrap="square" lIns="0" tIns="0" rIns="0" bIns="0" rtlCol="0" anchor="ctr"/>
           <a:lstStyle/>
           <a:p>
-            <a:pPr algn="r" indent="0" marL="0">
+            <a:pPr marL="0" indent="0" algn="r">
               <a:buNone/>
             </a:pPr>
             <a:r>
@@ -6402,6 +6454,7 @@
         <a:solidFill>
           <a:srgbClr val="F7F4EC"/>
         </a:solidFill>
+        <a:effectLst/>
       </p:bgPr>
     </p:bg>
     <p:spTree>
@@ -6439,11 +6492,11 @@
           <a:bodyPr wrap="square" lIns="0" tIns="0" rIns="0" bIns="0" rtlCol="0" anchor="ctr"/>
           <a:lstStyle/>
           <a:p>
-            <a:pPr indent="0" marL="0">
+            <a:pPr marL="0" indent="0">
               <a:buNone/>
             </a:pPr>
             <a:r>
-              <a:rPr lang="en-US" sz="1200" spc="200" kern="0" dirty="0">
+              <a:rPr lang="en-US" sz="1200" kern="0" spc="200" dirty="0">
                 <a:solidFill>
                   <a:srgbClr val="3D5AFE"/>
                 </a:solidFill>
@@ -6478,7 +6531,7 @@
           <a:bodyPr wrap="square" lIns="0" tIns="0" rIns="0" bIns="0" rtlCol="0" anchor="ctr"/>
           <a:lstStyle/>
           <a:p>
-            <a:pPr indent="0" marL="0">
+            <a:pPr marL="0" indent="0">
               <a:buNone/>
             </a:pPr>
             <a:r>
@@ -6492,9 +6545,6 @@
               </a:rPr>
               <a:t>CÓMO </a:t>
             </a:r>
-            <a:pPr indent="0" marL="0">
-              <a:buNone/>
-            </a:pPr>
             <a:r>
               <a:rPr lang="en-US" sz="3400" dirty="0">
                 <a:solidFill>
@@ -6531,7 +6581,7 @@
           <a:bodyPr wrap="square" lIns="0" tIns="0" rIns="0" bIns="0" rtlCol="0" anchor="ctr"/>
           <a:lstStyle/>
           <a:p>
-            <a:pPr indent="0" marL="0">
+            <a:pPr marL="0" indent="0">
               <a:buNone/>
             </a:pPr>
             <a:r>
@@ -6615,7 +6665,7 @@
           <a:bodyPr wrap="square" lIns="0" tIns="0" rIns="0" bIns="0" rtlCol="0" anchor="ctr"/>
           <a:lstStyle/>
           <a:p>
-            <a:pPr indent="0" marL="0">
+            <a:pPr marL="0" indent="0">
               <a:buNone/>
             </a:pPr>
             <a:r>
@@ -6654,7 +6704,7 @@
           <a:bodyPr wrap="square" lIns="0" tIns="0" rIns="0" bIns="0" rtlCol="0" anchor="ctr"/>
           <a:lstStyle/>
           <a:p>
-            <a:pPr indent="0" marL="0">
+            <a:pPr marL="0" indent="0">
               <a:buNone/>
             </a:pPr>
             <a:r>
@@ -6668,9 +6718,6 @@
               </a:rPr>
               <a:t>[5]</a:t>
             </a:r>
-            <a:pPr indent="0" marL="0">
-              <a:buNone/>
-            </a:pPr>
             <a:r>
               <a:rPr lang="en-US" sz="1250" dirty="0">
                 <a:solidFill>
@@ -6752,7 +6799,7 @@
           <a:bodyPr wrap="square" lIns="0" tIns="0" rIns="0" bIns="0" rtlCol="0" anchor="ctr"/>
           <a:lstStyle/>
           <a:p>
-            <a:pPr indent="0" marL="0">
+            <a:pPr marL="0" indent="0">
               <a:buNone/>
             </a:pPr>
             <a:r>
@@ -6791,7 +6838,7 @@
           <a:bodyPr wrap="square" lIns="0" tIns="0" rIns="0" bIns="0" rtlCol="0" anchor="ctr"/>
           <a:lstStyle/>
           <a:p>
-            <a:pPr indent="0" marL="0">
+            <a:pPr marL="0" indent="0">
               <a:buNone/>
             </a:pPr>
             <a:r>
@@ -6805,9 +6852,6 @@
               </a:rPr>
               <a:t>Perfiles y vacantes destacadas: </a:t>
             </a:r>
-            <a:pPr indent="0" marL="0">
-              <a:buNone/>
-            </a:pPr>
             <a:r>
               <a:rPr lang="en-US" sz="1250" b="1" dirty="0">
                 <a:solidFill>
@@ -6819,9 +6863,6 @@
               </a:rPr>
               <a:t>[Bs X]</a:t>
             </a:r>
-            <a:pPr indent="0" marL="0">
-              <a:buNone/>
-            </a:pPr>
             <a:r>
               <a:rPr lang="en-US" sz="1250" dirty="0">
                 <a:solidFill>
@@ -6903,7 +6944,7 @@
           <a:bodyPr wrap="square" lIns="0" tIns="0" rIns="0" bIns="0" rtlCol="0" anchor="ctr"/>
           <a:lstStyle/>
           <a:p>
-            <a:pPr indent="0" marL="0">
+            <a:pPr marL="0" indent="0">
               <a:buNone/>
             </a:pPr>
             <a:r>
@@ -6942,7 +6983,7 @@
           <a:bodyPr wrap="square" lIns="0" tIns="0" rIns="0" bIns="0" rtlCol="0" anchor="ctr"/>
           <a:lstStyle/>
           <a:p>
-            <a:pPr indent="0" marL="0">
+            <a:pPr marL="0" indent="0">
               <a:buNone/>
             </a:pPr>
             <a:r>
@@ -6981,7 +7022,7 @@
           <a:bodyPr wrap="square" lIns="0" tIns="0" rIns="0" bIns="0" rtlCol="0" anchor="ctr"/>
           <a:lstStyle/>
           <a:p>
-            <a:pPr indent="0" marL="0">
+            <a:pPr marL="0" indent="0">
               <a:buNone/>
             </a:pPr>
             <a:r>
@@ -6995,9 +7036,6 @@
               </a:rPr>
               <a:t>EJEMPLO:  </a:t>
             </a:r>
-            <a:pPr indent="0" marL="0">
-              <a:buNone/>
-            </a:pPr>
             <a:r>
               <a:rPr lang="en-US" sz="1400" dirty="0">
                 <a:solidFill>
@@ -7009,9 +7047,6 @@
               </a:rPr>
               <a:t>proyecto de </a:t>
             </a:r>
-            <a:pPr indent="0" marL="0">
-              <a:buNone/>
-            </a:pPr>
             <a:r>
               <a:rPr lang="en-US" sz="1400" b="1" dirty="0">
                 <a:solidFill>
@@ -7023,9 +7058,6 @@
               </a:rPr>
               <a:t>[$150]</a:t>
             </a:r>
-            <a:pPr indent="0" marL="0">
-              <a:buNone/>
-            </a:pPr>
             <a:r>
               <a:rPr lang="en-US" sz="1400" dirty="0">
                 <a:solidFill>
@@ -7037,9 +7069,6 @@
               </a:rPr>
               <a:t>  →  comisión </a:t>
             </a:r>
-            <a:pPr indent="0" marL="0">
-              <a:buNone/>
-            </a:pPr>
             <a:r>
               <a:rPr lang="en-US" sz="1400" b="1" dirty="0">
                 <a:solidFill>
@@ -7051,9 +7080,6 @@
               </a:rPr>
               <a:t>[$7.50]</a:t>
             </a:r>
-            <a:pPr indent="0" marL="0">
-              <a:buNone/>
-            </a:pPr>
             <a:r>
               <a:rPr lang="en-US" sz="1400" dirty="0">
                 <a:solidFill>
@@ -7065,9 +7091,6 @@
               </a:rPr>
               <a:t>  ·  costo de red por 3 liberaciones </a:t>
             </a:r>
-            <a:pPr indent="0" marL="0">
-              <a:buNone/>
-            </a:pPr>
             <a:r>
               <a:rPr lang="en-US" sz="1400" b="1" dirty="0">
                 <a:solidFill>
@@ -7105,31 +7128,55 @@
       </p:sp>
       <p:graphicFrame>
         <p:nvGraphicFramePr>
-          <p:cNvPr id="7" name="Table 0"/>
+          <p:cNvPr id="19" name="Table 0"/>
           <p:cNvGraphicFramePr>
             <a:graphicFrameLocks noGrp="1"/>
           </p:cNvGraphicFramePr>
           <p:nvPr>
             <p:extLst>
               <p:ext uri="{D42A27DB-BD31-4B8C-83A1-F6EECF244321}">
-                <p14:modId xmlns:p14="http://schemas.microsoft.com/office/powerpoint/2010/main" val="1579011935"/>
+                <p14:modId xmlns:p14="http://schemas.microsoft.com/office/powerpoint/2010/main" val="3703344177"/>
               </p:ext>
             </p:extLst>
           </p:nvPr>
         </p:nvGraphicFramePr>
         <p:xfrm>
           <a:off x="594360" y="4617720"/>
-          <a:ext cx="11002975" cy="914400"/>
+          <a:ext cx="11000232" cy="2138680"/>
         </p:xfrm>
         <a:graphic>
           <a:graphicData uri="http://schemas.openxmlformats.org/drawingml/2006/table">
             <a:tbl>
               <a:tblPr/>
               <a:tblGrid>
-                <a:gridCol w="3108960"/>
-                <a:gridCol w="2834640"/>
-                <a:gridCol w="2834640"/>
-                <a:gridCol w="2221992"/>
+                <a:gridCol w="3108960">
+                  <a:extLst>
+                    <a:ext uri="{9D8B030D-6E8A-4147-A177-3AD203B41FA5}">
+                      <a16:colId xmlns:a16="http://schemas.microsoft.com/office/drawing/2014/main" val="20000"/>
+                    </a:ext>
+                  </a:extLst>
+                </a:gridCol>
+                <a:gridCol w="2834640">
+                  <a:extLst>
+                    <a:ext uri="{9D8B030D-6E8A-4147-A177-3AD203B41FA5}">
+                      <a16:colId xmlns:a16="http://schemas.microsoft.com/office/drawing/2014/main" val="20001"/>
+                    </a:ext>
+                  </a:extLst>
+                </a:gridCol>
+                <a:gridCol w="2834640">
+                  <a:extLst>
+                    <a:ext uri="{9D8B030D-6E8A-4147-A177-3AD203B41FA5}">
+                      <a16:colId xmlns:a16="http://schemas.microsoft.com/office/drawing/2014/main" val="20002"/>
+                    </a:ext>
+                  </a:extLst>
+                </a:gridCol>
+                <a:gridCol w="2221992">
+                  <a:extLst>
+                    <a:ext uri="{9D8B030D-6E8A-4147-A177-3AD203B41FA5}">
+                      <a16:colId xmlns:a16="http://schemas.microsoft.com/office/drawing/2014/main" val="20003"/>
+                    </a:ext>
+                  </a:extLst>
+                </a:gridCol>
               </a:tblGrid>
               <a:tr h="411480">
                 <a:tc>
@@ -7137,7 +7184,7 @@
                     <a:bodyPr/>
                     <a:lstStyle/>
                     <a:p>
-                      <a:pPr algn="l" indent="0" marL="0">
+                      <a:pPr marL="0" indent="0" algn="l">
                         <a:buNone/>
                       </a:pPr>
                       <a:endParaRPr lang="en-US" sz="1200" dirty="0">
@@ -7194,7 +7241,7 @@
                     <a:bodyPr/>
                     <a:lstStyle/>
                     <a:p>
-                      <a:pPr algn="ctr" indent="0" marL="0">
+                      <a:pPr marL="0" indent="0" algn="ctr">
                         <a:buNone/>
                       </a:pPr>
                       <a:r>
@@ -7262,7 +7309,7 @@
                     <a:bodyPr/>
                     <a:lstStyle/>
                     <a:p>
-                      <a:pPr algn="ctr" indent="0" marL="0">
+                      <a:pPr marL="0" indent="0" algn="ctr">
                         <a:buNone/>
                       </a:pPr>
                       <a:r>
@@ -7274,7 +7321,18 @@
                           <a:ea typeface="Arial Black" pitchFamily="34" charset="-122"/>
                           <a:cs typeface="Arial Black" pitchFamily="34" charset="-120"/>
                         </a:rPr>
-                        <a:t>Grupos de Facebook</a:t>
+                        <a:t>Grupos de Redes </a:t>
+                      </a:r>
+                      <a:r>
+                        <a:rPr lang="en-US" sz="1200" dirty="0" err="1">
+                          <a:solidFill>
+                            <a:srgbClr val="FFFFFF"/>
+                          </a:solidFill>
+                          <a:latin typeface="Arial Black" pitchFamily="34" charset="0"/>
+                          <a:ea typeface="Arial Black" pitchFamily="34" charset="-122"/>
+                          <a:cs typeface="Arial Black" pitchFamily="34" charset="-120"/>
+                        </a:rPr>
+                        <a:t>Sociales</a:t>
                       </a:r>
                       <a:endParaRPr lang="en-US" sz="1200" dirty="0">
                         <a:latin typeface="Arial Black" charset="0"/>
@@ -7330,7 +7388,7 @@
                     <a:bodyPr/>
                     <a:lstStyle/>
                     <a:p>
-                      <a:pPr algn="ctr" indent="0" marL="0">
+                      <a:pPr marL="0" indent="0" algn="ctr">
                         <a:buNone/>
                       </a:pPr>
                       <a:r>
@@ -7393,6 +7451,11 @@
                     </a:solidFill>
                   </a:tcPr>
                 </a:tc>
+                <a:extLst>
+                  <a:ext uri="{0D108BD9-81ED-4DB2-BD59-A6C34878D82A}">
+                    <a16:rowId xmlns:a16="http://schemas.microsoft.com/office/drawing/2014/main" val="10000"/>
+                  </a:ext>
+                </a:extLst>
               </a:tr>
               <a:tr h="411480">
                 <a:tc>
@@ -7400,7 +7463,7 @@
                     <a:bodyPr/>
                     <a:lstStyle/>
                     <a:p>
-                      <a:pPr algn="l" indent="0" marL="0">
+                      <a:pPr marL="0" indent="0" algn="l">
                         <a:buNone/>
                       </a:pPr>
                       <a:r>
@@ -7468,7 +7531,7 @@
                     <a:bodyPr/>
                     <a:lstStyle/>
                     <a:p>
-                      <a:pPr algn="ctr" indent="0" marL="0">
+                      <a:pPr marL="0" indent="0" algn="ctr">
                         <a:buNone/>
                       </a:pPr>
                       <a:r>
@@ -7480,7 +7543,51 @@
                           <a:ea typeface="Arial" pitchFamily="34" charset="-122"/>
                           <a:cs typeface="Arial" pitchFamily="34" charset="-120"/>
                         </a:rPr>
-                        <a:t>Compites con expertos</a:t>
+                        <a:t>Compites con </a:t>
+                      </a:r>
+                      <a:r>
+                        <a:rPr lang="en-US" sz="1200" dirty="0" err="1">
+                          <a:solidFill>
+                            <a:srgbClr val="222222"/>
+                          </a:solidFill>
+                          <a:latin typeface="Arial" pitchFamily="34" charset="0"/>
+                          <a:ea typeface="Arial" pitchFamily="34" charset="-122"/>
+                          <a:cs typeface="Arial" pitchFamily="34" charset="-120"/>
+                        </a:rPr>
+                        <a:t>expertos</a:t>
+                      </a:r>
+                      <a:r>
+                        <a:rPr lang="en-US" sz="1200" dirty="0">
+                          <a:solidFill>
+                            <a:srgbClr val="222222"/>
+                          </a:solidFill>
+                          <a:latin typeface="Arial" pitchFamily="34" charset="0"/>
+                          <a:ea typeface="Arial" pitchFamily="34" charset="-122"/>
+                          <a:cs typeface="Arial" pitchFamily="34" charset="-120"/>
+                        </a:rPr>
+                        <a:t>(Mercado </a:t>
+                      </a:r>
+                      <a:r>
+                        <a:rPr lang="en-US" sz="1200" dirty="0" err="1">
+                          <a:solidFill>
+                            <a:srgbClr val="222222"/>
+                          </a:solidFill>
+                          <a:latin typeface="Arial" pitchFamily="34" charset="0"/>
+                          <a:ea typeface="Arial" pitchFamily="34" charset="-122"/>
+                          <a:cs typeface="Arial" pitchFamily="34" charset="-120"/>
+                        </a:rPr>
+                        <a:t>saturado</a:t>
+                      </a:r>
+                      <a:r>
+                        <a:rPr lang="en-US" sz="1200" dirty="0">
+                          <a:solidFill>
+                            <a:srgbClr val="222222"/>
+                          </a:solidFill>
+                          <a:latin typeface="Arial" pitchFamily="34" charset="0"/>
+                          <a:ea typeface="Arial" pitchFamily="34" charset="-122"/>
+                          <a:cs typeface="Arial" pitchFamily="34" charset="-120"/>
+                        </a:rPr>
+                        <a:t>)</a:t>
                       </a:r>
                       <a:endParaRPr lang="en-US" sz="1200" dirty="0">
                         <a:latin typeface="Arial" charset="0"/>
@@ -7536,7 +7643,7 @@
                     <a:bodyPr/>
                     <a:lstStyle/>
                     <a:p>
-                      <a:pPr algn="ctr" indent="0" marL="0">
+                      <a:pPr marL="0" indent="0" algn="ctr">
                         <a:buNone/>
                       </a:pPr>
                       <a:r>
@@ -7604,7 +7711,7 @@
                     <a:bodyPr/>
                     <a:lstStyle/>
                     <a:p>
-                      <a:pPr algn="ctr" indent="0" marL="0">
+                      <a:pPr marL="0" indent="0" algn="ctr">
                         <a:buNone/>
                       </a:pPr>
                       <a:r>
@@ -7667,6 +7774,11 @@
                     </a:solidFill>
                   </a:tcPr>
                 </a:tc>
+                <a:extLst>
+                  <a:ext uri="{0D108BD9-81ED-4DB2-BD59-A6C34878D82A}">
+                    <a16:rowId xmlns:a16="http://schemas.microsoft.com/office/drawing/2014/main" val="10001"/>
+                  </a:ext>
+                </a:extLst>
               </a:tr>
               <a:tr h="411480">
                 <a:tc>
@@ -7674,7 +7786,7 @@
                     <a:bodyPr/>
                     <a:lstStyle/>
                     <a:p>
-                      <a:pPr algn="l" indent="0" marL="0">
+                      <a:pPr marL="0" indent="0" algn="l">
                         <a:buNone/>
                       </a:pPr>
                       <a:r>
@@ -7742,7 +7854,7 @@
                     <a:bodyPr/>
                     <a:lstStyle/>
                     <a:p>
-                      <a:pPr algn="ctr" indent="0" marL="0">
+                      <a:pPr marL="0" indent="0" algn="ctr">
                         <a:buNone/>
                       </a:pPr>
                       <a:r>
@@ -7810,7 +7922,7 @@
                     <a:bodyPr/>
                     <a:lstStyle/>
                     <a:p>
-                      <a:pPr algn="ctr" indent="0" marL="0">
+                      <a:pPr marL="0" indent="0" algn="ctr">
                         <a:buNone/>
                       </a:pPr>
                       <a:r>
@@ -7878,7 +7990,7 @@
                     <a:bodyPr/>
                     <a:lstStyle/>
                     <a:p>
-                      <a:pPr algn="ctr" indent="0" marL="0">
+                      <a:pPr marL="0" indent="0" algn="ctr">
                         <a:buNone/>
                       </a:pPr>
                       <a:r>
@@ -7941,6 +8053,11 @@
                     </a:solidFill>
                   </a:tcPr>
                 </a:tc>
+                <a:extLst>
+                  <a:ext uri="{0D108BD9-81ED-4DB2-BD59-A6C34878D82A}">
+                    <a16:rowId xmlns:a16="http://schemas.microsoft.com/office/drawing/2014/main" val="10002"/>
+                  </a:ext>
+                </a:extLst>
               </a:tr>
               <a:tr h="411480">
                 <a:tc>
@@ -7948,7 +8065,7 @@
                     <a:bodyPr/>
                     <a:lstStyle/>
                     <a:p>
-                      <a:pPr algn="l" indent="0" marL="0">
+                      <a:pPr marL="0" indent="0" algn="l">
                         <a:buNone/>
                       </a:pPr>
                       <a:r>
@@ -8016,7 +8133,7 @@
                     <a:bodyPr/>
                     <a:lstStyle/>
                     <a:p>
-                      <a:pPr algn="ctr" indent="0" marL="0">
+                      <a:pPr marL="0" indent="0" algn="ctr">
                         <a:buNone/>
                       </a:pPr>
                       <a:r>
@@ -8084,7 +8201,7 @@
                     <a:bodyPr/>
                     <a:lstStyle/>
                     <a:p>
-                      <a:pPr algn="ctr" indent="0" marL="0">
+                      <a:pPr marL="0" indent="0" algn="ctr">
                         <a:buNone/>
                       </a:pPr>
                       <a:r>
@@ -8152,7 +8269,7 @@
                     <a:bodyPr/>
                     <a:lstStyle/>
                     <a:p>
-                      <a:pPr algn="ctr" indent="0" marL="0">
+                      <a:pPr marL="0" indent="0" algn="ctr">
                         <a:buNone/>
                       </a:pPr>
                       <a:r>
@@ -8215,6 +8332,11 @@
                     </a:solidFill>
                   </a:tcPr>
                 </a:tc>
+                <a:extLst>
+                  <a:ext uri="{0D108BD9-81ED-4DB2-BD59-A6C34878D82A}">
+                    <a16:rowId xmlns:a16="http://schemas.microsoft.com/office/drawing/2014/main" val="10003"/>
+                  </a:ext>
+                </a:extLst>
               </a:tr>
               <a:tr h="411480">
                 <a:tc>
@@ -8222,7 +8344,7 @@
                     <a:bodyPr/>
                     <a:lstStyle/>
                     <a:p>
-                      <a:pPr algn="l" indent="0" marL="0">
+                      <a:pPr marL="0" indent="0" algn="l">
                         <a:buNone/>
                       </a:pPr>
                       <a:r>
@@ -8290,7 +8412,7 @@
                     <a:bodyPr/>
                     <a:lstStyle/>
                     <a:p>
-                      <a:pPr algn="ctr" indent="0" marL="0">
+                      <a:pPr marL="0" indent="0" algn="ctr">
                         <a:buNone/>
                       </a:pPr>
                       <a:r>
@@ -8302,7 +8424,7 @@
                           <a:ea typeface="Arial" pitchFamily="34" charset="-122"/>
                           <a:cs typeface="Arial" pitchFamily="34" charset="-120"/>
                         </a:rPr>
-                        <a:t>[X]%</a:t>
+                        <a:t>Si</a:t>
                       </a:r>
                       <a:endParaRPr lang="en-US" sz="1200" dirty="0">
                         <a:latin typeface="Arial" charset="0"/>
@@ -8358,7 +8480,7 @@
                     <a:bodyPr/>
                     <a:lstStyle/>
                     <a:p>
-                      <a:pPr algn="ctr" indent="0" marL="0">
+                      <a:pPr marL="0" indent="0" algn="ctr">
                         <a:buNone/>
                       </a:pPr>
                       <a:r>
@@ -8367,10 +8489,10 @@
                             <a:srgbClr val="222222"/>
                           </a:solidFill>
                           <a:latin typeface="Arial" pitchFamily="34" charset="0"/>
-                          <a:ea typeface="Arial" pitchFamily="34" charset="-122"/>
+                          <a:ea typeface="Arial" charset="0"/>
                           <a:cs typeface="Arial" pitchFamily="34" charset="-120"/>
                         </a:rPr>
-                        <a:t>0%</a:t>
+                        <a:t>No</a:t>
                       </a:r>
                       <a:endParaRPr lang="en-US" sz="1200" dirty="0">
                         <a:latin typeface="Arial" charset="0"/>
@@ -8426,7 +8548,7 @@
                     <a:bodyPr/>
                     <a:lstStyle/>
                     <a:p>
-                      <a:pPr algn="ctr" indent="0" marL="0">
+                      <a:pPr marL="0" indent="0" algn="ctr">
                         <a:buNone/>
                       </a:pPr>
                       <a:r>
@@ -8489,6 +8611,11 @@
                     </a:solidFill>
                   </a:tcPr>
                 </a:tc>
+                <a:extLst>
+                  <a:ext uri="{0D108BD9-81ED-4DB2-BD59-A6C34878D82A}">
+                    <a16:rowId xmlns:a16="http://schemas.microsoft.com/office/drawing/2014/main" val="10004"/>
+                  </a:ext>
+                </a:extLst>
               </a:tr>
             </a:tbl>
           </a:graphicData>
@@ -8502,8 +8629,8 @@
         </p:nvSpPr>
         <p:spPr>
           <a:xfrm>
-            <a:off x="594360" y="6419088"/>
-            <a:ext cx="8229600" cy="301752"/>
+            <a:off x="8449733" y="123444"/>
+            <a:ext cx="4165600" cy="301752"/>
           </a:xfrm>
           <a:prstGeom prst="rect">
             <a:avLst/>
@@ -8515,11 +8642,11 @@
           <a:bodyPr wrap="square" lIns="0" tIns="0" rIns="0" bIns="0" rtlCol="0" anchor="ctr"/>
           <a:lstStyle/>
           <a:p>
-            <a:pPr indent="0" marL="0">
+            <a:pPr marL="0" indent="0">
               <a:buNone/>
             </a:pPr>
             <a:r>
-              <a:rPr lang="en-US" sz="1000" b="1" spc="100" kern="0" dirty="0">
+              <a:rPr lang="en-US" sz="1000" b="1" kern="0" spc="100" dirty="0">
                 <a:solidFill>
                   <a:srgbClr val="6B6B6B"/>
                 </a:solidFill>
@@ -8541,7 +8668,7 @@
         </p:nvSpPr>
         <p:spPr>
           <a:xfrm>
-            <a:off x="10682935" y="6419088"/>
+            <a:off x="11045952" y="6510528"/>
             <a:ext cx="914400" cy="301752"/>
           </a:xfrm>
           <a:prstGeom prst="rect">
@@ -8554,7 +8681,7 @@
           <a:bodyPr wrap="square" lIns="0" tIns="0" rIns="0" bIns="0" rtlCol="0" anchor="ctr"/>
           <a:lstStyle/>
           <a:p>
-            <a:pPr algn="r" indent="0" marL="0">
+            <a:pPr marL="0" indent="0" algn="r">
               <a:buNone/>
             </a:pPr>
             <a:r>
@@ -8582,12 +8709,13 @@
 
 <file path=ppt/slides/slide7.xml><?xml version="1.0" encoding="utf-8"?>
 <p:sld xmlns:a="http://schemas.openxmlformats.org/drawingml/2006/main" xmlns:r="http://schemas.openxmlformats.org/officeDocument/2006/relationships" xmlns:p="http://schemas.openxmlformats.org/presentationml/2006/main">
-  <p:cSld name="Slide 7">
+  <p:cSld name="Slide 8">
     <p:bg>
       <p:bgPr>
         <a:solidFill>
           <a:srgbClr val="F7F4EC"/>
         </a:solidFill>
+        <a:effectLst/>
       </p:bgPr>
     </p:bg>
     <p:spTree>
@@ -8625,19 +8753,19 @@
           <a:bodyPr wrap="square" lIns="0" tIns="0" rIns="0" bIns="0" rtlCol="0" anchor="ctr"/>
           <a:lstStyle/>
           <a:p>
-            <a:pPr indent="0" marL="0">
+            <a:pPr marL="0" indent="0">
               <a:buNone/>
             </a:pPr>
             <a:r>
-              <a:rPr lang="en-US" sz="1200" spc="200" kern="0" dirty="0">
-                <a:solidFill>
-                  <a:srgbClr val="E4572E"/>
+              <a:rPr lang="en-US" sz="1200" kern="0" spc="200" dirty="0">
+                <a:solidFill>
+                  <a:srgbClr val="00A676"/>
                 </a:solidFill>
                 <a:latin typeface="Arial Black" pitchFamily="34" charset="0"/>
                 <a:ea typeface="Arial Black" pitchFamily="34" charset="-122"/>
                 <a:cs typeface="Arial Black" pitchFamily="34" charset="-120"/>
               </a:rPr>
-              <a:t>RETENCIÓN</a:t>
+              <a:t>PLAN DE VALIDACIÓN</a:t>
             </a:r>
             <a:endParaRPr lang="en-US" sz="1200" dirty="0"/>
           </a:p>
@@ -8664,7 +8792,7 @@
           <a:bodyPr wrap="square" lIns="0" tIns="0" rIns="0" bIns="0" rtlCol="0" anchor="ctr"/>
           <a:lstStyle/>
           <a:p>
-            <a:pPr indent="0" marL="0">
+            <a:pPr marL="0" indent="0">
               <a:buNone/>
             </a:pPr>
             <a:r>
@@ -8676,1173 +8804,8 @@
                 <a:ea typeface="Arial Black" pitchFamily="34" charset="-122"/>
                 <a:cs typeface="Arial Black" pitchFamily="34" charset="-120"/>
               </a:rPr>
-              <a:t>POR QUÉ </a:t>
-            </a:r>
-            <a:pPr indent="0" marL="0">
-              <a:buNone/>
-            </a:pPr>
-            <a:r>
-              <a:rPr lang="en-US" sz="3400" dirty="0">
-                <a:solidFill>
-                  <a:srgbClr val="3D5AFE"/>
-                </a:solidFill>
-                <a:latin typeface="Arial Black" pitchFamily="34" charset="0"/>
-                <a:ea typeface="Arial Black" pitchFamily="34" charset="-122"/>
-                <a:cs typeface="Arial Black" pitchFamily="34" charset="-120"/>
-              </a:rPr>
-              <a:t>NO SE VAN</a:t>
-            </a:r>
-            <a:endParaRPr lang="en-US" sz="3400" dirty="0"/>
-          </a:p>
-        </p:txBody>
-      </p:sp>
-      <p:sp>
-        <p:nvSpPr>
-          <p:cNvPr id="4" name="Text 2"/>
-          <p:cNvSpPr txBox="1"/>
-          <p:nvPr/>
-        </p:nvSpPr>
-        <p:spPr>
-          <a:xfrm>
-            <a:off x="594360" y="1572768"/>
-            <a:ext cx="11002975" cy="411480"/>
-          </a:xfrm>
-          <a:prstGeom prst="rect">
-            <a:avLst/>
-          </a:prstGeom>
-          <a:noFill/>
-          <a:ln/>
-        </p:spPr>
-        <p:txBody>
-          <a:bodyPr wrap="square" lIns="0" tIns="0" rIns="0" bIns="0" rtlCol="0" anchor="ctr"/>
-          <a:lstStyle/>
-          <a:p>
-            <a:pPr indent="0" marL="0">
-              <a:buNone/>
-            </a:pPr>
-            <a:r>
-              <a:rPr lang="en-US" sz="1600" b="1" dirty="0">
-                <a:solidFill>
-                  <a:srgbClr val="333333"/>
-                </a:solidFill>
-                <a:latin typeface="Arial" pitchFamily="34" charset="0"/>
-                <a:ea typeface="Arial" pitchFamily="34" charset="-122"/>
-                <a:cs typeface="Arial" pitchFamily="34" charset="-120"/>
-              </a:rPr>
-              <a:t>Quedarse vale más que ahorrarse la comisión.</a:t>
-            </a:r>
-            <a:endParaRPr lang="en-US" sz="1600" dirty="0"/>
-          </a:p>
-        </p:txBody>
-      </p:sp>
-      <p:sp>
-        <p:nvSpPr>
-          <p:cNvPr id="5" name="Shape 3"/>
-          <p:cNvSpPr/>
-          <p:nvPr/>
-        </p:nvSpPr>
-        <p:spPr>
-          <a:xfrm>
-            <a:off x="685800" y="2331720"/>
-            <a:ext cx="2615184" cy="2011680"/>
-          </a:xfrm>
-          <a:prstGeom prst="rect">
-            <a:avLst/>
-          </a:prstGeom>
-          <a:solidFill>
-            <a:srgbClr val="111111"/>
-          </a:solidFill>
-          <a:ln/>
-        </p:spPr>
-      </p:sp>
-      <p:sp>
-        <p:nvSpPr>
-          <p:cNvPr id="6" name="Shape 4"/>
-          <p:cNvSpPr/>
-          <p:nvPr/>
-        </p:nvSpPr>
-        <p:spPr>
-          <a:xfrm>
-            <a:off x="594360" y="2240280"/>
-            <a:ext cx="2615184" cy="2011680"/>
-          </a:xfrm>
-          <a:prstGeom prst="rect">
-            <a:avLst/>
-          </a:prstGeom>
-          <a:solidFill>
-            <a:srgbClr val="FFFFFF"/>
-          </a:solidFill>
-          <a:ln w="25400">
-            <a:solidFill>
-              <a:srgbClr val="111111"/>
-            </a:solidFill>
-            <a:prstDash val="solid"/>
-          </a:ln>
-        </p:spPr>
-      </p:sp>
-      <p:sp>
-        <p:nvSpPr>
-          <p:cNvPr id="7" name="Shape 5"/>
-          <p:cNvSpPr/>
-          <p:nvPr/>
-        </p:nvSpPr>
-        <p:spPr>
-          <a:xfrm>
-            <a:off x="868680" y="2532888"/>
-            <a:ext cx="365760" cy="109728"/>
-          </a:xfrm>
-          <a:prstGeom prst="rect">
-            <a:avLst/>
-          </a:prstGeom>
-          <a:solidFill>
-            <a:srgbClr val="3D5AFE"/>
-          </a:solidFill>
-          <a:ln/>
-        </p:spPr>
-      </p:sp>
-      <p:sp>
-        <p:nvSpPr>
-          <p:cNvPr id="8" name="Text 6"/>
-          <p:cNvSpPr txBox="1"/>
-          <p:nvPr/>
-        </p:nvSpPr>
-        <p:spPr>
-          <a:xfrm>
-            <a:off x="868680" y="2788920"/>
-            <a:ext cx="2066544" cy="640080"/>
-          </a:xfrm>
-          <a:prstGeom prst="rect">
-            <a:avLst/>
-          </a:prstGeom>
-          <a:noFill/>
-          <a:ln/>
-        </p:spPr>
-        <p:txBody>
-          <a:bodyPr wrap="square" lIns="0" tIns="0" rIns="0" bIns="0" rtlCol="0" anchor="ctr"/>
-          <a:lstStyle/>
-          <a:p>
-            <a:pPr indent="0" marL="0">
-              <a:buNone/>
-            </a:pPr>
-            <a:r>
-              <a:rPr lang="en-US" sz="1300" dirty="0">
-                <a:solidFill>
-                  <a:srgbClr val="111111"/>
-                </a:solidFill>
-                <a:latin typeface="Arial Black" pitchFamily="34" charset="0"/>
-                <a:ea typeface="Arial Black" pitchFamily="34" charset="-122"/>
-                <a:cs typeface="Arial Black" pitchFamily="34" charset="-120"/>
-              </a:rPr>
-              <a:t>SE VENDE LA PROTECCIÓN</a:t>
-            </a:r>
-            <a:endParaRPr lang="en-US" sz="1300" dirty="0"/>
-          </a:p>
-        </p:txBody>
-      </p:sp>
-      <p:sp>
-        <p:nvSpPr>
-          <p:cNvPr id="9" name="Text 7"/>
-          <p:cNvSpPr txBox="1"/>
-          <p:nvPr/>
-        </p:nvSpPr>
-        <p:spPr>
-          <a:xfrm>
-            <a:off x="868680" y="3447288"/>
-            <a:ext cx="2066544" cy="731520"/>
-          </a:xfrm>
-          <a:prstGeom prst="rect">
-            <a:avLst/>
-          </a:prstGeom>
-          <a:noFill/>
-          <a:ln/>
-        </p:spPr>
-        <p:txBody>
-          <a:bodyPr wrap="square" lIns="0" tIns="0" rIns="0" bIns="0" rtlCol="0" anchor="ctr"/>
-          <a:lstStyle/>
-          <a:p>
-            <a:pPr indent="0" marL="0">
-              <a:buNone/>
-            </a:pPr>
-            <a:r>
-              <a:rPr lang="en-US" sz="1150" dirty="0">
-                <a:solidFill>
-                  <a:srgbClr val="222222"/>
-                </a:solidFill>
-                <a:latin typeface="Arial" pitchFamily="34" charset="0"/>
-                <a:ea typeface="Arial" pitchFamily="34" charset="-122"/>
-                <a:cs typeface="Arial" pitchFamily="34" charset="-120"/>
-              </a:rPr>
-              <a:t>El escrow se necesita en cada proyecto, no solo en el primer match.</a:t>
-            </a:r>
-            <a:endParaRPr lang="en-US" sz="1150" dirty="0"/>
-          </a:p>
-        </p:txBody>
-      </p:sp>
-      <p:sp>
-        <p:nvSpPr>
-          <p:cNvPr id="10" name="Shape 8"/>
-          <p:cNvSpPr/>
-          <p:nvPr/>
-        </p:nvSpPr>
-        <p:spPr>
-          <a:xfrm>
-            <a:off x="3575304" y="2331720"/>
-            <a:ext cx="2615184" cy="2011680"/>
-          </a:xfrm>
-          <a:prstGeom prst="rect">
-            <a:avLst/>
-          </a:prstGeom>
-          <a:solidFill>
-            <a:srgbClr val="111111"/>
-          </a:solidFill>
-          <a:ln/>
-        </p:spPr>
-      </p:sp>
-      <p:sp>
-        <p:nvSpPr>
-          <p:cNvPr id="11" name="Shape 9"/>
-          <p:cNvSpPr/>
-          <p:nvPr/>
-        </p:nvSpPr>
-        <p:spPr>
-          <a:xfrm>
-            <a:off x="3483864" y="2240280"/>
-            <a:ext cx="2615184" cy="2011680"/>
-          </a:xfrm>
-          <a:prstGeom prst="rect">
-            <a:avLst/>
-          </a:prstGeom>
-          <a:solidFill>
-            <a:srgbClr val="FFFFFF"/>
-          </a:solidFill>
-          <a:ln w="25400">
-            <a:solidFill>
-              <a:srgbClr val="111111"/>
-            </a:solidFill>
-            <a:prstDash val="solid"/>
-          </a:ln>
-        </p:spPr>
-      </p:sp>
-      <p:sp>
-        <p:nvSpPr>
-          <p:cNvPr id="12" name="Shape 10"/>
-          <p:cNvSpPr/>
-          <p:nvPr/>
-        </p:nvSpPr>
-        <p:spPr>
-          <a:xfrm>
-            <a:off x="3758184" y="2532888"/>
-            <a:ext cx="365760" cy="109728"/>
-          </a:xfrm>
-          <a:prstGeom prst="rect">
-            <a:avLst/>
-          </a:prstGeom>
-          <a:solidFill>
-            <a:srgbClr val="FDDA24"/>
-          </a:solidFill>
-          <a:ln/>
-        </p:spPr>
-      </p:sp>
-      <p:sp>
-        <p:nvSpPr>
-          <p:cNvPr id="13" name="Text 11"/>
-          <p:cNvSpPr txBox="1"/>
-          <p:nvPr/>
-        </p:nvSpPr>
-        <p:spPr>
-          <a:xfrm>
-            <a:off x="3758184" y="2788920"/>
-            <a:ext cx="2066544" cy="640080"/>
-          </a:xfrm>
-          <a:prstGeom prst="rect">
-            <a:avLst/>
-          </a:prstGeom>
-          <a:noFill/>
-          <a:ln/>
-        </p:spPr>
-        <p:txBody>
-          <a:bodyPr wrap="square" lIns="0" tIns="0" rIns="0" bIns="0" rtlCol="0" anchor="ctr"/>
-          <a:lstStyle/>
-          <a:p>
-            <a:pPr indent="0" marL="0">
-              <a:buNone/>
-            </a:pPr>
-            <a:r>
-              <a:rPr lang="en-US" sz="1300" dirty="0">
-                <a:solidFill>
-                  <a:srgbClr val="111111"/>
-                </a:solidFill>
-                <a:latin typeface="Arial Black" pitchFamily="34" charset="0"/>
-                <a:ea typeface="Arial Black" pitchFamily="34" charset="-122"/>
-                <a:cs typeface="Arial Black" pitchFamily="34" charset="-120"/>
-              </a:rPr>
-              <a:t>EL FREELANCER COBRA 100%</a:t>
-            </a:r>
-            <a:endParaRPr lang="en-US" sz="1300" dirty="0"/>
-          </a:p>
-        </p:txBody>
-      </p:sp>
-      <p:sp>
-        <p:nvSpPr>
-          <p:cNvPr id="14" name="Text 12"/>
-          <p:cNvSpPr txBox="1"/>
-          <p:nvPr/>
-        </p:nvSpPr>
-        <p:spPr>
-          <a:xfrm>
-            <a:off x="3758184" y="3447288"/>
-            <a:ext cx="2066544" cy="731520"/>
-          </a:xfrm>
-          <a:prstGeom prst="rect">
-            <a:avLst/>
-          </a:prstGeom>
-          <a:noFill/>
-          <a:ln/>
-        </p:spPr>
-        <p:txBody>
-          <a:bodyPr wrap="square" lIns="0" tIns="0" rIns="0" bIns="0" rtlCol="0" anchor="ctr"/>
-          <a:lstStyle/>
-          <a:p>
-            <a:pPr indent="0" marL="0">
-              <a:buNone/>
-            </a:pPr>
-            <a:r>
-              <a:rPr lang="en-US" sz="1150" dirty="0">
-                <a:solidFill>
-                  <a:srgbClr val="222222"/>
-                </a:solidFill>
-                <a:latin typeface="Arial" pitchFamily="34" charset="0"/>
-                <a:ea typeface="Arial" pitchFamily="34" charset="-122"/>
-                <a:cs typeface="Arial" pitchFamily="34" charset="-120"/>
-              </a:rPr>
-              <a:t>Sin comisión y con reputación que solo crece dentro de Working.</a:t>
-            </a:r>
-            <a:endParaRPr lang="en-US" sz="1150" dirty="0"/>
-          </a:p>
-        </p:txBody>
-      </p:sp>
-      <p:sp>
-        <p:nvSpPr>
-          <p:cNvPr id="15" name="Shape 13"/>
-          <p:cNvSpPr/>
-          <p:nvPr/>
-        </p:nvSpPr>
-        <p:spPr>
-          <a:xfrm>
-            <a:off x="6464808" y="2331720"/>
-            <a:ext cx="2615184" cy="2011680"/>
-          </a:xfrm>
-          <a:prstGeom prst="rect">
-            <a:avLst/>
-          </a:prstGeom>
-          <a:solidFill>
-            <a:srgbClr val="111111"/>
-          </a:solidFill>
-          <a:ln/>
-        </p:spPr>
-      </p:sp>
-      <p:sp>
-        <p:nvSpPr>
-          <p:cNvPr id="16" name="Shape 14"/>
-          <p:cNvSpPr/>
-          <p:nvPr/>
-        </p:nvSpPr>
-        <p:spPr>
-          <a:xfrm>
-            <a:off x="6373368" y="2240280"/>
-            <a:ext cx="2615184" cy="2011680"/>
-          </a:xfrm>
-          <a:prstGeom prst="rect">
-            <a:avLst/>
-          </a:prstGeom>
-          <a:solidFill>
-            <a:srgbClr val="FFFFFF"/>
-          </a:solidFill>
-          <a:ln w="25400">
-            <a:solidFill>
-              <a:srgbClr val="111111"/>
-            </a:solidFill>
-            <a:prstDash val="solid"/>
-          </a:ln>
-        </p:spPr>
-      </p:sp>
-      <p:sp>
-        <p:nvSpPr>
-          <p:cNvPr id="17" name="Shape 15"/>
-          <p:cNvSpPr/>
-          <p:nvPr/>
-        </p:nvSpPr>
-        <p:spPr>
-          <a:xfrm>
-            <a:off x="6647688" y="2532888"/>
-            <a:ext cx="365760" cy="109728"/>
-          </a:xfrm>
-          <a:prstGeom prst="rect">
-            <a:avLst/>
-          </a:prstGeom>
-          <a:solidFill>
-            <a:srgbClr val="00A676"/>
-          </a:solidFill>
-          <a:ln/>
-        </p:spPr>
-      </p:sp>
-      <p:sp>
-        <p:nvSpPr>
-          <p:cNvPr id="18" name="Text 16"/>
-          <p:cNvSpPr txBox="1"/>
-          <p:nvPr/>
-        </p:nvSpPr>
-        <p:spPr>
-          <a:xfrm>
-            <a:off x="6647688" y="2788920"/>
-            <a:ext cx="2066544" cy="640080"/>
-          </a:xfrm>
-          <a:prstGeom prst="rect">
-            <a:avLst/>
-          </a:prstGeom>
-          <a:noFill/>
-          <a:ln/>
-        </p:spPr>
-        <p:txBody>
-          <a:bodyPr wrap="square" lIns="0" tIns="0" rIns="0" bIns="0" rtlCol="0" anchor="ctr"/>
-          <a:lstStyle/>
-          <a:p>
-            <a:pPr indent="0" marL="0">
-              <a:buNone/>
-            </a:pPr>
-            <a:r>
-              <a:rPr lang="en-US" sz="1300" dirty="0">
-                <a:solidFill>
-                  <a:srgbClr val="111111"/>
-                </a:solidFill>
-                <a:latin typeface="Arial Black" pitchFamily="34" charset="0"/>
-                <a:ea typeface="Arial Black" pitchFamily="34" charset="-122"/>
-                <a:cs typeface="Arial Black" pitchFamily="34" charset="-120"/>
-              </a:rPr>
-              <a:t>TODO VIVE ADENTRO</a:t>
-            </a:r>
-            <a:endParaRPr lang="en-US" sz="1300" dirty="0"/>
-          </a:p>
-        </p:txBody>
-      </p:sp>
-      <p:sp>
-        <p:nvSpPr>
-          <p:cNvPr id="19" name="Text 17"/>
-          <p:cNvSpPr txBox="1"/>
-          <p:nvPr/>
-        </p:nvSpPr>
-        <p:spPr>
-          <a:xfrm>
-            <a:off x="6647688" y="3447288"/>
-            <a:ext cx="2066544" cy="731520"/>
-          </a:xfrm>
-          <a:prstGeom prst="rect">
-            <a:avLst/>
-          </a:prstGeom>
-          <a:noFill/>
-          <a:ln/>
-        </p:spPr>
-        <p:txBody>
-          <a:bodyPr wrap="square" lIns="0" tIns="0" rIns="0" bIns="0" rtlCol="0" anchor="ctr"/>
-          <a:lstStyle/>
-          <a:p>
-            <a:pPr indent="0" marL="0">
-              <a:buNone/>
-            </a:pPr>
-            <a:r>
-              <a:rPr lang="en-US" sz="1150" dirty="0">
-                <a:solidFill>
-                  <a:srgbClr val="222222"/>
-                </a:solidFill>
-                <a:latin typeface="Arial" pitchFamily="34" charset="0"/>
-                <a:ea typeface="Arial" pitchFamily="34" charset="-122"/>
-                <a:cs typeface="Arial" pitchFamily="34" charset="-120"/>
-              </a:rPr>
-              <a:t>Chat, hitos, entregables y ganancias en un lugar. Salir da más trabajo.</a:t>
-            </a:r>
-            <a:endParaRPr lang="en-US" sz="1150" dirty="0"/>
-          </a:p>
-        </p:txBody>
-      </p:sp>
-      <p:sp>
-        <p:nvSpPr>
-          <p:cNvPr id="20" name="Shape 18"/>
-          <p:cNvSpPr/>
-          <p:nvPr/>
-        </p:nvSpPr>
-        <p:spPr>
-          <a:xfrm>
-            <a:off x="9354312" y="2331720"/>
-            <a:ext cx="2615184" cy="2011680"/>
-          </a:xfrm>
-          <a:prstGeom prst="rect">
-            <a:avLst/>
-          </a:prstGeom>
-          <a:solidFill>
-            <a:srgbClr val="111111"/>
-          </a:solidFill>
-          <a:ln/>
-        </p:spPr>
-      </p:sp>
-      <p:sp>
-        <p:nvSpPr>
-          <p:cNvPr id="21" name="Shape 19"/>
-          <p:cNvSpPr/>
-          <p:nvPr/>
-        </p:nvSpPr>
-        <p:spPr>
-          <a:xfrm>
-            <a:off x="9262872" y="2240280"/>
-            <a:ext cx="2615184" cy="2011680"/>
-          </a:xfrm>
-          <a:prstGeom prst="rect">
-            <a:avLst/>
-          </a:prstGeom>
-          <a:solidFill>
-            <a:srgbClr val="FFFFFF"/>
-          </a:solidFill>
-          <a:ln w="25400">
-            <a:solidFill>
-              <a:srgbClr val="111111"/>
-            </a:solidFill>
-            <a:prstDash val="solid"/>
-          </a:ln>
-        </p:spPr>
-      </p:sp>
-      <p:sp>
-        <p:nvSpPr>
-          <p:cNvPr id="22" name="Shape 20"/>
-          <p:cNvSpPr/>
-          <p:nvPr/>
-        </p:nvSpPr>
-        <p:spPr>
-          <a:xfrm>
-            <a:off x="9537192" y="2532888"/>
-            <a:ext cx="365760" cy="109728"/>
-          </a:xfrm>
-          <a:prstGeom prst="rect">
-            <a:avLst/>
-          </a:prstGeom>
-          <a:solidFill>
-            <a:srgbClr val="E4572E"/>
-          </a:solidFill>
-          <a:ln/>
-        </p:spPr>
-      </p:sp>
-      <p:sp>
-        <p:nvSpPr>
-          <p:cNvPr id="23" name="Text 21"/>
-          <p:cNvSpPr txBox="1"/>
-          <p:nvPr/>
-        </p:nvSpPr>
-        <p:spPr>
-          <a:xfrm>
-            <a:off x="9537192" y="2788920"/>
-            <a:ext cx="2066544" cy="640080"/>
-          </a:xfrm>
-          <a:prstGeom prst="rect">
-            <a:avLst/>
-          </a:prstGeom>
-          <a:noFill/>
-          <a:ln/>
-        </p:spPr>
-        <p:txBody>
-          <a:bodyPr wrap="square" lIns="0" tIns="0" rIns="0" bIns="0" rtlCol="0" anchor="ctr"/>
-          <a:lstStyle/>
-          <a:p>
-            <a:pPr indent="0" marL="0">
-              <a:buNone/>
-            </a:pPr>
-            <a:r>
-              <a:rPr lang="en-US" sz="1300" dirty="0">
-                <a:solidFill>
-                  <a:srgbClr val="111111"/>
-                </a:solidFill>
-                <a:latin typeface="Arial Black" pitchFamily="34" charset="0"/>
-                <a:ea typeface="Arial Black" pitchFamily="34" charset="-122"/>
-                <a:cs typeface="Arial Black" pitchFamily="34" charset="-120"/>
-              </a:rPr>
-              <a:t>COMISIÓN DECRECIENTE</a:t>
-            </a:r>
-            <a:endParaRPr lang="en-US" sz="1300" dirty="0"/>
-          </a:p>
-        </p:txBody>
-      </p:sp>
-      <p:sp>
-        <p:nvSpPr>
-          <p:cNvPr id="24" name="Text 22"/>
-          <p:cNvSpPr txBox="1"/>
-          <p:nvPr/>
-        </p:nvSpPr>
-        <p:spPr>
-          <a:xfrm>
-            <a:off x="9537192" y="3447288"/>
-            <a:ext cx="2066544" cy="731520"/>
-          </a:xfrm>
-          <a:prstGeom prst="rect">
-            <a:avLst/>
-          </a:prstGeom>
-          <a:noFill/>
-          <a:ln/>
-        </p:spPr>
-        <p:txBody>
-          <a:bodyPr wrap="square" lIns="0" tIns="0" rIns="0" bIns="0" rtlCol="0" anchor="ctr"/>
-          <a:lstStyle/>
-          <a:p>
-            <a:pPr indent="0" marL="0">
-              <a:buNone/>
-            </a:pPr>
-            <a:r>
-              <a:rPr lang="en-US" sz="1150" dirty="0">
-                <a:solidFill>
-                  <a:srgbClr val="222222"/>
-                </a:solidFill>
-                <a:latin typeface="Arial" pitchFamily="34" charset="0"/>
-                <a:ea typeface="Arial" pitchFamily="34" charset="-122"/>
-                <a:cs typeface="Arial" pitchFamily="34" charset="-120"/>
-              </a:rPr>
-              <a:t>Solo a la empresa y baja con la lealtad: irse casi no ahorra.</a:t>
-            </a:r>
-            <a:endParaRPr lang="en-US" sz="1150" dirty="0"/>
-          </a:p>
-        </p:txBody>
-      </p:sp>
-      <p:sp>
-        <p:nvSpPr>
-          <p:cNvPr id="25" name="Shape 23"/>
-          <p:cNvSpPr/>
-          <p:nvPr/>
-        </p:nvSpPr>
-        <p:spPr>
-          <a:xfrm>
-            <a:off x="685800" y="4754880"/>
-            <a:ext cx="11002975" cy="1691640"/>
-          </a:xfrm>
-          <a:prstGeom prst="rect">
-            <a:avLst/>
-          </a:prstGeom>
-          <a:solidFill>
-            <a:srgbClr val="111111"/>
-          </a:solidFill>
-          <a:ln/>
-        </p:spPr>
-      </p:sp>
-      <p:sp>
-        <p:nvSpPr>
-          <p:cNvPr id="26" name="Shape 24"/>
-          <p:cNvSpPr/>
-          <p:nvPr/>
-        </p:nvSpPr>
-        <p:spPr>
-          <a:xfrm>
-            <a:off x="594360" y="4663440"/>
-            <a:ext cx="11002975" cy="1691640"/>
-          </a:xfrm>
-          <a:prstGeom prst="rect">
-            <a:avLst/>
-          </a:prstGeom>
-          <a:solidFill>
-            <a:srgbClr val="111111"/>
-          </a:solidFill>
-          <a:ln w="25400">
-            <a:solidFill>
-              <a:srgbClr val="111111"/>
-            </a:solidFill>
-            <a:prstDash val="solid"/>
-          </a:ln>
-        </p:spPr>
-      </p:sp>
-      <p:sp>
-        <p:nvSpPr>
-          <p:cNvPr id="27" name="Text 25"/>
-          <p:cNvSpPr txBox="1"/>
-          <p:nvPr/>
-        </p:nvSpPr>
-        <p:spPr>
-          <a:xfrm>
-            <a:off x="960120" y="4892040"/>
-            <a:ext cx="5120640" cy="320040"/>
-          </a:xfrm>
-          <a:prstGeom prst="rect">
-            <a:avLst/>
-          </a:prstGeom>
-          <a:noFill/>
-          <a:ln/>
-        </p:spPr>
-        <p:txBody>
-          <a:bodyPr wrap="square" lIns="0" tIns="0" rIns="0" bIns="0" rtlCol="0" anchor="ctr"/>
-          <a:lstStyle/>
-          <a:p>
-            <a:pPr indent="0" marL="0">
-              <a:buNone/>
-            </a:pPr>
-            <a:r>
-              <a:rPr lang="en-US" sz="1300" dirty="0">
-                <a:solidFill>
-                  <a:srgbClr val="FDDA24"/>
-                </a:solidFill>
-                <a:latin typeface="Arial Black" pitchFamily="34" charset="0"/>
-                <a:ea typeface="Arial Black" pitchFamily="34" charset="-122"/>
-                <a:cs typeface="Arial Black" pitchFamily="34" charset="-120"/>
-              </a:rPr>
-              <a:t>TRANSPARENTE, SIN SORPRESAS</a:t>
-            </a:r>
-            <a:endParaRPr lang="en-US" sz="1300" dirty="0"/>
-          </a:p>
-        </p:txBody>
-      </p:sp>
-      <p:sp>
-        <p:nvSpPr>
-          <p:cNvPr id="28" name="Text 26"/>
-          <p:cNvSpPr txBox="1"/>
-          <p:nvPr/>
-        </p:nvSpPr>
-        <p:spPr>
-          <a:xfrm>
-            <a:off x="960120" y="5285232"/>
-            <a:ext cx="5486400" cy="914400"/>
-          </a:xfrm>
-          <a:prstGeom prst="rect">
-            <a:avLst/>
-          </a:prstGeom>
-          <a:noFill/>
-          <a:ln/>
-        </p:spPr>
-        <p:txBody>
-          <a:bodyPr wrap="square" lIns="0" tIns="0" rIns="0" bIns="0" rtlCol="0" anchor="t"/>
-          <a:lstStyle/>
-          <a:p>
-            <a:pPr indent="0" marL="0">
-              <a:lnSpc>
-                <a:spcPct val="115000"/>
-              </a:lnSpc>
-              <a:buNone/>
-            </a:pPr>
-            <a:r>
-              <a:rPr lang="en-US" sz="1350" dirty="0">
-                <a:solidFill>
-                  <a:srgbClr val="DDDDDD"/>
-                </a:solidFill>
-                <a:latin typeface="Arial" pitchFamily="34" charset="0"/>
-                <a:ea typeface="Arial" pitchFamily="34" charset="-122"/>
-                <a:cs typeface="Arial" pitchFamily="34" charset="-120"/>
-              </a:rPr>
-              <a:t>La empresa paga </a:t>
-            </a:r>
-            <a:pPr indent="0" marL="0">
-              <a:lnSpc>
-                <a:spcPct val="115000"/>
-              </a:lnSpc>
-              <a:buNone/>
-            </a:pPr>
-            <a:r>
-              <a:rPr lang="en-US" sz="1350" b="1" dirty="0">
-                <a:solidFill>
-                  <a:srgbClr val="FFFFFF"/>
-                </a:solidFill>
-                <a:latin typeface="Arial" pitchFamily="34" charset="0"/>
-                <a:ea typeface="Arial" pitchFamily="34" charset="-122"/>
-                <a:cs typeface="Arial" pitchFamily="34" charset="-120"/>
-              </a:rPr>
-              <a:t>$105</a:t>
-            </a:r>
-            <a:pPr indent="0" marL="0">
-              <a:lnSpc>
-                <a:spcPct val="115000"/>
-              </a:lnSpc>
-              <a:buNone/>
-            </a:pPr>
-            <a:r>
-              <a:rPr lang="en-US" sz="1350" dirty="0">
-                <a:solidFill>
-                  <a:srgbClr val="DDDDDD"/>
-                </a:solidFill>
-                <a:latin typeface="Arial" pitchFamily="34" charset="0"/>
-                <a:ea typeface="Arial" pitchFamily="34" charset="-122"/>
-                <a:cs typeface="Arial" pitchFamily="34" charset="-120"/>
-              </a:rPr>
-              <a:t>  =  $100 al freelancer + $5 Working (5%).</a:t>
-            </a:r>
-            <a:pPr indent="0" marL="0">
-              <a:lnSpc>
-                <a:spcPct val="115000"/>
-              </a:lnSpc>
-              <a:buNone/>
-            </a:pPr>
-            <a:r>
-              <a:rPr lang="en-US" sz="1350" dirty="0">
-                <a:solidFill>
-                  <a:srgbClr val="DDDDDD"/>
-                </a:solidFill>
-                <a:latin typeface="Arial" pitchFamily="34" charset="0"/>
-                <a:ea typeface="Arial" pitchFamily="34" charset="-122"/>
-                <a:cs typeface="Arial" pitchFamily="34" charset="-120"/>
-              </a:rPr>
-              <a:t>El freelancer recibe sus </a:t>
-            </a:r>
-            <a:pPr indent="0" marL="0">
-              <a:lnSpc>
-                <a:spcPct val="115000"/>
-              </a:lnSpc>
-              <a:buNone/>
-            </a:pPr>
-            <a:r>
-              <a:rPr lang="en-US" sz="1350" b="1" dirty="0">
-                <a:solidFill>
-                  <a:srgbClr val="FDDA24"/>
-                </a:solidFill>
-                <a:latin typeface="Arial" pitchFamily="34" charset="0"/>
-                <a:ea typeface="Arial" pitchFamily="34" charset="-122"/>
-                <a:cs typeface="Arial" pitchFamily="34" charset="-120"/>
-              </a:rPr>
-              <a:t>$100 completos</a:t>
-            </a:r>
-            <a:pPr indent="0" marL="0">
-              <a:lnSpc>
-                <a:spcPct val="115000"/>
-              </a:lnSpc>
-              <a:buNone/>
-            </a:pPr>
-            <a:r>
-              <a:rPr lang="en-US" sz="1350" dirty="0">
-                <a:solidFill>
-                  <a:srgbClr val="DDDDDD"/>
-                </a:solidFill>
-                <a:latin typeface="Arial" pitchFamily="34" charset="0"/>
-                <a:ea typeface="Arial" pitchFamily="34" charset="-122"/>
-                <a:cs typeface="Arial" pitchFamily="34" charset="-120"/>
-              </a:rPr>
-              <a:t>.</a:t>
-            </a:r>
-            <a:endParaRPr lang="en-US" sz="1350" dirty="0"/>
-          </a:p>
-        </p:txBody>
-      </p:sp>
-      <p:sp>
-        <p:nvSpPr>
-          <p:cNvPr id="29" name="Shape 27"/>
-          <p:cNvSpPr/>
-          <p:nvPr/>
-        </p:nvSpPr>
-        <p:spPr>
-          <a:xfrm>
-            <a:off x="7086600" y="4937760"/>
-            <a:ext cx="0" cy="1143000"/>
-          </a:xfrm>
-          <a:prstGeom prst="line">
-            <a:avLst/>
-          </a:prstGeom>
-          <a:noFill/>
-          <a:ln w="12700">
-            <a:solidFill>
-              <a:srgbClr val="3A3A3A"/>
-            </a:solidFill>
-            <a:prstDash val="solid"/>
-          </a:ln>
-        </p:spPr>
-      </p:sp>
-      <p:sp>
-        <p:nvSpPr>
-          <p:cNvPr id="30" name="Text 28"/>
-          <p:cNvSpPr txBox="1"/>
-          <p:nvPr/>
-        </p:nvSpPr>
-        <p:spPr>
-          <a:xfrm>
-            <a:off x="7360920" y="4892040"/>
-            <a:ext cx="4114800" cy="320040"/>
-          </a:xfrm>
-          <a:prstGeom prst="rect">
-            <a:avLst/>
-          </a:prstGeom>
-          <a:noFill/>
-          <a:ln/>
-        </p:spPr>
-        <p:txBody>
-          <a:bodyPr wrap="square" lIns="0" tIns="0" rIns="0" bIns="0" rtlCol="0" anchor="ctr"/>
-          <a:lstStyle/>
-          <a:p>
-            <a:pPr indent="0" marL="0">
-              <a:buNone/>
-            </a:pPr>
-            <a:r>
-              <a:rPr lang="en-US" sz="1300" dirty="0">
-                <a:solidFill>
-                  <a:srgbClr val="FDDA24"/>
-                </a:solidFill>
-                <a:latin typeface="Arial Black" pitchFamily="34" charset="0"/>
-                <a:ea typeface="Arial Black" pitchFamily="34" charset="-122"/>
-                <a:cs typeface="Arial Black" pitchFamily="34" charset="-120"/>
-              </a:rPr>
-              <a:t>LIBERACIÓN INMEDIATA</a:t>
-            </a:r>
-            <a:endParaRPr lang="en-US" sz="1300" dirty="0"/>
-          </a:p>
-        </p:txBody>
-      </p:sp>
-      <p:sp>
-        <p:nvSpPr>
-          <p:cNvPr id="31" name="Text 29"/>
-          <p:cNvSpPr txBox="1"/>
-          <p:nvPr/>
-        </p:nvSpPr>
-        <p:spPr>
-          <a:xfrm>
-            <a:off x="7360920" y="5285232"/>
-            <a:ext cx="4114800" cy="914400"/>
-          </a:xfrm>
-          <a:prstGeom prst="rect">
-            <a:avLst/>
-          </a:prstGeom>
-          <a:noFill/>
-          <a:ln/>
-        </p:spPr>
-        <p:txBody>
-          <a:bodyPr wrap="square" lIns="0" tIns="0" rIns="0" bIns="0" rtlCol="0" anchor="t"/>
-          <a:lstStyle/>
-          <a:p>
-            <a:pPr indent="0" marL="0">
-              <a:lnSpc>
-                <a:spcPct val="115000"/>
-              </a:lnSpc>
-              <a:buNone/>
-            </a:pPr>
-            <a:r>
-              <a:rPr lang="en-US" sz="1350" dirty="0">
-                <a:solidFill>
-                  <a:srgbClr val="DDDDDD"/>
-                </a:solidFill>
-                <a:latin typeface="Arial" pitchFamily="34" charset="0"/>
-                <a:ea typeface="Arial" pitchFamily="34" charset="-122"/>
-                <a:cs typeface="Arial" pitchFamily="34" charset="-120"/>
-              </a:rPr>
-              <a:t>El dinero ya está depositado y retenido. Al aprobar el hito, el freelancer cobra en </a:t>
-            </a:r>
-            <a:pPr indent="0" marL="0">
-              <a:lnSpc>
-                <a:spcPct val="115000"/>
-              </a:lnSpc>
-              <a:buNone/>
-            </a:pPr>
-            <a:r>
-              <a:rPr lang="en-US" sz="1350" b="1" dirty="0">
-                <a:solidFill>
-                  <a:srgbClr val="FFFFFF"/>
-                </a:solidFill>
-                <a:latin typeface="Arial" pitchFamily="34" charset="0"/>
-                <a:ea typeface="Arial" pitchFamily="34" charset="-122"/>
-                <a:cs typeface="Arial" pitchFamily="34" charset="-120"/>
-              </a:rPr>
-              <a:t>segundos</a:t>
-            </a:r>
-            <a:pPr indent="0" marL="0">
-              <a:lnSpc>
-                <a:spcPct val="115000"/>
-              </a:lnSpc>
-              <a:buNone/>
-            </a:pPr>
-            <a:r>
-              <a:rPr lang="en-US" sz="1350" dirty="0">
-                <a:solidFill>
-                  <a:srgbClr val="DDDDDD"/>
-                </a:solidFill>
-                <a:latin typeface="Arial" pitchFamily="34" charset="0"/>
-                <a:ea typeface="Arial" pitchFamily="34" charset="-122"/>
-                <a:cs typeface="Arial" pitchFamily="34" charset="-120"/>
-              </a:rPr>
-              <a:t> gracias a Stellar.</a:t>
-            </a:r>
-            <a:endParaRPr lang="en-US" sz="1350" dirty="0"/>
-          </a:p>
-        </p:txBody>
-      </p:sp>
-      <p:sp>
-        <p:nvSpPr>
-          <p:cNvPr id="32" name="Text 30"/>
-          <p:cNvSpPr txBox="1"/>
-          <p:nvPr/>
-        </p:nvSpPr>
-        <p:spPr>
-          <a:xfrm>
-            <a:off x="594360" y="6419088"/>
-            <a:ext cx="8229600" cy="301752"/>
-          </a:xfrm>
-          <a:prstGeom prst="rect">
-            <a:avLst/>
-          </a:prstGeom>
-          <a:noFill/>
-          <a:ln/>
-        </p:spPr>
-        <p:txBody>
-          <a:bodyPr wrap="square" lIns="0" tIns="0" rIns="0" bIns="0" rtlCol="0" anchor="ctr"/>
-          <a:lstStyle/>
-          <a:p>
-            <a:pPr indent="0" marL="0">
-              <a:buNone/>
-            </a:pPr>
-            <a:r>
-              <a:rPr lang="en-US" sz="1000" b="1" spc="100" kern="0" dirty="0">
-                <a:solidFill>
-                  <a:srgbClr val="6B6B6B"/>
-                </a:solidFill>
-                <a:latin typeface="Arial" pitchFamily="34" charset="0"/>
-                <a:ea typeface="Arial" pitchFamily="34" charset="-122"/>
-                <a:cs typeface="Arial" pitchFamily="34" charset="-120"/>
-              </a:rPr>
-              <a:t>IDEATÓN STELLAR BOLIVIA 2026  ·  WORKING</a:t>
-            </a:r>
-            <a:endParaRPr lang="en-US" sz="1000" dirty="0"/>
-          </a:p>
-        </p:txBody>
-      </p:sp>
-      <p:sp>
-        <p:nvSpPr>
-          <p:cNvPr id="33" name="Text 31"/>
-          <p:cNvSpPr txBox="1"/>
-          <p:nvPr/>
-        </p:nvSpPr>
-        <p:spPr>
-          <a:xfrm>
-            <a:off x="10682935" y="6419088"/>
-            <a:ext cx="914400" cy="301752"/>
-          </a:xfrm>
-          <a:prstGeom prst="rect">
-            <a:avLst/>
-          </a:prstGeom>
-          <a:noFill/>
-          <a:ln/>
-        </p:spPr>
-        <p:txBody>
-          <a:bodyPr wrap="square" lIns="0" tIns="0" rIns="0" bIns="0" rtlCol="0" anchor="ctr"/>
-          <a:lstStyle/>
-          <a:p>
-            <a:pPr algn="r" indent="0" marL="0">
-              <a:buNone/>
-            </a:pPr>
-            <a:r>
-              <a:rPr lang="en-US" sz="1100" dirty="0">
-                <a:solidFill>
-                  <a:srgbClr val="111111"/>
-                </a:solidFill>
-                <a:latin typeface="Arial Black" pitchFamily="34" charset="0"/>
-                <a:ea typeface="Arial Black" pitchFamily="34" charset="-122"/>
-                <a:cs typeface="Arial Black" pitchFamily="34" charset="-120"/>
-              </a:rPr>
-              <a:t>07</a:t>
-            </a:r>
-            <a:endParaRPr lang="en-US" sz="1100" dirty="0"/>
-          </a:p>
-        </p:txBody>
-      </p:sp>
-    </p:spTree>
-  </p:cSld>
-  <p:clrMapOvr>
-    <a:masterClrMapping/>
-  </p:clrMapOvr>
-</p:sld>
-</file>
-
-<file path=ppt/slides/slide8.xml><?xml version="1.0" encoding="utf-8"?>
-<p:sld xmlns:a="http://schemas.openxmlformats.org/drawingml/2006/main" xmlns:r="http://schemas.openxmlformats.org/officeDocument/2006/relationships" xmlns:p="http://schemas.openxmlformats.org/presentationml/2006/main">
-  <p:cSld name="Slide 8">
-    <p:bg>
-      <p:bgPr>
-        <a:solidFill>
-          <a:srgbClr val="F7F4EC"/>
-        </a:solidFill>
-      </p:bgPr>
-    </p:bg>
-    <p:spTree>
-      <p:nvGrpSpPr>
-        <p:cNvPr id="1" name=""/>
-        <p:cNvGrpSpPr/>
-        <p:nvPr/>
-      </p:nvGrpSpPr>
-      <p:grpSpPr>
-        <a:xfrm>
-          <a:off x="0" y="0"/>
-          <a:ext cx="0" cy="0"/>
-          <a:chOff x="0" y="0"/>
-          <a:chExt cx="0" cy="0"/>
-        </a:xfrm>
-      </p:grpSpPr>
-      <p:sp>
-        <p:nvSpPr>
-          <p:cNvPr id="2" name="Text 0"/>
-          <p:cNvSpPr txBox="1"/>
-          <p:nvPr/>
-        </p:nvSpPr>
-        <p:spPr>
-          <a:xfrm>
-            <a:off x="594360" y="384048"/>
-            <a:ext cx="9144000" cy="292608"/>
-          </a:xfrm>
-          <a:prstGeom prst="rect">
-            <a:avLst/>
-          </a:prstGeom>
-          <a:noFill/>
-          <a:ln/>
-        </p:spPr>
-        <p:txBody>
-          <a:bodyPr wrap="square" lIns="0" tIns="0" rIns="0" bIns="0" rtlCol="0" anchor="ctr"/>
-          <a:lstStyle/>
-          <a:p>
-            <a:pPr indent="0" marL="0">
-              <a:buNone/>
-            </a:pPr>
-            <a:r>
-              <a:rPr lang="en-US" sz="1200" spc="200" kern="0" dirty="0">
-                <a:solidFill>
-                  <a:srgbClr val="00A676"/>
-                </a:solidFill>
-                <a:latin typeface="Arial Black" pitchFamily="34" charset="0"/>
-                <a:ea typeface="Arial Black" pitchFamily="34" charset="-122"/>
-                <a:cs typeface="Arial Black" pitchFamily="34" charset="-120"/>
-              </a:rPr>
-              <a:t>PLAN DE VALIDACIÓN</a:t>
-            </a:r>
-            <a:endParaRPr lang="en-US" sz="1200" dirty="0"/>
-          </a:p>
-        </p:txBody>
-      </p:sp>
-      <p:sp>
-        <p:nvSpPr>
-          <p:cNvPr id="3" name="Text 1"/>
-          <p:cNvSpPr txBox="1"/>
-          <p:nvPr/>
-        </p:nvSpPr>
-        <p:spPr>
-          <a:xfrm>
-            <a:off x="594360" y="713232"/>
-            <a:ext cx="11002975" cy="868680"/>
-          </a:xfrm>
-          <a:prstGeom prst="rect">
-            <a:avLst/>
-          </a:prstGeom>
-          <a:noFill/>
-          <a:ln/>
-        </p:spPr>
-        <p:txBody>
-          <a:bodyPr wrap="square" lIns="0" tIns="0" rIns="0" bIns="0" rtlCol="0" anchor="ctr"/>
-          <a:lstStyle/>
-          <a:p>
-            <a:pPr indent="0" marL="0">
-              <a:buNone/>
-            </a:pPr>
-            <a:r>
-              <a:rPr lang="en-US" sz="3400" dirty="0">
-                <a:solidFill>
-                  <a:srgbClr val="111111"/>
-                </a:solidFill>
-                <a:latin typeface="Arial Black" pitchFamily="34" charset="0"/>
-                <a:ea typeface="Arial Black" pitchFamily="34" charset="-122"/>
-                <a:cs typeface="Arial Black" pitchFamily="34" charset="-120"/>
-              </a:rPr>
               <a:t>CÓMO LO VAMOS A </a:t>
             </a:r>
-            <a:pPr indent="0" marL="0">
-              <a:buNone/>
-            </a:pPr>
             <a:r>
               <a:rPr lang="en-US" sz="3400" dirty="0">
                 <a:solidFill>
@@ -9894,16 +8857,34 @@
         </p:nvGraphicFramePr>
         <p:xfrm>
           <a:off x="594360" y="1920240"/>
-          <a:ext cx="11002975" cy="914400"/>
+          <a:ext cx="11000232" cy="2124456"/>
         </p:xfrm>
         <a:graphic>
           <a:graphicData uri="http://schemas.openxmlformats.org/drawingml/2006/table">
             <a:tbl>
               <a:tblPr/>
               <a:tblGrid>
-                <a:gridCol w="4754880"/>
-                <a:gridCol w="3931920"/>
-                <a:gridCol w="2313432"/>
+                <a:gridCol w="4754880">
+                  <a:extLst>
+                    <a:ext uri="{9D8B030D-6E8A-4147-A177-3AD203B41FA5}">
+                      <a16:colId xmlns:a16="http://schemas.microsoft.com/office/drawing/2014/main" val="20000"/>
+                    </a:ext>
+                  </a:extLst>
+                </a:gridCol>
+                <a:gridCol w="3931920">
+                  <a:extLst>
+                    <a:ext uri="{9D8B030D-6E8A-4147-A177-3AD203B41FA5}">
+                      <a16:colId xmlns:a16="http://schemas.microsoft.com/office/drawing/2014/main" val="20001"/>
+                    </a:ext>
+                  </a:extLst>
+                </a:gridCol>
+                <a:gridCol w="2313432">
+                  <a:extLst>
+                    <a:ext uri="{9D8B030D-6E8A-4147-A177-3AD203B41FA5}">
+                      <a16:colId xmlns:a16="http://schemas.microsoft.com/office/drawing/2014/main" val="20002"/>
+                    </a:ext>
+                  </a:extLst>
+                </a:gridCol>
               </a:tblGrid>
               <a:tr h="530352">
                 <a:tc>
@@ -9911,7 +8892,7 @@
                     <a:bodyPr/>
                     <a:lstStyle/>
                     <a:p>
-                      <a:pPr algn="l" indent="0" marL="0">
+                      <a:pPr marL="0" indent="0" algn="l">
                         <a:buNone/>
                       </a:pPr>
                       <a:r>
@@ -9979,7 +8960,7 @@
                     <a:bodyPr/>
                     <a:lstStyle/>
                     <a:p>
-                      <a:pPr algn="l" indent="0" marL="0">
+                      <a:pPr marL="0" indent="0" algn="l">
                         <a:buNone/>
                       </a:pPr>
                       <a:r>
@@ -10047,7 +9028,7 @@
                     <a:bodyPr/>
                     <a:lstStyle/>
                     <a:p>
-                      <a:pPr algn="ctr" indent="0" marL="0">
+                      <a:pPr marL="0" indent="0" algn="ctr">
                         <a:buNone/>
                       </a:pPr>
                       <a:r>
@@ -10110,6 +9091,11 @@
                     </a:solidFill>
                   </a:tcPr>
                 </a:tc>
+                <a:extLst>
+                  <a:ext uri="{0D108BD9-81ED-4DB2-BD59-A6C34878D82A}">
+                    <a16:rowId xmlns:a16="http://schemas.microsoft.com/office/drawing/2014/main" val="10000"/>
+                  </a:ext>
+                </a:extLst>
               </a:tr>
               <a:tr h="530352">
                 <a:tc>
@@ -10117,7 +9103,7 @@
                     <a:bodyPr/>
                     <a:lstStyle/>
                     <a:p>
-                      <a:pPr algn="l" indent="0" marL="0">
+                      <a:pPr marL="0" indent="0" algn="l">
                         <a:buNone/>
                       </a:pPr>
                       <a:r>
@@ -10185,7 +9171,7 @@
                     <a:bodyPr/>
                     <a:lstStyle/>
                     <a:p>
-                      <a:pPr algn="l" indent="0" marL="0">
+                      <a:pPr marL="0" indent="0" algn="l">
                         <a:buNone/>
                       </a:pPr>
                       <a:r>
@@ -10253,7 +9239,7 @@
                     <a:bodyPr/>
                     <a:lstStyle/>
                     <a:p>
-                      <a:pPr algn="ctr" indent="0" marL="0">
+                      <a:pPr marL="0" indent="0" algn="ctr">
                         <a:buNone/>
                       </a:pPr>
                       <a:r>
@@ -10267,9 +9253,6 @@
                         </a:rPr>
                         <a:t>[3]</a:t>
                       </a:r>
-                      <a:pPr algn="ctr" indent="0" marL="0">
-                        <a:buNone/>
-                      </a:pPr>
                       <a:r>
                         <a:rPr lang="en-US" sz="1250" b="1" dirty="0">
                           <a:solidFill>
@@ -10330,6 +9313,11 @@
                     </a:solidFill>
                   </a:tcPr>
                 </a:tc>
+                <a:extLst>
+                  <a:ext uri="{0D108BD9-81ED-4DB2-BD59-A6C34878D82A}">
+                    <a16:rowId xmlns:a16="http://schemas.microsoft.com/office/drawing/2014/main" val="10001"/>
+                  </a:ext>
+                </a:extLst>
               </a:tr>
               <a:tr h="530352">
                 <a:tc>
@@ -10337,7 +9325,7 @@
                     <a:bodyPr/>
                     <a:lstStyle/>
                     <a:p>
-                      <a:pPr algn="l" indent="0" marL="0">
+                      <a:pPr marL="0" indent="0" algn="l">
                         <a:buNone/>
                       </a:pPr>
                       <a:r>
@@ -10405,7 +9393,7 @@
                     <a:bodyPr/>
                     <a:lstStyle/>
                     <a:p>
-                      <a:pPr algn="l" indent="0" marL="0">
+                      <a:pPr marL="0" indent="0" algn="l">
                         <a:buNone/>
                       </a:pPr>
                       <a:r>
@@ -10473,7 +9461,7 @@
                     <a:bodyPr/>
                     <a:lstStyle/>
                     <a:p>
-                      <a:pPr algn="ctr" indent="0" marL="0">
+                      <a:pPr marL="0" indent="0" algn="ctr">
                         <a:buNone/>
                       </a:pPr>
                       <a:r>
@@ -10487,9 +9475,6 @@
                         </a:rPr>
                         <a:t>[50]</a:t>
                       </a:r>
-                      <a:pPr algn="ctr" indent="0" marL="0">
-                        <a:buNone/>
-                      </a:pPr>
                       <a:r>
                         <a:rPr lang="en-US" sz="1250" b="1" dirty="0">
                           <a:solidFill>
@@ -10550,6 +9535,11 @@
                     </a:solidFill>
                   </a:tcPr>
                 </a:tc>
+                <a:extLst>
+                  <a:ext uri="{0D108BD9-81ED-4DB2-BD59-A6C34878D82A}">
+                    <a16:rowId xmlns:a16="http://schemas.microsoft.com/office/drawing/2014/main" val="10002"/>
+                  </a:ext>
+                </a:extLst>
               </a:tr>
               <a:tr h="530352">
                 <a:tc>
@@ -10557,7 +9547,7 @@
                     <a:bodyPr/>
                     <a:lstStyle/>
                     <a:p>
-                      <a:pPr algn="l" indent="0" marL="0">
+                      <a:pPr marL="0" indent="0" algn="l">
                         <a:buNone/>
                       </a:pPr>
                       <a:r>
@@ -10625,7 +9615,7 @@
                     <a:bodyPr/>
                     <a:lstStyle/>
                     <a:p>
-                      <a:pPr algn="l" indent="0" marL="0">
+                      <a:pPr marL="0" indent="0" algn="l">
                         <a:buNone/>
                       </a:pPr>
                       <a:r>
@@ -10693,7 +9683,7 @@
                     <a:bodyPr/>
                     <a:lstStyle/>
                     <a:p>
-                      <a:pPr algn="ctr" indent="0" marL="0">
+                      <a:pPr marL="0" indent="0" algn="ctr">
                         <a:buNone/>
                       </a:pPr>
                       <a:r>
@@ -10707,9 +9697,6 @@
                         </a:rPr>
                         <a:t>[80]</a:t>
                       </a:r>
-                      <a:pPr algn="ctr" indent="0" marL="0">
-                        <a:buNone/>
-                      </a:pPr>
                       <a:r>
                         <a:rPr lang="en-US" sz="1250" b="1" dirty="0">
                           <a:solidFill>
@@ -10770,6 +9757,11 @@
                     </a:solidFill>
                   </a:tcPr>
                 </a:tc>
+                <a:extLst>
+                  <a:ext uri="{0D108BD9-81ED-4DB2-BD59-A6C34878D82A}">
+                    <a16:rowId xmlns:a16="http://schemas.microsoft.com/office/drawing/2014/main" val="10003"/>
+                  </a:ext>
+                </a:extLst>
               </a:tr>
             </a:tbl>
           </a:graphicData>
@@ -10796,7 +9788,7 @@
           <a:bodyPr wrap="square" lIns="0" tIns="0" rIns="0" bIns="0" rtlCol="0" anchor="ctr"/>
           <a:lstStyle/>
           <a:p>
-            <a:pPr indent="0" marL="0">
+            <a:pPr marL="0" indent="0">
               <a:buNone/>
             </a:pPr>
             <a:r>
@@ -10864,13 +9856,13 @@
       </p:sp>
       <p:sp>
         <p:nvSpPr>
-          <p:cNvPr id="9" name="Text 6"/>
+          <p:cNvPr id="5" name="Text 6"/>
           <p:cNvSpPr txBox="1"/>
           <p:nvPr/>
         </p:nvSpPr>
         <p:spPr>
           <a:xfrm>
-            <a:off x="960120" y="4773168"/>
+            <a:off x="928116" y="4654804"/>
             <a:ext cx="3200400" cy="347472"/>
           </a:xfrm>
           <a:prstGeom prst="rect">
@@ -10883,7 +9875,7 @@
           <a:bodyPr wrap="square" lIns="0" tIns="0" rIns="0" bIns="0" rtlCol="0" anchor="ctr"/>
           <a:lstStyle/>
           <a:p>
-            <a:pPr indent="0" marL="0">
+            <a:pPr marL="0" indent="0">
               <a:buNone/>
             </a:pPr>
             <a:r>
@@ -10922,7 +9914,7 @@
           <a:bodyPr wrap="square" lIns="0" tIns="0" rIns="0" bIns="0" rtlCol="0" anchor="t"/>
           <a:lstStyle/>
           <a:p>
-            <a:pPr indent="0" marL="0">
+            <a:pPr marL="0" indent="0">
               <a:buNone/>
             </a:pPr>
             <a:r>
@@ -10996,7 +9988,7 @@
         </p:nvSpPr>
         <p:spPr>
           <a:xfrm>
-            <a:off x="4828032" y="4773168"/>
+            <a:off x="4759452" y="4631267"/>
             <a:ext cx="3200400" cy="347472"/>
           </a:xfrm>
           <a:prstGeom prst="rect">
@@ -11009,7 +10001,7 @@
           <a:bodyPr wrap="square" lIns="0" tIns="0" rIns="0" bIns="0" rtlCol="0" anchor="ctr"/>
           <a:lstStyle/>
           <a:p>
-            <a:pPr indent="0" marL="0">
+            <a:pPr marL="0" indent="0">
               <a:buNone/>
             </a:pPr>
             <a:r>
@@ -11048,7 +10040,7 @@
           <a:bodyPr wrap="square" lIns="0" tIns="0" rIns="0" bIns="0" rtlCol="0" anchor="t"/>
           <a:lstStyle/>
           <a:p>
-            <a:pPr indent="0" marL="0">
+            <a:pPr marL="0" indent="0">
               <a:buNone/>
             </a:pPr>
             <a:r>
@@ -11062,9 +10054,6 @@
               </a:rPr>
               <a:t>Piloto en testnet con </a:t>
             </a:r>
-            <a:pPr indent="0" marL="0">
-              <a:buNone/>
-            </a:pPr>
             <a:r>
               <a:rPr lang="en-US" sz="1200" b="1" dirty="0">
                 <a:solidFill>
@@ -11076,9 +10065,6 @@
               </a:rPr>
               <a:t>[universidad]</a:t>
             </a:r>
-            <a:pPr indent="0" marL="0">
-              <a:buNone/>
-            </a:pPr>
             <a:r>
               <a:rPr lang="en-US" sz="1200" dirty="0">
                 <a:solidFill>
@@ -11090,9 +10076,6 @@
               </a:rPr>
               <a:t> y </a:t>
             </a:r>
-            <a:pPr indent="0" marL="0">
-              <a:buNone/>
-            </a:pPr>
             <a:r>
               <a:rPr lang="en-US" sz="1200" b="1" dirty="0">
                 <a:solidFill>
@@ -11104,9 +10087,6 @@
               </a:rPr>
               <a:t>[5]</a:t>
             </a:r>
-            <a:pPr indent="0" marL="0">
-              <a:buNone/>
-            </a:pPr>
             <a:r>
               <a:rPr lang="en-US" sz="1200" dirty="0">
                 <a:solidFill>
@@ -11155,7 +10135,7 @@
         </p:nvSpPr>
         <p:spPr>
           <a:xfrm>
-            <a:off x="8695944" y="4773168"/>
+            <a:off x="8645652" y="4575726"/>
             <a:ext cx="3200400" cy="347472"/>
           </a:xfrm>
           <a:prstGeom prst="rect">
@@ -11168,7 +10148,7 @@
           <a:bodyPr wrap="square" lIns="0" tIns="0" rIns="0" bIns="0" rtlCol="0" anchor="ctr"/>
           <a:lstStyle/>
           <a:p>
-            <a:pPr indent="0" marL="0">
+            <a:pPr marL="0" indent="0">
               <a:buNone/>
             </a:pPr>
             <a:r>
@@ -11207,7 +10187,7 @@
           <a:bodyPr wrap="square" lIns="0" tIns="0" rIns="0" bIns="0" rtlCol="0" anchor="t"/>
           <a:lstStyle/>
           <a:p>
-            <a:pPr indent="0" marL="0">
+            <a:pPr marL="0" indent="0">
               <a:buNone/>
             </a:pPr>
             <a:r>
@@ -11246,7 +10226,7 @@
           <a:bodyPr wrap="square" lIns="0" tIns="0" rIns="0" bIns="0" rtlCol="0" anchor="ctr"/>
           <a:lstStyle/>
           <a:p>
-            <a:pPr indent="0" marL="0">
+            <a:pPr marL="0" indent="0">
               <a:buNone/>
             </a:pPr>
             <a:r>
@@ -11260,9 +10240,6 @@
               </a:rPr>
               <a:t>PRIMER SEGMENTO:  </a:t>
             </a:r>
-            <a:pPr indent="0" marL="0">
-              <a:buNone/>
-            </a:pPr>
             <a:r>
               <a:rPr lang="en-US" sz="1300" dirty="0">
                 <a:solidFill>
@@ -11274,11 +10251,8 @@
               </a:rPr>
               <a:t>estudiantes de diseño, sistemas y marketing de </a:t>
             </a:r>
-            <a:pPr indent="0" marL="0">
-              <a:buNone/>
-            </a:pPr>
-            <a:r>
-              <a:rPr lang="en-US" sz="1300" b="1" dirty="0">
+            <a:r>
+              <a:rPr lang="en-US" sz="1300" b="1" dirty="0" err="1">
                 <a:solidFill>
                   <a:srgbClr val="3D5AFE"/>
                 </a:solidFill>
@@ -11286,59 +10260,67 @@
                 <a:ea typeface="Arial" pitchFamily="34" charset="-122"/>
                 <a:cs typeface="Arial" pitchFamily="34" charset="-120"/>
               </a:rPr>
-              <a:t>[tu universidad]</a:t>
-            </a:r>
-            <a:pPr indent="0" marL="0">
-              <a:buNone/>
-            </a:pPr>
-            <a:r>
-              <a:rPr lang="en-US" sz="1300" dirty="0">
-                <a:solidFill>
-                  <a:srgbClr val="222222"/>
+              <a:t>distintas</a:t>
+            </a:r>
+            <a:r>
+              <a:rPr lang="en-US" sz="1300" b="1" dirty="0">
+                <a:solidFill>
+                  <a:srgbClr val="3D5AFE"/>
                 </a:solidFill>
                 <a:latin typeface="Arial" pitchFamily="34" charset="0"/>
                 <a:ea typeface="Arial" pitchFamily="34" charset="-122"/>
                 <a:cs typeface="Arial" pitchFamily="34" charset="-120"/>
               </a:rPr>
-              <a:t>.</a:t>
-            </a:r>
-            <a:endParaRPr lang="en-US" sz="1300" dirty="0"/>
-          </a:p>
-        </p:txBody>
-      </p:sp>
-      <p:sp>
-        <p:nvSpPr>
-          <p:cNvPr id="19" name="Text 16"/>
-          <p:cNvSpPr txBox="1"/>
-          <p:nvPr/>
-        </p:nvSpPr>
-        <p:spPr>
-          <a:xfrm>
-            <a:off x="594360" y="6419088"/>
-            <a:ext cx="8229600" cy="301752"/>
-          </a:xfrm>
-          <a:prstGeom prst="rect">
-            <a:avLst/>
-          </a:prstGeom>
-          <a:noFill/>
-          <a:ln/>
-        </p:spPr>
-        <p:txBody>
-          <a:bodyPr wrap="square" lIns="0" tIns="0" rIns="0" bIns="0" rtlCol="0" anchor="ctr"/>
-          <a:lstStyle/>
-          <a:p>
-            <a:pPr indent="0" marL="0">
-              <a:buNone/>
-            </a:pPr>
-            <a:r>
-              <a:rPr lang="en-US" sz="1000" b="1" spc="100" kern="0" dirty="0">
-                <a:solidFill>
-                  <a:srgbClr val="6B6B6B"/>
+              <a:t> </a:t>
+            </a:r>
+            <a:r>
+              <a:rPr lang="en-US" sz="1300" b="1" dirty="0" err="1">
+                <a:solidFill>
+                  <a:srgbClr val="3D5AFE"/>
                 </a:solidFill>
                 <a:latin typeface="Arial" pitchFamily="34" charset="0"/>
                 <a:ea typeface="Arial" pitchFamily="34" charset="-122"/>
                 <a:cs typeface="Arial" pitchFamily="34" charset="-120"/>
               </a:rPr>
+              <a:t>universidades</a:t>
+            </a:r>
+            <a:endParaRPr lang="en-US" sz="1300" dirty="0"/>
+          </a:p>
+        </p:txBody>
+      </p:sp>
+      <p:sp>
+        <p:nvSpPr>
+          <p:cNvPr id="19" name="Text 16"/>
+          <p:cNvSpPr txBox="1"/>
+          <p:nvPr/>
+        </p:nvSpPr>
+        <p:spPr>
+          <a:xfrm>
+            <a:off x="594360" y="6419088"/>
+            <a:ext cx="8229600" cy="301752"/>
+          </a:xfrm>
+          <a:prstGeom prst="rect">
+            <a:avLst/>
+          </a:prstGeom>
+          <a:noFill/>
+          <a:ln/>
+        </p:spPr>
+        <p:txBody>
+          <a:bodyPr wrap="square" lIns="0" tIns="0" rIns="0" bIns="0" rtlCol="0" anchor="ctr"/>
+          <a:lstStyle/>
+          <a:p>
+            <a:pPr marL="0" indent="0">
+              <a:buNone/>
+            </a:pPr>
+            <a:r>
+              <a:rPr lang="en-US" sz="1000" b="1" kern="0" spc="100" dirty="0">
+                <a:solidFill>
+                  <a:srgbClr val="6B6B6B"/>
+                </a:solidFill>
+                <a:latin typeface="Arial" pitchFamily="34" charset="0"/>
+                <a:ea typeface="Arial" pitchFamily="34" charset="-122"/>
+                <a:cs typeface="Arial" pitchFamily="34" charset="-120"/>
+              </a:rPr>
               <a:t>IDEATÓN STELLAR BOLIVIA 2026  ·  WORKING</a:t>
             </a:r>
             <a:endParaRPr lang="en-US" sz="1000" dirty="0"/>
@@ -11366,7 +10348,7 @@
           <a:bodyPr wrap="square" lIns="0" tIns="0" rIns="0" bIns="0" rtlCol="0" anchor="ctr"/>
           <a:lstStyle/>
           <a:p>
-            <a:pPr algn="r" indent="0" marL="0">
+            <a:pPr marL="0" indent="0" algn="r">
               <a:buNone/>
             </a:pPr>
             <a:r>
@@ -11378,7 +10360,1029 @@
                 <a:ea typeface="Arial Black" pitchFamily="34" charset="-122"/>
                 <a:cs typeface="Arial Black" pitchFamily="34" charset="-120"/>
               </a:rPr>
-              <a:t>08</a:t>
+              <a:t>07</a:t>
+            </a:r>
+            <a:endParaRPr lang="en-US" sz="1100" dirty="0"/>
+          </a:p>
+        </p:txBody>
+      </p:sp>
+      <p:sp>
+        <p:nvSpPr>
+          <p:cNvPr id="21" name="Shape 9">
+            <a:extLst>
+              <a:ext uri="{FF2B5EF4-FFF2-40B4-BE49-F238E27FC236}">
+                <a16:creationId xmlns:a16="http://schemas.microsoft.com/office/drawing/2014/main" id="{9B19195C-3B55-4A2E-8F96-687C4BD92D14}"/>
+              </a:ext>
+            </a:extLst>
+          </p:cNvPr>
+          <p:cNvSpPr/>
+          <p:nvPr/>
+        </p:nvSpPr>
+        <p:spPr>
+          <a:xfrm>
+            <a:off x="8598408" y="4965192"/>
+            <a:ext cx="3593592" cy="0"/>
+          </a:xfrm>
+          <a:prstGeom prst="line">
+            <a:avLst/>
+          </a:prstGeom>
+          <a:noFill/>
+          <a:ln w="19050">
+            <a:solidFill>
+              <a:srgbClr val="111111"/>
+            </a:solidFill>
+            <a:prstDash val="dash"/>
+          </a:ln>
+        </p:spPr>
+      </p:sp>
+    </p:spTree>
+  </p:cSld>
+  <p:clrMapOvr>
+    <a:masterClrMapping/>
+  </p:clrMapOvr>
+</p:sld>
+</file>
+
+<file path=ppt/slides/slide8.xml><?xml version="1.0" encoding="utf-8"?>
+<p:sld xmlns:a="http://schemas.openxmlformats.org/drawingml/2006/main" xmlns:r="http://schemas.openxmlformats.org/officeDocument/2006/relationships" xmlns:p="http://schemas.openxmlformats.org/presentationml/2006/main">
+  <p:cSld name="Slide 3">
+    <p:bg>
+      <p:bgPr>
+        <a:solidFill>
+          <a:srgbClr val="F7F4EC"/>
+        </a:solidFill>
+        <a:effectLst/>
+      </p:bgPr>
+    </p:bg>
+    <p:spTree>
+      <p:nvGrpSpPr>
+        <p:cNvPr id="1" name=""/>
+        <p:cNvGrpSpPr/>
+        <p:nvPr/>
+      </p:nvGrpSpPr>
+      <p:grpSpPr>
+        <a:xfrm>
+          <a:off x="0" y="0"/>
+          <a:ext cx="0" cy="0"/>
+          <a:chOff x="0" y="0"/>
+          <a:chExt cx="0" cy="0"/>
+        </a:xfrm>
+      </p:grpSpPr>
+      <p:sp>
+        <p:nvSpPr>
+          <p:cNvPr id="2" name="Text 0"/>
+          <p:cNvSpPr txBox="1"/>
+          <p:nvPr/>
+        </p:nvSpPr>
+        <p:spPr>
+          <a:xfrm>
+            <a:off x="594360" y="384048"/>
+            <a:ext cx="9144000" cy="292608"/>
+          </a:xfrm>
+          <a:prstGeom prst="rect">
+            <a:avLst/>
+          </a:prstGeom>
+          <a:noFill/>
+          <a:ln/>
+        </p:spPr>
+        <p:txBody>
+          <a:bodyPr wrap="square" lIns="0" tIns="0" rIns="0" bIns="0" rtlCol="0" anchor="ctr"/>
+          <a:lstStyle/>
+          <a:p>
+            <a:pPr marL="0" indent="0">
+              <a:buNone/>
+            </a:pPr>
+            <a:r>
+              <a:rPr lang="en-US" sz="1200" kern="0" spc="200" dirty="0">
+                <a:solidFill>
+                  <a:srgbClr val="00A676"/>
+                </a:solidFill>
+                <a:latin typeface="Arial Black" pitchFamily="34" charset="0"/>
+                <a:ea typeface="Arial Black" pitchFamily="34" charset="-122"/>
+                <a:cs typeface="Arial Black" pitchFamily="34" charset="-120"/>
+              </a:rPr>
+              <a:t>LO VALIDAMOS CON USUARIOS REALES</a:t>
+            </a:r>
+            <a:endParaRPr lang="en-US" sz="1200" dirty="0"/>
+          </a:p>
+        </p:txBody>
+      </p:sp>
+      <p:sp>
+        <p:nvSpPr>
+          <p:cNvPr id="3" name="Text 1"/>
+          <p:cNvSpPr txBox="1"/>
+          <p:nvPr/>
+        </p:nvSpPr>
+        <p:spPr>
+          <a:xfrm>
+            <a:off x="594360" y="713232"/>
+            <a:ext cx="11002975" cy="868680"/>
+          </a:xfrm>
+          <a:prstGeom prst="rect">
+            <a:avLst/>
+          </a:prstGeom>
+          <a:noFill/>
+          <a:ln/>
+        </p:spPr>
+        <p:txBody>
+          <a:bodyPr wrap="square" lIns="0" tIns="0" rIns="0" bIns="0" rtlCol="0" anchor="ctr"/>
+          <a:lstStyle/>
+          <a:p>
+            <a:pPr marL="0" indent="0">
+              <a:buNone/>
+            </a:pPr>
+            <a:r>
+              <a:rPr lang="en-US" sz="3400" dirty="0">
+                <a:solidFill>
+                  <a:srgbClr val="111111"/>
+                </a:solidFill>
+                <a:latin typeface="Arial Black" pitchFamily="34" charset="0"/>
+                <a:ea typeface="Arial Black" pitchFamily="34" charset="-122"/>
+                <a:cs typeface="Arial Black" pitchFamily="34" charset="-120"/>
+              </a:rPr>
+              <a:t>HABLAMOS CON </a:t>
+            </a:r>
+            <a:r>
+              <a:rPr lang="en-US" sz="3400" dirty="0">
+                <a:solidFill>
+                  <a:srgbClr val="3D5AFE"/>
+                </a:solidFill>
+                <a:latin typeface="Arial Black" pitchFamily="34" charset="0"/>
+                <a:ea typeface="Arial Black" pitchFamily="34" charset="-122"/>
+                <a:cs typeface="Arial Black" pitchFamily="34" charset="-120"/>
+              </a:rPr>
+              <a:t>[N]</a:t>
+            </a:r>
+            <a:r>
+              <a:rPr lang="en-US" sz="3400" dirty="0">
+                <a:solidFill>
+                  <a:srgbClr val="111111"/>
+                </a:solidFill>
+                <a:latin typeface="Arial Black" pitchFamily="34" charset="0"/>
+                <a:ea typeface="Arial Black" pitchFamily="34" charset="-122"/>
+                <a:cs typeface="Arial Black" pitchFamily="34" charset="-120"/>
+              </a:rPr>
+              <a:t> PERSONAS</a:t>
+            </a:r>
+            <a:endParaRPr lang="en-US" sz="3400" dirty="0"/>
+          </a:p>
+        </p:txBody>
+      </p:sp>
+      <p:sp>
+        <p:nvSpPr>
+          <p:cNvPr id="4" name="Text 2"/>
+          <p:cNvSpPr txBox="1"/>
+          <p:nvPr/>
+        </p:nvSpPr>
+        <p:spPr>
+          <a:xfrm>
+            <a:off x="594360" y="1572768"/>
+            <a:ext cx="11002975" cy="411480"/>
+          </a:xfrm>
+          <a:prstGeom prst="rect">
+            <a:avLst/>
+          </a:prstGeom>
+          <a:noFill/>
+          <a:ln/>
+        </p:spPr>
+        <p:txBody>
+          <a:bodyPr wrap="square" lIns="0" tIns="0" rIns="0" bIns="0" rtlCol="0" anchor="ctr"/>
+          <a:lstStyle/>
+          <a:p>
+            <a:pPr marL="0" indent="0">
+              <a:buNone/>
+            </a:pPr>
+            <a:r>
+              <a:rPr lang="en-US" sz="1600" b="1" dirty="0">
+                <a:solidFill>
+                  <a:srgbClr val="333333"/>
+                </a:solidFill>
+                <a:latin typeface="Arial" pitchFamily="34" charset="0"/>
+                <a:ea typeface="Arial" pitchFamily="34" charset="-122"/>
+                <a:cs typeface="Arial" pitchFamily="34" charset="-120"/>
+              </a:rPr>
+              <a:t>Formulario de 7 preguntas  +  5 entrevistas a profundidad.</a:t>
+            </a:r>
+            <a:endParaRPr lang="en-US" sz="1600" dirty="0"/>
+          </a:p>
+        </p:txBody>
+      </p:sp>
+      <p:sp>
+        <p:nvSpPr>
+          <p:cNvPr id="5" name="Shape 3"/>
+          <p:cNvSpPr/>
+          <p:nvPr/>
+        </p:nvSpPr>
+        <p:spPr>
+          <a:xfrm>
+            <a:off x="685800" y="2331720"/>
+            <a:ext cx="3456432" cy="1600200"/>
+          </a:xfrm>
+          <a:prstGeom prst="rect">
+            <a:avLst/>
+          </a:prstGeom>
+          <a:solidFill>
+            <a:srgbClr val="111111"/>
+          </a:solidFill>
+          <a:ln/>
+        </p:spPr>
+      </p:sp>
+      <p:sp>
+        <p:nvSpPr>
+          <p:cNvPr id="6" name="Shape 4"/>
+          <p:cNvSpPr/>
+          <p:nvPr/>
+        </p:nvSpPr>
+        <p:spPr>
+          <a:xfrm>
+            <a:off x="594360" y="2240280"/>
+            <a:ext cx="3456432" cy="1600200"/>
+          </a:xfrm>
+          <a:prstGeom prst="rect">
+            <a:avLst/>
+          </a:prstGeom>
+          <a:solidFill>
+            <a:srgbClr val="FFFFFF"/>
+          </a:solidFill>
+          <a:ln w="25400">
+            <a:solidFill>
+              <a:srgbClr val="111111"/>
+            </a:solidFill>
+            <a:prstDash val="solid"/>
+          </a:ln>
+        </p:spPr>
+      </p:sp>
+      <p:sp>
+        <p:nvSpPr>
+          <p:cNvPr id="7" name="Text 5"/>
+          <p:cNvSpPr txBox="1"/>
+          <p:nvPr/>
+        </p:nvSpPr>
+        <p:spPr>
+          <a:xfrm>
+            <a:off x="777240" y="2423160"/>
+            <a:ext cx="3090672" cy="777240"/>
+          </a:xfrm>
+          <a:prstGeom prst="rect">
+            <a:avLst/>
+          </a:prstGeom>
+          <a:noFill/>
+          <a:ln/>
+        </p:spPr>
+        <p:txBody>
+          <a:bodyPr wrap="square" lIns="0" tIns="0" rIns="0" bIns="0" rtlCol="0" anchor="ctr"/>
+          <a:lstStyle/>
+          <a:p>
+            <a:pPr marL="0" indent="0" algn="ctr">
+              <a:buNone/>
+            </a:pPr>
+            <a:r>
+              <a:rPr lang="en-US" sz="4400" dirty="0">
+                <a:solidFill>
+                  <a:srgbClr val="3D5AFE"/>
+                </a:solidFill>
+                <a:latin typeface="Arial Black" pitchFamily="34" charset="0"/>
+                <a:ea typeface="Arial Black" pitchFamily="34" charset="-122"/>
+                <a:cs typeface="Arial Black" pitchFamily="34" charset="-120"/>
+              </a:rPr>
+              <a:t>[X]%</a:t>
+            </a:r>
+            <a:endParaRPr lang="en-US" sz="4400" dirty="0"/>
+          </a:p>
+        </p:txBody>
+      </p:sp>
+      <p:sp>
+        <p:nvSpPr>
+          <p:cNvPr id="8" name="Text 6"/>
+          <p:cNvSpPr txBox="1"/>
+          <p:nvPr/>
+        </p:nvSpPr>
+        <p:spPr>
+          <a:xfrm>
+            <a:off x="868680" y="3200400"/>
+            <a:ext cx="2907792" cy="548640"/>
+          </a:xfrm>
+          <a:prstGeom prst="rect">
+            <a:avLst/>
+          </a:prstGeom>
+          <a:noFill/>
+          <a:ln/>
+        </p:spPr>
+        <p:txBody>
+          <a:bodyPr wrap="square" lIns="0" tIns="0" rIns="0" bIns="0" rtlCol="0" anchor="ctr"/>
+          <a:lstStyle/>
+          <a:p>
+            <a:pPr marL="0" indent="0" algn="ctr">
+              <a:buNone/>
+            </a:pPr>
+            <a:r>
+              <a:rPr lang="en-US" sz="1300" dirty="0">
+                <a:solidFill>
+                  <a:srgbClr val="222222"/>
+                </a:solidFill>
+                <a:latin typeface="Arial" pitchFamily="34" charset="0"/>
+                <a:ea typeface="Arial" pitchFamily="34" charset="-122"/>
+                <a:cs typeface="Arial" pitchFamily="34" charset="-120"/>
+              </a:rPr>
+              <a:t>tuvo un pago atrasado o nunca le pagaron</a:t>
+            </a:r>
+            <a:endParaRPr lang="en-US" sz="1300" dirty="0"/>
+          </a:p>
+        </p:txBody>
+      </p:sp>
+      <p:sp>
+        <p:nvSpPr>
+          <p:cNvPr id="9" name="Shape 7"/>
+          <p:cNvSpPr/>
+          <p:nvPr/>
+        </p:nvSpPr>
+        <p:spPr>
+          <a:xfrm>
+            <a:off x="4526280" y="2331720"/>
+            <a:ext cx="3456432" cy="1600200"/>
+          </a:xfrm>
+          <a:prstGeom prst="rect">
+            <a:avLst/>
+          </a:prstGeom>
+          <a:solidFill>
+            <a:srgbClr val="111111"/>
+          </a:solidFill>
+          <a:ln/>
+        </p:spPr>
+      </p:sp>
+      <p:sp>
+        <p:nvSpPr>
+          <p:cNvPr id="10" name="Shape 8"/>
+          <p:cNvSpPr/>
+          <p:nvPr/>
+        </p:nvSpPr>
+        <p:spPr>
+          <a:xfrm>
+            <a:off x="4434840" y="2240280"/>
+            <a:ext cx="3456432" cy="1600200"/>
+          </a:xfrm>
+          <a:prstGeom prst="rect">
+            <a:avLst/>
+          </a:prstGeom>
+          <a:solidFill>
+            <a:srgbClr val="FFFFFF"/>
+          </a:solidFill>
+          <a:ln w="25400">
+            <a:solidFill>
+              <a:srgbClr val="111111"/>
+            </a:solidFill>
+            <a:prstDash val="solid"/>
+          </a:ln>
+        </p:spPr>
+      </p:sp>
+      <p:sp>
+        <p:nvSpPr>
+          <p:cNvPr id="11" name="Text 9"/>
+          <p:cNvSpPr txBox="1"/>
+          <p:nvPr/>
+        </p:nvSpPr>
+        <p:spPr>
+          <a:xfrm>
+            <a:off x="4617720" y="2423160"/>
+            <a:ext cx="3090672" cy="777240"/>
+          </a:xfrm>
+          <a:prstGeom prst="rect">
+            <a:avLst/>
+          </a:prstGeom>
+          <a:noFill/>
+          <a:ln/>
+        </p:spPr>
+        <p:txBody>
+          <a:bodyPr wrap="square" lIns="0" tIns="0" rIns="0" bIns="0" rtlCol="0" anchor="ctr"/>
+          <a:lstStyle/>
+          <a:p>
+            <a:pPr marL="0" indent="0" algn="ctr">
+              <a:buNone/>
+            </a:pPr>
+            <a:r>
+              <a:rPr lang="en-US" sz="4400" dirty="0">
+                <a:solidFill>
+                  <a:srgbClr val="3D5AFE"/>
+                </a:solidFill>
+                <a:latin typeface="Arial Black" pitchFamily="34" charset="0"/>
+                <a:ea typeface="Arial Black" pitchFamily="34" charset="-122"/>
+                <a:cs typeface="Arial Black" pitchFamily="34" charset="-120"/>
+              </a:rPr>
+              <a:t>[X]%</a:t>
+            </a:r>
+            <a:endParaRPr lang="en-US" sz="4400" dirty="0"/>
+          </a:p>
+        </p:txBody>
+      </p:sp>
+      <p:sp>
+        <p:nvSpPr>
+          <p:cNvPr id="12" name="Text 10"/>
+          <p:cNvSpPr txBox="1"/>
+          <p:nvPr/>
+        </p:nvSpPr>
+        <p:spPr>
+          <a:xfrm>
+            <a:off x="4709160" y="3200400"/>
+            <a:ext cx="2907792" cy="548640"/>
+          </a:xfrm>
+          <a:prstGeom prst="rect">
+            <a:avLst/>
+          </a:prstGeom>
+          <a:noFill/>
+          <a:ln/>
+        </p:spPr>
+        <p:txBody>
+          <a:bodyPr wrap="square" lIns="0" tIns="0" rIns="0" bIns="0" rtlCol="0" anchor="ctr"/>
+          <a:lstStyle/>
+          <a:p>
+            <a:pPr marL="0" indent="0" algn="ctr">
+              <a:buNone/>
+            </a:pPr>
+            <a:r>
+              <a:rPr lang="en-US" sz="1300" dirty="0">
+                <a:solidFill>
+                  <a:srgbClr val="222222"/>
+                </a:solidFill>
+                <a:latin typeface="Arial" pitchFamily="34" charset="0"/>
+                <a:ea typeface="Arial" pitchFamily="34" charset="-122"/>
+                <a:cs typeface="Arial" pitchFamily="34" charset="-120"/>
+              </a:rPr>
+              <a:t>no paga por adelantado sin referencias</a:t>
+            </a:r>
+            <a:endParaRPr lang="en-US" sz="1300" dirty="0"/>
+          </a:p>
+        </p:txBody>
+      </p:sp>
+      <p:sp>
+        <p:nvSpPr>
+          <p:cNvPr id="13" name="Shape 11"/>
+          <p:cNvSpPr/>
+          <p:nvPr/>
+        </p:nvSpPr>
+        <p:spPr>
+          <a:xfrm>
+            <a:off x="8366760" y="2331720"/>
+            <a:ext cx="3456432" cy="1600200"/>
+          </a:xfrm>
+          <a:prstGeom prst="rect">
+            <a:avLst/>
+          </a:prstGeom>
+          <a:solidFill>
+            <a:srgbClr val="111111"/>
+          </a:solidFill>
+          <a:ln/>
+        </p:spPr>
+      </p:sp>
+      <p:sp>
+        <p:nvSpPr>
+          <p:cNvPr id="14" name="Shape 12"/>
+          <p:cNvSpPr/>
+          <p:nvPr/>
+        </p:nvSpPr>
+        <p:spPr>
+          <a:xfrm>
+            <a:off x="8275320" y="2240280"/>
+            <a:ext cx="3456432" cy="1600200"/>
+          </a:xfrm>
+          <a:prstGeom prst="rect">
+            <a:avLst/>
+          </a:prstGeom>
+          <a:solidFill>
+            <a:srgbClr val="FFFFFF"/>
+          </a:solidFill>
+          <a:ln w="25400">
+            <a:solidFill>
+              <a:srgbClr val="111111"/>
+            </a:solidFill>
+            <a:prstDash val="solid"/>
+          </a:ln>
+        </p:spPr>
+      </p:sp>
+      <p:sp>
+        <p:nvSpPr>
+          <p:cNvPr id="15" name="Text 13"/>
+          <p:cNvSpPr txBox="1"/>
+          <p:nvPr/>
+        </p:nvSpPr>
+        <p:spPr>
+          <a:xfrm>
+            <a:off x="8458200" y="2423160"/>
+            <a:ext cx="3090672" cy="777240"/>
+          </a:xfrm>
+          <a:prstGeom prst="rect">
+            <a:avLst/>
+          </a:prstGeom>
+          <a:noFill/>
+          <a:ln/>
+        </p:spPr>
+        <p:txBody>
+          <a:bodyPr wrap="square" lIns="0" tIns="0" rIns="0" bIns="0" rtlCol="0" anchor="ctr"/>
+          <a:lstStyle/>
+          <a:p>
+            <a:pPr marL="0" indent="0" algn="ctr">
+              <a:buNone/>
+            </a:pPr>
+            <a:r>
+              <a:rPr lang="en-US" sz="4400" dirty="0">
+                <a:solidFill>
+                  <a:srgbClr val="3D5AFE"/>
+                </a:solidFill>
+                <a:latin typeface="Arial Black" pitchFamily="34" charset="0"/>
+                <a:ea typeface="Arial Black" pitchFamily="34" charset="-122"/>
+                <a:cs typeface="Arial Black" pitchFamily="34" charset="-120"/>
+              </a:rPr>
+              <a:t>[X]%</a:t>
+            </a:r>
+            <a:endParaRPr lang="en-US" sz="4400" dirty="0"/>
+          </a:p>
+        </p:txBody>
+      </p:sp>
+      <p:sp>
+        <p:nvSpPr>
+          <p:cNvPr id="16" name="Text 14"/>
+          <p:cNvSpPr txBox="1"/>
+          <p:nvPr/>
+        </p:nvSpPr>
+        <p:spPr>
+          <a:xfrm>
+            <a:off x="8549640" y="3200400"/>
+            <a:ext cx="2907792" cy="548640"/>
+          </a:xfrm>
+          <a:prstGeom prst="rect">
+            <a:avLst/>
+          </a:prstGeom>
+          <a:noFill/>
+          <a:ln/>
+        </p:spPr>
+        <p:txBody>
+          <a:bodyPr wrap="square" lIns="0" tIns="0" rIns="0" bIns="0" rtlCol="0" anchor="ctr"/>
+          <a:lstStyle/>
+          <a:p>
+            <a:pPr marL="0" indent="0" algn="ctr">
+              <a:buNone/>
+            </a:pPr>
+            <a:r>
+              <a:rPr lang="en-US" sz="1300" dirty="0">
+                <a:solidFill>
+                  <a:srgbClr val="222222"/>
+                </a:solidFill>
+                <a:latin typeface="Arial" pitchFamily="34" charset="0"/>
+                <a:ea typeface="Arial" pitchFamily="34" charset="-122"/>
+                <a:cs typeface="Arial" pitchFamily="34" charset="-120"/>
+              </a:rPr>
+              <a:t>usaría pagos protegidos por entregas</a:t>
+            </a:r>
+            <a:endParaRPr lang="en-US" sz="1300" dirty="0"/>
+          </a:p>
+        </p:txBody>
+      </p:sp>
+      <p:sp>
+        <p:nvSpPr>
+          <p:cNvPr id="17" name="Shape 15"/>
+          <p:cNvSpPr/>
+          <p:nvPr/>
+        </p:nvSpPr>
+        <p:spPr>
+          <a:xfrm>
+            <a:off x="685800" y="4251960"/>
+            <a:ext cx="5349240" cy="1325880"/>
+          </a:xfrm>
+          <a:prstGeom prst="rect">
+            <a:avLst/>
+          </a:prstGeom>
+          <a:solidFill>
+            <a:srgbClr val="111111"/>
+          </a:solidFill>
+          <a:ln/>
+        </p:spPr>
+      </p:sp>
+      <p:sp>
+        <p:nvSpPr>
+          <p:cNvPr id="18" name="Shape 16"/>
+          <p:cNvSpPr/>
+          <p:nvPr/>
+        </p:nvSpPr>
+        <p:spPr>
+          <a:xfrm>
+            <a:off x="594360" y="4160520"/>
+            <a:ext cx="5349240" cy="1325880"/>
+          </a:xfrm>
+          <a:prstGeom prst="rect">
+            <a:avLst/>
+          </a:prstGeom>
+          <a:solidFill>
+            <a:srgbClr val="FFFFFF"/>
+          </a:solidFill>
+          <a:ln w="25400">
+            <a:solidFill>
+              <a:srgbClr val="111111"/>
+            </a:solidFill>
+            <a:prstDash val="solid"/>
+          </a:ln>
+        </p:spPr>
+      </p:sp>
+      <p:sp>
+        <p:nvSpPr>
+          <p:cNvPr id="19" name="Text 17"/>
+          <p:cNvSpPr txBox="1"/>
+          <p:nvPr/>
+        </p:nvSpPr>
+        <p:spPr>
+          <a:xfrm>
+            <a:off x="777240" y="4069080"/>
+            <a:ext cx="640080" cy="640080"/>
+          </a:xfrm>
+          <a:prstGeom prst="rect">
+            <a:avLst/>
+          </a:prstGeom>
+          <a:noFill/>
+          <a:ln/>
+        </p:spPr>
+        <p:txBody>
+          <a:bodyPr wrap="square" lIns="0" tIns="0" rIns="0" bIns="0" rtlCol="0" anchor="ctr"/>
+          <a:lstStyle/>
+          <a:p>
+            <a:pPr marL="0" indent="0">
+              <a:buNone/>
+            </a:pPr>
+            <a:r>
+              <a:rPr lang="en-US" sz="4400" dirty="0">
+                <a:solidFill>
+                  <a:srgbClr val="FDDA24"/>
+                </a:solidFill>
+                <a:latin typeface="Arial Black" pitchFamily="34" charset="0"/>
+                <a:ea typeface="Arial Black" pitchFamily="34" charset="-122"/>
+                <a:cs typeface="Arial Black" pitchFamily="34" charset="-120"/>
+              </a:rPr>
+              <a:t>“</a:t>
+            </a:r>
+            <a:endParaRPr lang="en-US" sz="4400" dirty="0"/>
+          </a:p>
+        </p:txBody>
+      </p:sp>
+      <p:sp>
+        <p:nvSpPr>
+          <p:cNvPr id="20" name="Text 18"/>
+          <p:cNvSpPr txBox="1"/>
+          <p:nvPr/>
+        </p:nvSpPr>
+        <p:spPr>
+          <a:xfrm>
+            <a:off x="1280160" y="4361688"/>
+            <a:ext cx="4434840" cy="658368"/>
+          </a:xfrm>
+          <a:prstGeom prst="rect">
+            <a:avLst/>
+          </a:prstGeom>
+          <a:noFill/>
+          <a:ln/>
+        </p:spPr>
+        <p:txBody>
+          <a:bodyPr wrap="square" lIns="0" tIns="0" rIns="0" bIns="0" rtlCol="0" anchor="ctr"/>
+          <a:lstStyle/>
+          <a:p>
+            <a:pPr marL="0" indent="0">
+              <a:buNone/>
+            </a:pPr>
+            <a:r>
+              <a:rPr lang="en-US" sz="1350" i="1" dirty="0">
+                <a:solidFill>
+                  <a:srgbClr val="222222"/>
+                </a:solidFill>
+                <a:latin typeface="Arial" pitchFamily="34" charset="0"/>
+                <a:ea typeface="Arial" pitchFamily="34" charset="-122"/>
+                <a:cs typeface="Arial" pitchFamily="34" charset="-120"/>
+              </a:rPr>
+              <a:t>[cita real de un freelancer sobre un pago que no llegó]</a:t>
+            </a:r>
+            <a:endParaRPr lang="en-US" sz="1350" dirty="0"/>
+          </a:p>
+        </p:txBody>
+      </p:sp>
+      <p:sp>
+        <p:nvSpPr>
+          <p:cNvPr id="21" name="Text 19"/>
+          <p:cNvSpPr txBox="1"/>
+          <p:nvPr/>
+        </p:nvSpPr>
+        <p:spPr>
+          <a:xfrm>
+            <a:off x="1280160" y="5074920"/>
+            <a:ext cx="4434840" cy="292608"/>
+          </a:xfrm>
+          <a:prstGeom prst="rect">
+            <a:avLst/>
+          </a:prstGeom>
+          <a:noFill/>
+          <a:ln/>
+        </p:spPr>
+        <p:txBody>
+          <a:bodyPr wrap="square" lIns="0" tIns="0" rIns="0" bIns="0" rtlCol="0" anchor="ctr"/>
+          <a:lstStyle/>
+          <a:p>
+            <a:pPr marL="0" indent="0">
+              <a:buNone/>
+            </a:pPr>
+            <a:r>
+              <a:rPr lang="en-US" sz="1150" b="1" dirty="0">
+                <a:solidFill>
+                  <a:srgbClr val="6B6B6B"/>
+                </a:solidFill>
+                <a:latin typeface="Arial" pitchFamily="34" charset="0"/>
+                <a:ea typeface="Arial" pitchFamily="34" charset="-122"/>
+                <a:cs typeface="Arial" pitchFamily="34" charset="-120"/>
+              </a:rPr>
+              <a:t>— Diseñadora, 23 años, La Paz</a:t>
+            </a:r>
+            <a:endParaRPr lang="en-US" sz="1150" dirty="0"/>
+          </a:p>
+        </p:txBody>
+      </p:sp>
+      <p:sp>
+        <p:nvSpPr>
+          <p:cNvPr id="22" name="Shape 20"/>
+          <p:cNvSpPr/>
+          <p:nvPr/>
+        </p:nvSpPr>
+        <p:spPr>
+          <a:xfrm>
+            <a:off x="6428232" y="4251960"/>
+            <a:ext cx="5349240" cy="1325880"/>
+          </a:xfrm>
+          <a:prstGeom prst="rect">
+            <a:avLst/>
+          </a:prstGeom>
+          <a:solidFill>
+            <a:srgbClr val="111111"/>
+          </a:solidFill>
+          <a:ln/>
+        </p:spPr>
+      </p:sp>
+      <p:sp>
+        <p:nvSpPr>
+          <p:cNvPr id="23" name="Shape 21"/>
+          <p:cNvSpPr/>
+          <p:nvPr/>
+        </p:nvSpPr>
+        <p:spPr>
+          <a:xfrm>
+            <a:off x="6336792" y="4160520"/>
+            <a:ext cx="5349240" cy="1325880"/>
+          </a:xfrm>
+          <a:prstGeom prst="rect">
+            <a:avLst/>
+          </a:prstGeom>
+          <a:solidFill>
+            <a:srgbClr val="FFFFFF"/>
+          </a:solidFill>
+          <a:ln w="25400">
+            <a:solidFill>
+              <a:srgbClr val="111111"/>
+            </a:solidFill>
+            <a:prstDash val="solid"/>
+          </a:ln>
+        </p:spPr>
+      </p:sp>
+      <p:sp>
+        <p:nvSpPr>
+          <p:cNvPr id="24" name="Text 22"/>
+          <p:cNvSpPr txBox="1"/>
+          <p:nvPr/>
+        </p:nvSpPr>
+        <p:spPr>
+          <a:xfrm>
+            <a:off x="6519672" y="4069080"/>
+            <a:ext cx="640080" cy="640080"/>
+          </a:xfrm>
+          <a:prstGeom prst="rect">
+            <a:avLst/>
+          </a:prstGeom>
+          <a:noFill/>
+          <a:ln/>
+        </p:spPr>
+        <p:txBody>
+          <a:bodyPr wrap="square" lIns="0" tIns="0" rIns="0" bIns="0" rtlCol="0" anchor="ctr"/>
+          <a:lstStyle/>
+          <a:p>
+            <a:pPr marL="0" indent="0">
+              <a:buNone/>
+            </a:pPr>
+            <a:r>
+              <a:rPr lang="en-US" sz="4400" dirty="0">
+                <a:solidFill>
+                  <a:srgbClr val="FDDA24"/>
+                </a:solidFill>
+                <a:latin typeface="Arial Black" pitchFamily="34" charset="0"/>
+                <a:ea typeface="Arial Black" pitchFamily="34" charset="-122"/>
+                <a:cs typeface="Arial Black" pitchFamily="34" charset="-120"/>
+              </a:rPr>
+              <a:t>“</a:t>
+            </a:r>
+            <a:endParaRPr lang="en-US" sz="4400" dirty="0"/>
+          </a:p>
+        </p:txBody>
+      </p:sp>
+      <p:sp>
+        <p:nvSpPr>
+          <p:cNvPr id="25" name="Text 23"/>
+          <p:cNvSpPr txBox="1"/>
+          <p:nvPr/>
+        </p:nvSpPr>
+        <p:spPr>
+          <a:xfrm>
+            <a:off x="7022592" y="4361688"/>
+            <a:ext cx="4434840" cy="658368"/>
+          </a:xfrm>
+          <a:prstGeom prst="rect">
+            <a:avLst/>
+          </a:prstGeom>
+          <a:noFill/>
+          <a:ln/>
+        </p:spPr>
+        <p:txBody>
+          <a:bodyPr wrap="square" lIns="0" tIns="0" rIns="0" bIns="0" rtlCol="0" anchor="ctr"/>
+          <a:lstStyle/>
+          <a:p>
+            <a:pPr marL="0" indent="0">
+              <a:buNone/>
+            </a:pPr>
+            <a:r>
+              <a:rPr lang="en-US" sz="1350" i="1" dirty="0">
+                <a:solidFill>
+                  <a:srgbClr val="222222"/>
+                </a:solidFill>
+                <a:latin typeface="Arial" pitchFamily="34" charset="0"/>
+                <a:ea typeface="Arial" pitchFamily="34" charset="-122"/>
+                <a:cs typeface="Arial" pitchFamily="34" charset="-120"/>
+              </a:rPr>
+              <a:t>[cita real de una empresa sobre contratar sin confianza]</a:t>
+            </a:r>
+            <a:endParaRPr lang="en-US" sz="1350" dirty="0"/>
+          </a:p>
+        </p:txBody>
+      </p:sp>
+      <p:sp>
+        <p:nvSpPr>
+          <p:cNvPr id="26" name="Text 24"/>
+          <p:cNvSpPr txBox="1"/>
+          <p:nvPr/>
+        </p:nvSpPr>
+        <p:spPr>
+          <a:xfrm>
+            <a:off x="7022592" y="5074920"/>
+            <a:ext cx="4434840" cy="292608"/>
+          </a:xfrm>
+          <a:prstGeom prst="rect">
+            <a:avLst/>
+          </a:prstGeom>
+          <a:noFill/>
+          <a:ln/>
+        </p:spPr>
+        <p:txBody>
+          <a:bodyPr wrap="square" lIns="0" tIns="0" rIns="0" bIns="0" rtlCol="0" anchor="ctr"/>
+          <a:lstStyle/>
+          <a:p>
+            <a:pPr marL="0" indent="0">
+              <a:buNone/>
+            </a:pPr>
+            <a:r>
+              <a:rPr lang="en-US" sz="1150" b="1" dirty="0">
+                <a:solidFill>
+                  <a:srgbClr val="6B6B6B"/>
+                </a:solidFill>
+                <a:latin typeface="Arial" pitchFamily="34" charset="0"/>
+                <a:ea typeface="Arial" pitchFamily="34" charset="-122"/>
+                <a:cs typeface="Arial" pitchFamily="34" charset="-120"/>
+              </a:rPr>
+              <a:t>— Dueño de [rubro], Santa Cruz</a:t>
+            </a:r>
+            <a:endParaRPr lang="en-US" sz="1150" dirty="0"/>
+          </a:p>
+        </p:txBody>
+      </p:sp>
+      <p:sp>
+        <p:nvSpPr>
+          <p:cNvPr id="27" name="Text 25"/>
+          <p:cNvSpPr txBox="1"/>
+          <p:nvPr/>
+        </p:nvSpPr>
+        <p:spPr>
+          <a:xfrm>
+            <a:off x="594360" y="5715000"/>
+            <a:ext cx="11002975" cy="457200"/>
+          </a:xfrm>
+          <a:prstGeom prst="rect">
+            <a:avLst/>
+          </a:prstGeom>
+          <a:noFill/>
+          <a:ln/>
+        </p:spPr>
+        <p:txBody>
+          <a:bodyPr wrap="square" lIns="0" tIns="0" rIns="0" bIns="0" rtlCol="0" anchor="ctr"/>
+          <a:lstStyle/>
+          <a:p>
+            <a:pPr marL="0" indent="0">
+              <a:buNone/>
+            </a:pPr>
+            <a:r>
+              <a:rPr lang="en-US" sz="1200" dirty="0">
+                <a:solidFill>
+                  <a:srgbClr val="111111"/>
+                </a:solidFill>
+                <a:latin typeface="Arial Black" pitchFamily="34" charset="0"/>
+                <a:ea typeface="Arial Black" pitchFamily="34" charset="-122"/>
+                <a:cs typeface="Arial Black" pitchFamily="34" charset="-120"/>
+              </a:rPr>
+              <a:t>QUÉ APRENDIMOS:  </a:t>
+            </a:r>
+            <a:r>
+              <a:rPr lang="en-US" sz="1400" b="1" dirty="0">
+                <a:solidFill>
+                  <a:srgbClr val="3D5AFE"/>
+                </a:solidFill>
+                <a:latin typeface="Arial" pitchFamily="34" charset="0"/>
+                <a:ea typeface="Arial" pitchFamily="34" charset="-122"/>
+                <a:cs typeface="Arial" pitchFamily="34" charset="-120"/>
+              </a:rPr>
+              <a:t>[1–2 hallazgos que cambiaron tu idea]</a:t>
+            </a:r>
+            <a:endParaRPr lang="en-US" sz="1400" dirty="0"/>
+          </a:p>
+        </p:txBody>
+      </p:sp>
+      <p:sp>
+        <p:nvSpPr>
+          <p:cNvPr id="28" name="Text 26"/>
+          <p:cNvSpPr txBox="1"/>
+          <p:nvPr/>
+        </p:nvSpPr>
+        <p:spPr>
+          <a:xfrm>
+            <a:off x="594360" y="6419088"/>
+            <a:ext cx="8229600" cy="301752"/>
+          </a:xfrm>
+          <a:prstGeom prst="rect">
+            <a:avLst/>
+          </a:prstGeom>
+          <a:noFill/>
+          <a:ln/>
+        </p:spPr>
+        <p:txBody>
+          <a:bodyPr wrap="square" lIns="0" tIns="0" rIns="0" bIns="0" rtlCol="0" anchor="ctr"/>
+          <a:lstStyle/>
+          <a:p>
+            <a:pPr marL="0" indent="0">
+              <a:buNone/>
+            </a:pPr>
+            <a:r>
+              <a:rPr lang="en-US" sz="1000" b="1" kern="0" spc="100" dirty="0">
+                <a:solidFill>
+                  <a:srgbClr val="6B6B6B"/>
+                </a:solidFill>
+                <a:latin typeface="Arial" pitchFamily="34" charset="0"/>
+                <a:ea typeface="Arial" pitchFamily="34" charset="-122"/>
+                <a:cs typeface="Arial" pitchFamily="34" charset="-120"/>
+              </a:rPr>
+              <a:t>IDEATÓN STELLAR BOLIVIA 2026  ·  WORKING</a:t>
+            </a:r>
+            <a:endParaRPr lang="en-US" sz="1000" dirty="0"/>
+          </a:p>
+        </p:txBody>
+      </p:sp>
+      <p:sp>
+        <p:nvSpPr>
+          <p:cNvPr id="29" name="Text 27"/>
+          <p:cNvSpPr txBox="1"/>
+          <p:nvPr/>
+        </p:nvSpPr>
+        <p:spPr>
+          <a:xfrm>
+            <a:off x="10682935" y="6419088"/>
+            <a:ext cx="914400" cy="301752"/>
+          </a:xfrm>
+          <a:prstGeom prst="rect">
+            <a:avLst/>
+          </a:prstGeom>
+          <a:noFill/>
+          <a:ln/>
+        </p:spPr>
+        <p:txBody>
+          <a:bodyPr wrap="square" lIns="0" tIns="0" rIns="0" bIns="0" rtlCol="0" anchor="ctr"/>
+          <a:lstStyle/>
+          <a:p>
+            <a:pPr marL="0" indent="0" algn="r">
+              <a:buNone/>
+            </a:pPr>
+            <a:r>
+              <a:rPr lang="en-US" sz="1100" dirty="0">
+                <a:solidFill>
+                  <a:srgbClr val="111111"/>
+                </a:solidFill>
+                <a:latin typeface="Arial Black" pitchFamily="34" charset="0"/>
+                <a:ea typeface="Arial Black" pitchFamily="34" charset="-122"/>
+                <a:cs typeface="Arial Black" pitchFamily="34" charset="-120"/>
+              </a:rPr>
+              <a:t>03</a:t>
             </a:r>
             <a:endParaRPr lang="en-US" sz="1100" dirty="0"/>
           </a:p>
@@ -11400,6 +11404,7 @@
         <a:solidFill>
           <a:srgbClr val="111111"/>
         </a:solidFill>
+        <a:effectLst/>
       </p:bgPr>
     </p:bg>
     <p:spTree>
@@ -11437,11 +11442,11 @@
           <a:bodyPr wrap="square" lIns="0" tIns="0" rIns="0" bIns="0" rtlCol="0" anchor="ctr"/>
           <a:lstStyle/>
           <a:p>
-            <a:pPr indent="0" marL="0">
+            <a:pPr marL="0" indent="0">
               <a:buNone/>
             </a:pPr>
             <a:r>
-              <a:rPr lang="en-US" sz="1200" spc="200" kern="0" dirty="0">
+              <a:rPr lang="en-US" sz="1200" kern="0" spc="200" dirty="0">
                 <a:solidFill>
                   <a:srgbClr val="FDDA24"/>
                 </a:solidFill>
@@ -11476,7 +11481,7 @@
           <a:bodyPr wrap="square" lIns="0" tIns="0" rIns="0" bIns="0" rtlCol="0" anchor="ctr"/>
           <a:lstStyle/>
           <a:p>
-            <a:pPr indent="0" marL="0">
+            <a:pPr marL="0" indent="0">
               <a:buNone/>
             </a:pPr>
             <a:r>
@@ -11560,7 +11565,7 @@
           <a:bodyPr wrap="square" lIns="0" tIns="0" rIns="0" bIns="0" rtlCol="0" anchor="ctr"/>
           <a:lstStyle/>
           <a:p>
-            <a:pPr algn="ctr" indent="0" marL="0">
+            <a:pPr marL="0" indent="0" algn="ctr">
               <a:buNone/>
             </a:pPr>
             <a:r>
@@ -11572,7 +11577,7 @@
                 <a:ea typeface="Arial Black" pitchFamily="34" charset="-122"/>
                 <a:cs typeface="Arial Black" pitchFamily="34" charset="-120"/>
               </a:rPr>
-              <a:t>[Nombre]</a:t>
+              <a:t>Jose Miguel Bustamante</a:t>
             </a:r>
             <a:endParaRPr lang="en-US" sz="1500" dirty="0"/>
           </a:p>
@@ -11599,7 +11604,7 @@
           <a:bodyPr wrap="square" lIns="0" tIns="0" rIns="0" bIns="0" rtlCol="0" anchor="ctr"/>
           <a:lstStyle/>
           <a:p>
-            <a:pPr algn="ctr" indent="0" marL="0">
+            <a:pPr marL="0" indent="0" algn="ctr">
               <a:buNone/>
             </a:pPr>
             <a:r>
@@ -11683,7 +11688,7 @@
           <a:bodyPr wrap="square" lIns="0" tIns="0" rIns="0" bIns="0" rtlCol="0" anchor="ctr"/>
           <a:lstStyle/>
           <a:p>
-            <a:pPr algn="ctr" indent="0" marL="0">
+            <a:pPr marL="0" indent="0" algn="ctr">
               <a:buNone/>
             </a:pPr>
             <a:r>
@@ -11695,7 +11700,7 @@
                 <a:ea typeface="Arial Black" pitchFamily="34" charset="-122"/>
                 <a:cs typeface="Arial Black" pitchFamily="34" charset="-120"/>
               </a:rPr>
-              <a:t>[Nombre]</a:t>
+              <a:t>Jose Miguel Bustamante</a:t>
             </a:r>
             <a:endParaRPr lang="en-US" sz="1500" dirty="0"/>
           </a:p>
@@ -11722,7 +11727,7 @@
           <a:bodyPr wrap="square" lIns="0" tIns="0" rIns="0" bIns="0" rtlCol="0" anchor="ctr"/>
           <a:lstStyle/>
           <a:p>
-            <a:pPr algn="ctr" indent="0" marL="0">
+            <a:pPr marL="0" indent="0" algn="ctr">
               <a:buNone/>
             </a:pPr>
             <a:r>
@@ -11806,7 +11811,7 @@
           <a:bodyPr wrap="square" lIns="0" tIns="0" rIns="0" bIns="0" rtlCol="0" anchor="ctr"/>
           <a:lstStyle/>
           <a:p>
-            <a:pPr algn="ctr" indent="0" marL="0">
+            <a:pPr marL="0" indent="0" algn="ctr">
               <a:buNone/>
             </a:pPr>
             <a:r>
@@ -11818,7 +11823,7 @@
                 <a:ea typeface="Arial Black" pitchFamily="34" charset="-122"/>
                 <a:cs typeface="Arial Black" pitchFamily="34" charset="-120"/>
               </a:rPr>
-              <a:t>[Nombre]</a:t>
+              <a:t>Jose Miguel Bustamante</a:t>
             </a:r>
             <a:endParaRPr lang="en-US" sz="1500" dirty="0"/>
           </a:p>
@@ -11845,7 +11850,7 @@
           <a:bodyPr wrap="square" lIns="0" tIns="0" rIns="0" bIns="0" rtlCol="0" anchor="ctr"/>
           <a:lstStyle/>
           <a:p>
-            <a:pPr algn="ctr" indent="0" marL="0">
+            <a:pPr marL="0" indent="0" algn="ctr">
               <a:buNone/>
             </a:pPr>
             <a:r>
@@ -11884,7 +11889,7 @@
           <a:bodyPr wrap="square" lIns="0" tIns="0" rIns="0" bIns="0" rtlCol="0" anchor="ctr"/>
           <a:lstStyle/>
           <a:p>
-            <a:pPr indent="0" marL="0">
+            <a:pPr marL="0" indent="0">
               <a:buNone/>
             </a:pPr>
             <a:r>
@@ -11898,9 +11903,6 @@
               </a:rPr>
               <a:t>QUÉ BUSCAMOS:  </a:t>
             </a:r>
-            <a:pPr indent="0" marL="0">
-              <a:buNone/>
-            </a:pPr>
             <a:r>
               <a:rPr lang="en-US" sz="1400" dirty="0">
                 <a:solidFill>
@@ -11960,7 +11962,7 @@
           <a:bodyPr wrap="square" lIns="0" tIns="0" rIns="0" bIns="0" rtlCol="0" anchor="ctr"/>
           <a:lstStyle/>
           <a:p>
-            <a:pPr indent="0" marL="0">
+            <a:pPr marL="0" indent="0">
               <a:lnSpc>
                 <a:spcPct val="100000"/>
               </a:lnSpc>
@@ -11980,7 +11982,7 @@
             <a:endParaRPr lang="en-US" sz="2800" dirty="0"/>
           </a:p>
           <a:p>
-            <a:pPr indent="0" marL="0">
+            <a:pPr marL="0" indent="0">
               <a:lnSpc>
                 <a:spcPct val="100000"/>
               </a:lnSpc>
@@ -12000,7 +12002,7 @@
             <a:endParaRPr lang="en-US" sz="2800" dirty="0"/>
           </a:p>
           <a:p>
-            <a:pPr indent="0" marL="0">
+            <a:pPr marL="0" indent="0">
               <a:lnSpc>
                 <a:spcPct val="100000"/>
               </a:lnSpc>
@@ -12017,12 +12019,6 @@
               </a:rPr>
               <a:t>LO QUE SABES HACER</a:t>
             </a:r>
-            <a:pPr indent="0" marL="0">
-              <a:lnSpc>
-                <a:spcPct val="100000"/>
-              </a:lnSpc>
-              <a:buNone/>
-            </a:pPr>
             <a:r>
               <a:rPr lang="en-US" sz="2800" dirty="0">
                 <a:solidFill>
@@ -12059,20 +12055,9 @@
           <a:bodyPr wrap="square" lIns="0" tIns="0" rIns="0" bIns="0" rtlCol="0" anchor="ctr"/>
           <a:lstStyle/>
           <a:p>
-            <a:pPr indent="0" marL="0">
+            <a:pPr marL="0" indent="0">
               <a:buNone/>
             </a:pPr>
-            <a:r>
-              <a:rPr lang="en-US" sz="1200" dirty="0">
-                <a:solidFill>
-                  <a:srgbClr val="6B6B6B"/>
-                </a:solidFill>
-                <a:latin typeface="Arial" pitchFamily="34" charset="0"/>
-                <a:ea typeface="Arial" pitchFamily="34" charset="-122"/>
-                <a:cs typeface="Arial" pitchFamily="34" charset="-120"/>
-              </a:rPr>
-              <a:t>[correo]   ·   [Instagram / LinkedIn]   ·   @stellar_bolivia</a:t>
-            </a:r>
             <a:endParaRPr lang="en-US" sz="1200" dirty="0"/>
           </a:p>
         </p:txBody>
@@ -12378,4 +12363,299 @@
     </a:ext>
   </a:extLst>
 </a:theme>
+</file>
+
+<file path=ppt/theme/theme2.xml><?xml version="1.0" encoding="utf-8"?>
+<a:theme xmlns:a="http://schemas.openxmlformats.org/drawingml/2006/main" name="Tema de Office">
+  <a:themeElements>
+    <a:clrScheme name="Office">
+      <a:dk1>
+        <a:sysClr val="windowText" lastClr="000000"/>
+      </a:dk1>
+      <a:lt1>
+        <a:sysClr val="window" lastClr="FFFFFF"/>
+      </a:lt1>
+      <a:dk2>
+        <a:srgbClr val="44546A"/>
+      </a:dk2>
+      <a:lt2>
+        <a:srgbClr val="E7E6E6"/>
+      </a:lt2>
+      <a:accent1>
+        <a:srgbClr val="4472C4"/>
+      </a:accent1>
+      <a:accent2>
+        <a:srgbClr val="ED7D31"/>
+      </a:accent2>
+      <a:accent3>
+        <a:srgbClr val="A5A5A5"/>
+      </a:accent3>
+      <a:accent4>
+        <a:srgbClr val="FFC000"/>
+      </a:accent4>
+      <a:accent5>
+        <a:srgbClr val="5B9BD5"/>
+      </a:accent5>
+      <a:accent6>
+        <a:srgbClr val="70AD47"/>
+      </a:accent6>
+      <a:hlink>
+        <a:srgbClr val="0563C1"/>
+      </a:hlink>
+      <a:folHlink>
+        <a:srgbClr val="954F72"/>
+      </a:folHlink>
+    </a:clrScheme>
+    <a:fontScheme name="Office">
+      <a:majorFont>
+        <a:latin typeface="Calibri Light" panose="020F0302020204030204"/>
+        <a:ea typeface=""/>
+        <a:cs typeface=""/>
+        <a:font script="Jpan" typeface="游ゴシック Light"/>
+        <a:font script="Hang" typeface="맑은 고딕"/>
+        <a:font script="Hans" typeface="等线 Light"/>
+        <a:font script="Hant" typeface="新細明體"/>
+        <a:font script="Arab" typeface="Times New Roman"/>
+        <a:font script="Hebr" typeface="Times New Roman"/>
+        <a:font script="Thai" typeface="Angsana New"/>
+        <a:font script="Ethi" typeface="Nyala"/>
+        <a:font script="Beng" typeface="Vrinda"/>
+        <a:font script="Gujr" typeface="Shruti"/>
+        <a:font script="Khmr" typeface="MoolBoran"/>
+        <a:font script="Knda" typeface="Tunga"/>
+        <a:font script="Guru" typeface="Raavi"/>
+        <a:font script="Cans" typeface="Euphemia"/>
+        <a:font script="Cher" typeface="Plantagenet Cherokee"/>
+        <a:font script="Yiii" typeface="Microsoft Yi Baiti"/>
+        <a:font script="Tibt" typeface="Microsoft Himalaya"/>
+        <a:font script="Thaa" typeface="MV Boli"/>
+        <a:font script="Deva" typeface="Mangal"/>
+        <a:font script="Telu" typeface="Gautami"/>
+        <a:font script="Taml" typeface="Latha"/>
+        <a:font script="Syrc" typeface="Estrangelo Edessa"/>
+        <a:font script="Orya" typeface="Kalinga"/>
+        <a:font script="Mlym" typeface="Kartika"/>
+        <a:font script="Laoo" typeface="DokChampa"/>
+        <a:font script="Sinh" typeface="Iskoola Pota"/>
+        <a:font script="Mong" typeface="Mongolian Baiti"/>
+        <a:font script="Viet" typeface="Times New Roman"/>
+        <a:font script="Uigh" typeface="Microsoft Uighur"/>
+        <a:font script="Geor" typeface="Sylfaen"/>
+        <a:font script="Armn" typeface="Arial"/>
+        <a:font script="Bugi" typeface="Leelawadee UI"/>
+        <a:font script="Bopo" typeface="Microsoft JhengHei"/>
+        <a:font script="Java" typeface="Javanese Text"/>
+        <a:font script="Lisu" typeface="Segoe UI"/>
+        <a:font script="Mymr" typeface="Myanmar Text"/>
+        <a:font script="Nkoo" typeface="Ebrima"/>
+        <a:font script="Olck" typeface="Nirmala UI"/>
+        <a:font script="Osma" typeface="Ebrima"/>
+        <a:font script="Phag" typeface="Phagspa"/>
+        <a:font script="Syrn" typeface="Estrangelo Edessa"/>
+        <a:font script="Syrj" typeface="Estrangelo Edessa"/>
+        <a:font script="Syre" typeface="Estrangelo Edessa"/>
+        <a:font script="Sora" typeface="Nirmala UI"/>
+        <a:font script="Tale" typeface="Microsoft Tai Le"/>
+        <a:font script="Talu" typeface="Microsoft New Tai Lue"/>
+        <a:font script="Tfng" typeface="Ebrima"/>
+      </a:majorFont>
+      <a:minorFont>
+        <a:latin typeface="Calibri" panose="020F0502020204030204"/>
+        <a:ea typeface=""/>
+        <a:cs typeface=""/>
+        <a:font script="Jpan" typeface="游ゴシック"/>
+        <a:font script="Hang" typeface="맑은 고딕"/>
+        <a:font script="Hans" typeface="等线"/>
+        <a:font script="Hant" typeface="新細明體"/>
+        <a:font script="Arab" typeface="Arial"/>
+        <a:font script="Hebr" typeface="Arial"/>
+        <a:font script="Thai" typeface="Cordia New"/>
+        <a:font script="Ethi" typeface="Nyala"/>
+        <a:font script="Beng" typeface="Vrinda"/>
+        <a:font script="Gujr" typeface="Shruti"/>
+        <a:font script="Khmr" typeface="DaunPenh"/>
+        <a:font script="Knda" typeface="Tunga"/>
+        <a:font script="Guru" typeface="Raavi"/>
+        <a:font script="Cans" typeface="Euphemia"/>
+        <a:font script="Cher" typeface="Plantagenet Cherokee"/>
+        <a:font script="Yiii" typeface="Microsoft Yi Baiti"/>
+        <a:font script="Tibt" typeface="Microsoft Himalaya"/>
+        <a:font script="Thaa" typeface="MV Boli"/>
+        <a:font script="Deva" typeface="Mangal"/>
+        <a:font script="Telu" typeface="Gautami"/>
+        <a:font script="Taml" typeface="Latha"/>
+        <a:font script="Syrc" typeface="Estrangelo Edessa"/>
+        <a:font script="Orya" typeface="Kalinga"/>
+        <a:font script="Mlym" typeface="Kartika"/>
+        <a:font script="Laoo" typeface="DokChampa"/>
+        <a:font script="Sinh" typeface="Iskoola Pota"/>
+        <a:font script="Mong" typeface="Mongolian Baiti"/>
+        <a:font script="Viet" typeface="Arial"/>
+        <a:font script="Uigh" typeface="Microsoft Uighur"/>
+        <a:font script="Geor" typeface="Sylfaen"/>
+        <a:font script="Armn" typeface="Arial"/>
+        <a:font script="Bugi" typeface="Leelawadee UI"/>
+        <a:font script="Bopo" typeface="Microsoft JhengHei"/>
+        <a:font script="Java" typeface="Javanese Text"/>
+        <a:font script="Lisu" typeface="Segoe UI"/>
+        <a:font script="Mymr" typeface="Myanmar Text"/>
+        <a:font script="Nkoo" typeface="Ebrima"/>
+        <a:font script="Olck" typeface="Nirmala UI"/>
+        <a:font script="Osma" typeface="Ebrima"/>
+        <a:font script="Phag" typeface="Phagspa"/>
+        <a:font script="Syrn" typeface="Estrangelo Edessa"/>
+        <a:font script="Syrj" typeface="Estrangelo Edessa"/>
+        <a:font script="Syre" typeface="Estrangelo Edessa"/>
+        <a:font script="Sora" typeface="Nirmala UI"/>
+        <a:font script="Tale" typeface="Microsoft Tai Le"/>
+        <a:font script="Talu" typeface="Microsoft New Tai Lue"/>
+        <a:font script="Tfng" typeface="Ebrima"/>
+      </a:minorFont>
+    </a:fontScheme>
+    <a:fmtScheme name="Office">
+      <a:fillStyleLst>
+        <a:solidFill>
+          <a:schemeClr val="phClr"/>
+        </a:solidFill>
+        <a:gradFill rotWithShape="1">
+          <a:gsLst>
+            <a:gs pos="0">
+              <a:schemeClr val="phClr">
+                <a:lumMod val="110000"/>
+                <a:satMod val="105000"/>
+                <a:tint val="67000"/>
+              </a:schemeClr>
+            </a:gs>
+            <a:gs pos="50000">
+              <a:schemeClr val="phClr">
+                <a:lumMod val="105000"/>
+                <a:satMod val="103000"/>
+                <a:tint val="73000"/>
+              </a:schemeClr>
+            </a:gs>
+            <a:gs pos="100000">
+              <a:schemeClr val="phClr">
+                <a:lumMod val="105000"/>
+                <a:satMod val="109000"/>
+                <a:tint val="81000"/>
+              </a:schemeClr>
+            </a:gs>
+          </a:gsLst>
+          <a:lin ang="5400000" scaled="0"/>
+        </a:gradFill>
+        <a:gradFill rotWithShape="1">
+          <a:gsLst>
+            <a:gs pos="0">
+              <a:schemeClr val="phClr">
+                <a:satMod val="103000"/>
+                <a:lumMod val="102000"/>
+                <a:tint val="94000"/>
+              </a:schemeClr>
+            </a:gs>
+            <a:gs pos="50000">
+              <a:schemeClr val="phClr">
+                <a:satMod val="110000"/>
+                <a:lumMod val="100000"/>
+                <a:shade val="100000"/>
+              </a:schemeClr>
+            </a:gs>
+            <a:gs pos="100000">
+              <a:schemeClr val="phClr">
+                <a:lumMod val="99000"/>
+                <a:satMod val="120000"/>
+                <a:shade val="78000"/>
+              </a:schemeClr>
+            </a:gs>
+          </a:gsLst>
+          <a:lin ang="5400000" scaled="0"/>
+        </a:gradFill>
+      </a:fillStyleLst>
+      <a:lnStyleLst>
+        <a:ln w="6350" cap="flat" cmpd="sng" algn="ctr">
+          <a:solidFill>
+            <a:schemeClr val="phClr"/>
+          </a:solidFill>
+          <a:prstDash val="solid"/>
+          <a:miter lim="800000"/>
+        </a:ln>
+        <a:ln w="12700" cap="flat" cmpd="sng" algn="ctr">
+          <a:solidFill>
+            <a:schemeClr val="phClr"/>
+          </a:solidFill>
+          <a:prstDash val="solid"/>
+          <a:miter lim="800000"/>
+        </a:ln>
+        <a:ln w="19050" cap="flat" cmpd="sng" algn="ctr">
+          <a:solidFill>
+            <a:schemeClr val="phClr"/>
+          </a:solidFill>
+          <a:prstDash val="solid"/>
+          <a:miter lim="800000"/>
+        </a:ln>
+      </a:lnStyleLst>
+      <a:effectStyleLst>
+        <a:effectStyle>
+          <a:effectLst/>
+        </a:effectStyle>
+        <a:effectStyle>
+          <a:effectLst/>
+        </a:effectStyle>
+        <a:effectStyle>
+          <a:effectLst>
+            <a:outerShdw blurRad="57150" dist="19050" dir="5400000" algn="ctr" rotWithShape="0">
+              <a:srgbClr val="000000">
+                <a:alpha val="63000"/>
+              </a:srgbClr>
+            </a:outerShdw>
+          </a:effectLst>
+        </a:effectStyle>
+      </a:effectStyleLst>
+      <a:bgFillStyleLst>
+        <a:solidFill>
+          <a:schemeClr val="phClr"/>
+        </a:solidFill>
+        <a:solidFill>
+          <a:schemeClr val="phClr">
+            <a:tint val="95000"/>
+            <a:satMod val="170000"/>
+          </a:schemeClr>
+        </a:solidFill>
+        <a:gradFill rotWithShape="1">
+          <a:gsLst>
+            <a:gs pos="0">
+              <a:schemeClr val="phClr">
+                <a:tint val="93000"/>
+                <a:satMod val="150000"/>
+                <a:shade val="98000"/>
+                <a:lumMod val="102000"/>
+              </a:schemeClr>
+            </a:gs>
+            <a:gs pos="50000">
+              <a:schemeClr val="phClr">
+                <a:tint val="98000"/>
+                <a:satMod val="130000"/>
+                <a:shade val="90000"/>
+                <a:lumMod val="103000"/>
+              </a:schemeClr>
+            </a:gs>
+            <a:gs pos="100000">
+              <a:schemeClr val="phClr">
+                <a:shade val="63000"/>
+                <a:satMod val="120000"/>
+              </a:schemeClr>
+            </a:gs>
+          </a:gsLst>
+          <a:lin ang="5400000" scaled="0"/>
+        </a:gradFill>
+      </a:bgFillStyleLst>
+    </a:fmtScheme>
+  </a:themeElements>
+  <a:objectDefaults/>
+  <a:extraClrSchemeLst/>
+  <a:extLst>
+    <a:ext uri="{05A4C25C-085E-4340-85A3-A5531E510DB2}">
+      <thm15:themeFamily xmlns:thm15="http://schemas.microsoft.com/office/thememl/2012/main" name="Office Theme" id="{62F939B6-93AF-4DB8-9C6B-D6C7DFDC589F}" vid="{4A3C46E8-61CC-4603-A589-7422A47A8E4A}"/>
+    </a:ext>
+  </a:extLst>
+</a:theme>
 </file>